--- a/data-eng/decks/w5d5s2.pptx
+++ b/data-eng/decks/w5d5s2.pptx
@@ -3099,7 +3099,7 @@
       <p:grpSpPr/>
       <p:sp>
         <p:nvSpPr>
-          <p:cNvPr id="2" name="Oval 1"/>
+          <p:cNvPr id="2" name="deckgen:decor"/>
           <p:cNvSpPr/>
           <p:nvPr/>
         </p:nvSpPr>
@@ -3129,7 +3129,7 @@
       </p:sp>
       <p:sp>
         <p:nvSpPr>
-          <p:cNvPr id="3" name="Oval 2"/>
+          <p:cNvPr id="3" name="deckgen:decor"/>
           <p:cNvSpPr/>
           <p:nvPr/>
         </p:nvSpPr>
@@ -3159,7 +3159,7 @@
       </p:sp>
       <p:sp>
         <p:nvSpPr>
-          <p:cNvPr id="4" name="Oval 3"/>
+          <p:cNvPr id="4" name="deckgen:decor"/>
           <p:cNvSpPr/>
           <p:nvPr/>
         </p:nvSpPr>
@@ -3189,7 +3189,7 @@
       </p:sp>
       <p:sp>
         <p:nvSpPr>
-          <p:cNvPr id="5" name="Rectangle 4"/>
+          <p:cNvPr id="5" name="deckgen:decor"/>
           <p:cNvSpPr/>
           <p:nvPr/>
         </p:nvSpPr>
@@ -3219,7 +3219,7 @@
       </p:sp>
       <p:sp>
         <p:nvSpPr>
-          <p:cNvPr id="6" name="Oval 5"/>
+          <p:cNvPr id="6" name="deckgen:decor"/>
           <p:cNvSpPr/>
           <p:nvPr/>
         </p:nvSpPr>
@@ -3249,7 +3249,7 @@
       </p:sp>
       <p:sp>
         <p:nvSpPr>
-          <p:cNvPr id="7" name="Oval 6"/>
+          <p:cNvPr id="7" name="deckgen:decor"/>
           <p:cNvSpPr/>
           <p:nvPr/>
         </p:nvSpPr>
@@ -3279,7 +3279,7 @@
       </p:sp>
       <p:sp>
         <p:nvSpPr>
-          <p:cNvPr id="8" name="Oval 7"/>
+          <p:cNvPr id="8" name="deckgen:decor"/>
           <p:cNvSpPr/>
           <p:nvPr/>
         </p:nvSpPr>
@@ -3309,7 +3309,7 @@
       </p:sp>
       <p:sp>
         <p:nvSpPr>
-          <p:cNvPr id="9" name="Oval 8"/>
+          <p:cNvPr id="9" name="deckgen:decor"/>
           <p:cNvSpPr/>
           <p:nvPr/>
         </p:nvSpPr>
@@ -3339,7 +3339,7 @@
       </p:sp>
       <p:sp>
         <p:nvSpPr>
-          <p:cNvPr id="10" name="Rectangle 9"/>
+          <p:cNvPr id="10" name="deckgen:decor"/>
           <p:cNvSpPr/>
           <p:nvPr/>
         </p:nvSpPr>
@@ -3617,7 +3617,7 @@
       <p:grpSpPr/>
       <p:sp>
         <p:nvSpPr>
-          <p:cNvPr id="2" name="Oval 1"/>
+          <p:cNvPr id="2" name="deckgen:decor"/>
           <p:cNvSpPr/>
           <p:nvPr/>
         </p:nvSpPr>
@@ -3647,7 +3647,7 @@
       </p:sp>
       <p:sp>
         <p:nvSpPr>
-          <p:cNvPr id="3" name="Oval 2"/>
+          <p:cNvPr id="3" name="deckgen:decor"/>
           <p:cNvSpPr/>
           <p:nvPr/>
         </p:nvSpPr>
@@ -4424,7 +4424,7 @@
       <p:grpSpPr/>
       <p:sp>
         <p:nvSpPr>
-          <p:cNvPr id="2" name="Oval 1"/>
+          <p:cNvPr id="2" name="deckgen:decor"/>
           <p:cNvSpPr/>
           <p:nvPr/>
         </p:nvSpPr>
@@ -4454,7 +4454,7 @@
       </p:sp>
       <p:sp>
         <p:nvSpPr>
-          <p:cNvPr id="3" name="Oval 2"/>
+          <p:cNvPr id="3" name="deckgen:decor"/>
           <p:cNvSpPr/>
           <p:nvPr/>
         </p:nvSpPr>
@@ -4484,7 +4484,7 @@
       </p:sp>
       <p:sp>
         <p:nvSpPr>
-          <p:cNvPr id="4" name="Oval 3"/>
+          <p:cNvPr id="4" name="deckgen:decor"/>
           <p:cNvSpPr/>
           <p:nvPr/>
         </p:nvSpPr>
@@ -5415,7 +5415,7 @@
       <p:grpSpPr/>
       <p:sp>
         <p:nvSpPr>
-          <p:cNvPr id="2" name="Oval 1"/>
+          <p:cNvPr id="2" name="deckgen:decor"/>
           <p:cNvSpPr/>
           <p:nvPr/>
         </p:nvSpPr>
@@ -5445,7 +5445,7 @@
       </p:sp>
       <p:sp>
         <p:nvSpPr>
-          <p:cNvPr id="3" name="Oval 2"/>
+          <p:cNvPr id="3" name="deckgen:decor"/>
           <p:cNvSpPr/>
           <p:nvPr/>
         </p:nvSpPr>
@@ -5475,7 +5475,7 @@
       </p:sp>
       <p:sp>
         <p:nvSpPr>
-          <p:cNvPr id="4" name="Oval 3"/>
+          <p:cNvPr id="4" name="deckgen:decor"/>
           <p:cNvSpPr/>
           <p:nvPr/>
         </p:nvSpPr>
@@ -6608,7 +6608,7 @@
       <p:grpSpPr/>
       <p:sp>
         <p:nvSpPr>
-          <p:cNvPr id="2" name="Oval 1"/>
+          <p:cNvPr id="2" name="deckgen:decor"/>
           <p:cNvSpPr/>
           <p:nvPr/>
         </p:nvSpPr>
@@ -6638,7 +6638,7 @@
       </p:sp>
       <p:sp>
         <p:nvSpPr>
-          <p:cNvPr id="3" name="Oval 2"/>
+          <p:cNvPr id="3" name="deckgen:decor"/>
           <p:cNvSpPr/>
           <p:nvPr/>
         </p:nvSpPr>
@@ -6668,7 +6668,7 @@
       </p:sp>
       <p:sp>
         <p:nvSpPr>
-          <p:cNvPr id="4" name="Oval 3"/>
+          <p:cNvPr id="4" name="deckgen:decor"/>
           <p:cNvSpPr/>
           <p:nvPr/>
         </p:nvSpPr>
@@ -7701,7 +7701,7 @@
       <p:grpSpPr/>
       <p:sp>
         <p:nvSpPr>
-          <p:cNvPr id="2" name="Oval 1"/>
+          <p:cNvPr id="2" name="deckgen:decor"/>
           <p:cNvSpPr/>
           <p:nvPr/>
         </p:nvSpPr>
@@ -7731,7 +7731,7 @@
       </p:sp>
       <p:sp>
         <p:nvSpPr>
-          <p:cNvPr id="3" name="Oval 2"/>
+          <p:cNvPr id="3" name="deckgen:decor"/>
           <p:cNvSpPr/>
           <p:nvPr/>
         </p:nvSpPr>
@@ -7761,7 +7761,7 @@
       </p:sp>
       <p:sp>
         <p:nvSpPr>
-          <p:cNvPr id="4" name="Oval 3"/>
+          <p:cNvPr id="4" name="deckgen:decor"/>
           <p:cNvSpPr/>
           <p:nvPr/>
         </p:nvSpPr>
@@ -8728,7 +8728,7 @@
       <p:grpSpPr/>
       <p:sp>
         <p:nvSpPr>
-          <p:cNvPr id="2" name="Oval 1"/>
+          <p:cNvPr id="2" name="deckgen:decor"/>
           <p:cNvSpPr/>
           <p:nvPr/>
         </p:nvSpPr>
@@ -8758,7 +8758,7 @@
       </p:sp>
       <p:sp>
         <p:nvSpPr>
-          <p:cNvPr id="3" name="Oval 2"/>
+          <p:cNvPr id="3" name="deckgen:decor"/>
           <p:cNvSpPr/>
           <p:nvPr/>
         </p:nvSpPr>
@@ -8788,7 +8788,7 @@
       </p:sp>
       <p:sp>
         <p:nvSpPr>
-          <p:cNvPr id="4" name="Oval 3"/>
+          <p:cNvPr id="4" name="deckgen:decor"/>
           <p:cNvSpPr/>
           <p:nvPr/>
         </p:nvSpPr>
@@ -9789,7 +9789,7 @@
       <p:grpSpPr/>
       <p:sp>
         <p:nvSpPr>
-          <p:cNvPr id="2" name="Oval 1"/>
+          <p:cNvPr id="2" name="deckgen:decor"/>
           <p:cNvSpPr/>
           <p:nvPr/>
         </p:nvSpPr>
@@ -9819,7 +9819,7 @@
       </p:sp>
       <p:sp>
         <p:nvSpPr>
-          <p:cNvPr id="3" name="Oval 2"/>
+          <p:cNvPr id="3" name="deckgen:decor"/>
           <p:cNvSpPr/>
           <p:nvPr/>
         </p:nvSpPr>
@@ -9849,7 +9849,7 @@
       </p:sp>
       <p:sp>
         <p:nvSpPr>
-          <p:cNvPr id="4" name="Oval 3"/>
+          <p:cNvPr id="4" name="deckgen:decor"/>
           <p:cNvSpPr/>
           <p:nvPr/>
         </p:nvSpPr>
@@ -10887,7 +10887,7 @@
       <p:grpSpPr/>
       <p:sp>
         <p:nvSpPr>
-          <p:cNvPr id="2" name="Oval 1"/>
+          <p:cNvPr id="2" name="deckgen:decor"/>
           <p:cNvSpPr/>
           <p:nvPr/>
         </p:nvSpPr>
@@ -10917,7 +10917,7 @@
       </p:sp>
       <p:sp>
         <p:nvSpPr>
-          <p:cNvPr id="3" name="Oval 2"/>
+          <p:cNvPr id="3" name="deckgen:decor"/>
           <p:cNvSpPr/>
           <p:nvPr/>
         </p:nvSpPr>
@@ -10947,7 +10947,7 @@
       </p:sp>
       <p:sp>
         <p:nvSpPr>
-          <p:cNvPr id="4" name="Oval 3"/>
+          <p:cNvPr id="4" name="deckgen:decor"/>
           <p:cNvSpPr/>
           <p:nvPr/>
         </p:nvSpPr>
@@ -11658,7 +11658,7 @@
                 <a:ea typeface="Pretendard"/>
                 <a:cs typeface="Pretendard"/>
               </a:rPr>
-              <a:t>docker run --rm --network week5_default minio/mc sh -c …</a:t>
+              <a:t>docker run --rm --network week5_default --entrypoint sh pgsty/mc -c …</a:t>
             </a:r>
           </a:p>
         </p:txBody>
@@ -11980,7 +11980,7 @@
       <p:grpSpPr/>
       <p:sp>
         <p:nvSpPr>
-          <p:cNvPr id="2" name="Oval 1"/>
+          <p:cNvPr id="2" name="deckgen:decor"/>
           <p:cNvSpPr/>
           <p:nvPr/>
         </p:nvSpPr>
@@ -12010,7 +12010,7 @@
       </p:sp>
       <p:sp>
         <p:nvSpPr>
-          <p:cNvPr id="3" name="Oval 2"/>
+          <p:cNvPr id="3" name="deckgen:decor"/>
           <p:cNvSpPr/>
           <p:nvPr/>
         </p:nvSpPr>
@@ -12040,7 +12040,7 @@
       </p:sp>
       <p:sp>
         <p:nvSpPr>
-          <p:cNvPr id="4" name="Oval 3"/>
+          <p:cNvPr id="4" name="deckgen:decor"/>
           <p:cNvSpPr/>
           <p:nvPr/>
         </p:nvSpPr>

--- a/data-eng/decks/w5d5s2.pptx
+++ b/data-eng/decks/w5d5s2.pptx
@@ -15,6 +15,7 @@
     <p:sldId id="263" r:id="rId14"/>
     <p:sldId id="264" r:id="rId15"/>
     <p:sldId id="265" r:id="rId16"/>
+    <p:sldId id="266" r:id="rId17"/>
   </p:sldIdLst>
   <p:sldSz cx="18288000" cy="10287000" type="screen4x3"/>
   <p:notesSz cx="6858000" cy="9144000"/>
@@ -3533,7 +3534,7 @@
                 <a:ea typeface="Pretendard"/>
                 <a:cs typeface="Pretendard"/>
               </a:rPr>
-              <a:t>파티션 수를 바꿔 가며 시간과 셔플 지표를 직접 잰다</a:t>
+              <a:t>파티션 수를 바꿔 가며 시간과 셔플을 잰다</a:t>
             </a:r>
           </a:p>
         </p:txBody>
@@ -3623,8 +3624,8 @@
         </p:nvSpPr>
         <p:spPr>
           <a:xfrm>
-            <a:off x="14859000" y="6667500"/>
-            <a:ext cx="5905500" cy="5905500"/>
+            <a:off x="15811500" y="8382000"/>
+            <a:ext cx="4953000" cy="4953000"/>
           </a:xfrm>
           <a:prstGeom prst="ellipse">
             <a:avLst/>
@@ -3653,14 +3654,14 @@
         </p:nvSpPr>
         <p:spPr>
           <a:xfrm>
-            <a:off x="-2095500" y="-2095500"/>
-            <a:ext cx="4381500" cy="4381500"/>
+            <a:off x="16859250" y="9429750"/>
+            <a:ext cx="2857500" cy="2857500"/>
           </a:xfrm>
           <a:prstGeom prst="ellipse">
             <a:avLst/>
           </a:prstGeom>
           <a:solidFill>
-            <a:srgbClr val="F5F6F8"/>
+            <a:srgbClr val="FFFFFF"/>
           </a:solidFill>
           <a:ln>
             <a:noFill/>
@@ -3677,20 +3678,20 @@
       </p:sp>
       <p:sp>
         <p:nvSpPr>
-          <p:cNvPr id="4" name="Rectangle 3"/>
+          <p:cNvPr id="4" name="deckgen:decor"/>
           <p:cNvSpPr/>
           <p:nvPr/>
         </p:nvSpPr>
         <p:spPr>
           <a:xfrm>
-            <a:off x="1143000" y="2857500"/>
-            <a:ext cx="16002000" cy="28575"/>
-          </a:xfrm>
-          <a:prstGeom prst="rect">
-            <a:avLst/>
-          </a:prstGeom>
-          <a:solidFill>
-            <a:srgbClr val="0D2B5E"/>
+            <a:off x="-1428750" y="1428750"/>
+            <a:ext cx="2857500" cy="2857500"/>
+          </a:xfrm>
+          <a:prstGeom prst="ellipse">
+            <a:avLst/>
+          </a:prstGeom>
+          <a:solidFill>
+            <a:srgbClr val="F7F8FA"/>
           </a:solidFill>
           <a:ln>
             <a:noFill/>
@@ -3713,8 +3714,8 @@
         </p:nvSpPr>
         <p:spPr>
           <a:xfrm>
-            <a:off x="1143000" y="3352800"/>
-            <a:ext cx="8572500" cy="419100"/>
+            <a:off x="1143000" y="838200"/>
+            <a:ext cx="16002000" cy="342900"/>
           </a:xfrm>
           <a:prstGeom prst="rect">
             <a:avLst/>
@@ -3733,7 +3734,7 @@
               </a:lnSpc>
             </a:pPr>
             <a:r>
-              <a:rPr sz="2400" b="1">
+              <a:rPr sz="1950" b="1" spc="160">
                 <a:solidFill>
                   <a:srgbClr val="1E5BC6"/>
                 </a:solidFill>
@@ -3741,7 +3742,7 @@
                 <a:ea typeface="Pretendard"/>
                 <a:cs typeface="Pretendard"/>
               </a:rPr>
-              <a:t>5-5 · 실습 1.5H 마무리</a:t>
+              <a:t>확인 포인트</a:t>
             </a:r>
           </a:p>
         </p:txBody>
@@ -3754,8 +3755,8 @@
         </p:nvSpPr>
         <p:spPr>
           <a:xfrm>
-            <a:off x="1143000" y="3771900"/>
-            <a:ext cx="16002000" cy="800100"/>
+            <a:off x="1143000" y="1162050"/>
+            <a:ext cx="16002000" cy="762000"/>
           </a:xfrm>
           <a:prstGeom prst="rect">
             <a:avLst/>
@@ -3782,49 +3783,38 @@
                 <a:ea typeface="Pretendard"/>
                 <a:cs typeface="Pretendard"/>
               </a:rPr>
-              <a:t>다음은 배치 스크립트로 데이터 마트 (1H)</a:t>
-            </a:r>
-          </a:p>
-        </p:txBody>
-      </p:sp>
-      <p:sp>
-        <p:nvSpPr>
-          <p:cNvPr id="7" name="TextBox 6"/>
-          <p:cNvSpPr txBox="1"/>
-          <p:nvPr/>
-        </p:nvSpPr>
-        <p:spPr>
-          <a:xfrm>
-            <a:off x="1143000" y="4724400"/>
-            <a:ext cx="16002000" cy="438150"/>
-          </a:xfrm>
-          <a:prstGeom prst="rect">
-            <a:avLst/>
-          </a:prstGeom>
-          <a:noFill/>
-        </p:spPr>
-        <p:txBody>
-          <a:bodyPr wrap="square" lIns="0" rIns="0" tIns="0" bIns="0" anchor="t">
-            <a:spAutoFit/>
-          </a:bodyPr>
-          <a:lstStyle/>
-          <a:p>
-            <a:pPr algn="l">
-              <a:lnSpc>
-                <a:spcPct val="130000"/>
-              </a:lnSpc>
-            </a:pPr>
-            <a:r>
-              <a:rPr sz="2400" b="0">
-                <a:solidFill>
-                  <a:srgbClr val="3D3D3D"/>
-                </a:solidFill>
-                <a:latin typeface="Pretendard"/>
-                <a:ea typeface="Pretendard"/>
-                <a:cs typeface="Pretendard"/>
-              </a:rPr>
-              <a:t>지금까지의 가공을 mart.py 한 파일로 묶어 spark-submit 만으로 돌게 만듭니다 — 그것이 5주차 산출물입니다</a:t>
-            </a:r>
+              <a:t>이 1.5시간이 끝날 때 확인할 것</a:t>
+            </a:r>
+          </a:p>
+        </p:txBody>
+      </p:sp>
+      <p:sp>
+        <p:nvSpPr>
+          <p:cNvPr id="7" name="Rectangle 6"/>
+          <p:cNvSpPr/>
+          <p:nvPr/>
+        </p:nvSpPr>
+        <p:spPr>
+          <a:xfrm>
+            <a:off x="1143000" y="2038350"/>
+            <a:ext cx="16002000" cy="28575"/>
+          </a:xfrm>
+          <a:prstGeom prst="rect">
+            <a:avLst/>
+          </a:prstGeom>
+          <a:solidFill>
+            <a:srgbClr val="0D2B5E"/>
+          </a:solidFill>
+          <a:ln>
+            <a:noFill/>
+          </a:ln>
+          <a:effectLst/>
+        </p:spPr>
+        <p:txBody>
+          <a:bodyPr rtlCol="0" anchor="ctr" wrap="square"/>
+          <a:lstStyle/>
+          <a:p>
+            <a:pPr algn="ctr"/>
           </a:p>
         </p:txBody>
       </p:sp>
@@ -3836,12 +3826,12 @@
         </p:nvSpPr>
         <p:spPr>
           <a:xfrm>
-            <a:off x="1143000" y="5257800"/>
-            <a:ext cx="7772400" cy="819150"/>
+            <a:off x="1143000" y="2867025"/>
+            <a:ext cx="16002000" cy="742950"/>
           </a:xfrm>
           <a:prstGeom prst="roundRect">
             <a:avLst>
-              <a:gd name="adj" fmla="val 6976"/>
+              <a:gd name="adj" fmla="val 6410"/>
             </a:avLst>
           </a:prstGeom>
           <a:solidFill>
@@ -3864,14 +3854,44 @@
       </p:sp>
       <p:sp>
         <p:nvSpPr>
-          <p:cNvPr id="9" name="TextBox 8"/>
-          <p:cNvSpPr txBox="1"/>
-          <p:nvPr/>
-        </p:nvSpPr>
-        <p:spPr>
-          <a:xfrm>
-            <a:off x="1428750" y="5486400"/>
-            <a:ext cx="419100" cy="381000"/>
+          <p:cNvPr id="9" name="Oval 8"/>
+          <p:cNvSpPr/>
+          <p:nvPr/>
+        </p:nvSpPr>
+        <p:spPr>
+          <a:xfrm>
+            <a:off x="1390650" y="2971800"/>
+            <a:ext cx="533400" cy="533400"/>
+          </a:xfrm>
+          <a:prstGeom prst="ellipse">
+            <a:avLst/>
+          </a:prstGeom>
+          <a:solidFill>
+            <a:srgbClr val="0D2B5E"/>
+          </a:solidFill>
+          <a:ln>
+            <a:noFill/>
+          </a:ln>
+          <a:effectLst/>
+        </p:spPr>
+        <p:txBody>
+          <a:bodyPr rtlCol="0" anchor="ctr" wrap="square"/>
+          <a:lstStyle/>
+          <a:p>
+            <a:pPr algn="ctr"/>
+          </a:p>
+        </p:txBody>
+      </p:sp>
+      <p:sp>
+        <p:nvSpPr>
+          <p:cNvPr id="10" name="TextBox 9"/>
+          <p:cNvSpPr txBox="1"/>
+          <p:nvPr/>
+        </p:nvSpPr>
+        <p:spPr>
+          <a:xfrm>
+            <a:off x="1390650" y="3095625"/>
+            <a:ext cx="533400" cy="323850"/>
           </a:xfrm>
           <a:prstGeom prst="rect">
             <a:avLst/>
@@ -3884,54 +3904,54 @@
           </a:bodyPr>
           <a:lstStyle/>
           <a:p>
+            <a:pPr algn="ctr">
+              <a:lnSpc>
+                <a:spcPct val="100000"/>
+              </a:lnSpc>
+            </a:pPr>
+            <a:r>
+              <a:rPr sz="2100" b="1">
+                <a:solidFill>
+                  <a:srgbClr val="FFFFFF"/>
+                </a:solidFill>
+                <a:latin typeface="Pretendard"/>
+                <a:ea typeface="Pretendard"/>
+                <a:cs typeface="Pretendard"/>
+              </a:rPr>
+              <a:t>1</a:t>
+            </a:r>
+          </a:p>
+        </p:txBody>
+      </p:sp>
+      <p:sp>
+        <p:nvSpPr>
+          <p:cNvPr id="11" name="TextBox 10"/>
+          <p:cNvSpPr txBox="1"/>
+          <p:nvPr/>
+        </p:nvSpPr>
+        <p:spPr>
+          <a:xfrm>
+            <a:off x="2190750" y="2867025"/>
+            <a:ext cx="14573250" cy="742950"/>
+          </a:xfrm>
+          <a:prstGeom prst="rect">
+            <a:avLst/>
+          </a:prstGeom>
+          <a:noFill/>
+        </p:spPr>
+        <p:txBody>
+          <a:bodyPr wrap="square" lIns="0" rIns="0" tIns="0" bIns="0" anchor="ctr">
+            <a:spAutoFit/>
+          </a:bodyPr>
+          <a:lstStyle/>
+          <a:p>
             <a:pPr algn="l">
               <a:lnSpc>
                 <a:spcPct val="100000"/>
               </a:lnSpc>
             </a:pPr>
             <a:r>
-              <a:rPr sz="2475" b="1">
-                <a:solidFill>
-                  <a:srgbClr val="1E5BC6"/>
-                </a:solidFill>
-                <a:latin typeface="Pretendard"/>
-                <a:ea typeface="Pretendard"/>
-                <a:cs typeface="Pretendard"/>
-              </a:rPr>
-              <a:t>✓</a:t>
-            </a:r>
-          </a:p>
-        </p:txBody>
-      </p:sp>
-      <p:sp>
-        <p:nvSpPr>
-          <p:cNvPr id="10" name="TextBox 9"/>
-          <p:cNvSpPr txBox="1"/>
-          <p:nvPr/>
-        </p:nvSpPr>
-        <p:spPr>
-          <a:xfrm>
-            <a:off x="1905000" y="5486400"/>
-            <a:ext cx="6724650" cy="381000"/>
-          </a:xfrm>
-          <a:prstGeom prst="rect">
-            <a:avLst/>
-          </a:prstGeom>
-          <a:noFill/>
-        </p:spPr>
-        <p:txBody>
-          <a:bodyPr wrap="square" lIns="0" rIns="0" tIns="0" bIns="0" anchor="t">
-            <a:spAutoFit/>
-          </a:bodyPr>
-          <a:lstStyle/>
-          <a:p>
-            <a:pPr algn="l">
-              <a:lnSpc>
-                <a:spcPct val="100000"/>
-              </a:lnSpc>
-            </a:pPr>
-            <a:r>
-              <a:rPr sz="2475" b="1">
+              <a:rPr sz="2100" b="1">
                 <a:solidFill>
                   <a:srgbClr val="0D2B5E"/>
                 </a:solidFill>
@@ -3939,25 +3959,25 @@
                 <a:ea typeface="Pretendard"/>
                 <a:cs typeface="Pretendard"/>
               </a:rPr>
-              <a:t>mart.py 작성 · spark-submit 실행</a:t>
-            </a:r>
-          </a:p>
-        </p:txBody>
-      </p:sp>
-      <p:sp>
-        <p:nvSpPr>
-          <p:cNvPr id="11" name="Rounded Rectangle 10"/>
+              <a:t>4 · 8 · 2 · 2, 3조각 → coalesce(2) 는 [6666667, 3333333]</a:t>
+            </a:r>
+          </a:p>
+        </p:txBody>
+      </p:sp>
+      <p:sp>
+        <p:nvSpPr>
+          <p:cNvPr id="12" name="Rounded Rectangle 11"/>
           <p:cNvSpPr/>
           <p:nvPr/>
         </p:nvSpPr>
         <p:spPr>
           <a:xfrm>
-            <a:off x="9372600" y="5257800"/>
-            <a:ext cx="7772400" cy="819150"/>
+            <a:off x="1143000" y="3724275"/>
+            <a:ext cx="16002000" cy="742950"/>
           </a:xfrm>
           <a:prstGeom prst="roundRect">
             <a:avLst>
-              <a:gd name="adj" fmla="val 6976"/>
+              <a:gd name="adj" fmla="val 6410"/>
             </a:avLst>
           </a:prstGeom>
           <a:solidFill>
@@ -3980,14 +4000,44 @@
       </p:sp>
       <p:sp>
         <p:nvSpPr>
-          <p:cNvPr id="12" name="TextBox 11"/>
-          <p:cNvSpPr txBox="1"/>
-          <p:nvPr/>
-        </p:nvSpPr>
-        <p:spPr>
-          <a:xfrm>
-            <a:off x="9658350" y="5486400"/>
-            <a:ext cx="419100" cy="381000"/>
+          <p:cNvPr id="13" name="Oval 12"/>
+          <p:cNvSpPr/>
+          <p:nvPr/>
+        </p:nvSpPr>
+        <p:spPr>
+          <a:xfrm>
+            <a:off x="1390650" y="3829050"/>
+            <a:ext cx="533400" cy="533400"/>
+          </a:xfrm>
+          <a:prstGeom prst="ellipse">
+            <a:avLst/>
+          </a:prstGeom>
+          <a:solidFill>
+            <a:srgbClr val="0D2B5E"/>
+          </a:solidFill>
+          <a:ln>
+            <a:noFill/>
+          </a:ln>
+          <a:effectLst/>
+        </p:spPr>
+        <p:txBody>
+          <a:bodyPr rtlCol="0" anchor="ctr" wrap="square"/>
+          <a:lstStyle/>
+          <a:p>
+            <a:pPr algn="ctr"/>
+          </a:p>
+        </p:txBody>
+      </p:sp>
+      <p:sp>
+        <p:nvSpPr>
+          <p:cNvPr id="14" name="TextBox 13"/>
+          <p:cNvSpPr txBox="1"/>
+          <p:nvPr/>
+        </p:nvSpPr>
+        <p:spPr>
+          <a:xfrm>
+            <a:off x="1390650" y="3952875"/>
+            <a:ext cx="533400" cy="323850"/>
           </a:xfrm>
           <a:prstGeom prst="rect">
             <a:avLst/>
@@ -4000,54 +4050,54 @@
           </a:bodyPr>
           <a:lstStyle/>
           <a:p>
+            <a:pPr algn="ctr">
+              <a:lnSpc>
+                <a:spcPct val="100000"/>
+              </a:lnSpc>
+            </a:pPr>
+            <a:r>
+              <a:rPr sz="2100" b="1">
+                <a:solidFill>
+                  <a:srgbClr val="FFFFFF"/>
+                </a:solidFill>
+                <a:latin typeface="Pretendard"/>
+                <a:ea typeface="Pretendard"/>
+                <a:cs typeface="Pretendard"/>
+              </a:rPr>
+              <a:t>2</a:t>
+            </a:r>
+          </a:p>
+        </p:txBody>
+      </p:sp>
+      <p:sp>
+        <p:nvSpPr>
+          <p:cNvPr id="15" name="TextBox 14"/>
+          <p:cNvSpPr txBox="1"/>
+          <p:nvPr/>
+        </p:nvSpPr>
+        <p:spPr>
+          <a:xfrm>
+            <a:off x="2190750" y="3724275"/>
+            <a:ext cx="14573250" cy="742950"/>
+          </a:xfrm>
+          <a:prstGeom prst="rect">
+            <a:avLst/>
+          </a:prstGeom>
+          <a:noFill/>
+        </p:spPr>
+        <p:txBody>
+          <a:bodyPr wrap="square" lIns="0" rIns="0" tIns="0" bIns="0" anchor="ctr">
+            <a:spAutoFit/>
+          </a:bodyPr>
+          <a:lstStyle/>
+          <a:p>
             <a:pPr algn="l">
               <a:lnSpc>
                 <a:spcPct val="100000"/>
               </a:lnSpc>
             </a:pPr>
             <a:r>
-              <a:rPr sz="2475" b="1">
-                <a:solidFill>
-                  <a:srgbClr val="1E5BC6"/>
-                </a:solidFill>
-                <a:latin typeface="Pretendard"/>
-                <a:ea typeface="Pretendard"/>
-                <a:cs typeface="Pretendard"/>
-              </a:rPr>
-              <a:t>✓</a:t>
-            </a:r>
-          </a:p>
-        </p:txBody>
-      </p:sp>
-      <p:sp>
-        <p:nvSpPr>
-          <p:cNvPr id="13" name="TextBox 12"/>
-          <p:cNvSpPr txBox="1"/>
-          <p:nvPr/>
-        </p:nvSpPr>
-        <p:spPr>
-          <a:xfrm>
-            <a:off x="10134600" y="5486400"/>
-            <a:ext cx="6724650" cy="381000"/>
-          </a:xfrm>
-          <a:prstGeom prst="rect">
-            <a:avLst/>
-          </a:prstGeom>
-          <a:noFill/>
-        </p:spPr>
-        <p:txBody>
-          <a:bodyPr wrap="square" lIns="0" rIns="0" tIns="0" bIns="0" anchor="t">
-            <a:spAutoFit/>
-          </a:bodyPr>
-          <a:lstStyle/>
-          <a:p>
-            <a:pPr algn="l">
-              <a:lnSpc>
-                <a:spcPct val="100000"/>
-              </a:lnSpc>
-            </a:pPr>
-            <a:r>
-              <a:rPr sz="2475" b="1">
+              <a:rPr sz="2100" b="1">
                 <a:solidFill>
                   <a:srgbClr val="0D2B5E"/>
                 </a:solidFill>
@@ -4055,25 +4105,25 @@
                 <a:ea typeface="Pretendard"/>
                 <a:cs typeface="Pretendard"/>
               </a:rPr>
-              <a:t>두 번 돌려 멱등 확인</a:t>
-            </a:r>
-          </a:p>
-        </p:txBody>
-      </p:sp>
-      <p:sp>
-        <p:nvSpPr>
-          <p:cNvPr id="14" name="Rounded Rectangle 13"/>
+              <a:t>(A) Stage 1/1 · (B) Shuffle Write/Read 2.4 KiB</a:t>
+            </a:r>
+          </a:p>
+        </p:txBody>
+      </p:sp>
+      <p:sp>
+        <p:nvSpPr>
+          <p:cNvPr id="16" name="Rounded Rectangle 15"/>
           <p:cNvSpPr/>
           <p:nvPr/>
         </p:nvSpPr>
         <p:spPr>
           <a:xfrm>
-            <a:off x="1143000" y="6286500"/>
-            <a:ext cx="7772400" cy="819150"/>
+            <a:off x="1143000" y="4581525"/>
+            <a:ext cx="16002000" cy="742950"/>
           </a:xfrm>
           <a:prstGeom prst="roundRect">
             <a:avLst>
-              <a:gd name="adj" fmla="val 6976"/>
+              <a:gd name="adj" fmla="val 6410"/>
             </a:avLst>
           </a:prstGeom>
           <a:solidFill>
@@ -4096,14 +4146,44 @@
       </p:sp>
       <p:sp>
         <p:nvSpPr>
-          <p:cNvPr id="15" name="TextBox 14"/>
-          <p:cNvSpPr txBox="1"/>
-          <p:nvPr/>
-        </p:nvSpPr>
-        <p:spPr>
-          <a:xfrm>
-            <a:off x="1428750" y="6515100"/>
-            <a:ext cx="419100" cy="381000"/>
+          <p:cNvPr id="17" name="Oval 16"/>
+          <p:cNvSpPr/>
+          <p:nvPr/>
+        </p:nvSpPr>
+        <p:spPr>
+          <a:xfrm>
+            <a:off x="1390650" y="4686300"/>
+            <a:ext cx="533400" cy="533400"/>
+          </a:xfrm>
+          <a:prstGeom prst="ellipse">
+            <a:avLst/>
+          </a:prstGeom>
+          <a:solidFill>
+            <a:srgbClr val="0D2B5E"/>
+          </a:solidFill>
+          <a:ln>
+            <a:noFill/>
+          </a:ln>
+          <a:effectLst/>
+        </p:spPr>
+        <p:txBody>
+          <a:bodyPr rtlCol="0" anchor="ctr" wrap="square"/>
+          <a:lstStyle/>
+          <a:p>
+            <a:pPr algn="ctr"/>
+          </a:p>
+        </p:txBody>
+      </p:sp>
+      <p:sp>
+        <p:nvSpPr>
+          <p:cNvPr id="18" name="TextBox 17"/>
+          <p:cNvSpPr txBox="1"/>
+          <p:nvPr/>
+        </p:nvSpPr>
+        <p:spPr>
+          <a:xfrm>
+            <a:off x="1390650" y="4810125"/>
+            <a:ext cx="533400" cy="323850"/>
           </a:xfrm>
           <a:prstGeom prst="rect">
             <a:avLst/>
@@ -4116,54 +4196,54 @@
           </a:bodyPr>
           <a:lstStyle/>
           <a:p>
+            <a:pPr algn="ctr">
+              <a:lnSpc>
+                <a:spcPct val="100000"/>
+              </a:lnSpc>
+            </a:pPr>
+            <a:r>
+              <a:rPr sz="2100" b="1">
+                <a:solidFill>
+                  <a:srgbClr val="FFFFFF"/>
+                </a:solidFill>
+                <a:latin typeface="Pretendard"/>
+                <a:ea typeface="Pretendard"/>
+                <a:cs typeface="Pretendard"/>
+              </a:rPr>
+              <a:t>3</a:t>
+            </a:r>
+          </a:p>
+        </p:txBody>
+      </p:sp>
+      <p:sp>
+        <p:nvSpPr>
+          <p:cNvPr id="19" name="TextBox 18"/>
+          <p:cNvSpPr txBox="1"/>
+          <p:nvPr/>
+        </p:nvSpPr>
+        <p:spPr>
+          <a:xfrm>
+            <a:off x="2190750" y="4581525"/>
+            <a:ext cx="14573250" cy="742950"/>
+          </a:xfrm>
+          <a:prstGeom prst="rect">
+            <a:avLst/>
+          </a:prstGeom>
+          <a:noFill/>
+        </p:spPr>
+        <p:txBody>
+          <a:bodyPr wrap="square" lIns="0" rIns="0" tIns="0" bIns="0" anchor="ctr">
+            <a:spAutoFit/>
+          </a:bodyPr>
+          <a:lstStyle/>
+          <a:p>
             <a:pPr algn="l">
               <a:lnSpc>
                 <a:spcPct val="100000"/>
               </a:lnSpc>
             </a:pPr>
             <a:r>
-              <a:rPr sz="2475" b="1">
-                <a:solidFill>
-                  <a:srgbClr val="1E5BC6"/>
-                </a:solidFill>
-                <a:latin typeface="Pretendard"/>
-                <a:ea typeface="Pretendard"/>
-                <a:cs typeface="Pretendard"/>
-              </a:rPr>
-              <a:t>✓</a:t>
-            </a:r>
-          </a:p>
-        </p:txBody>
-      </p:sp>
-      <p:sp>
-        <p:nvSpPr>
-          <p:cNvPr id="16" name="TextBox 15"/>
-          <p:cNvSpPr txBox="1"/>
-          <p:nvPr/>
-        </p:nvSpPr>
-        <p:spPr>
-          <a:xfrm>
-            <a:off x="1905000" y="6515100"/>
-            <a:ext cx="6724650" cy="381000"/>
-          </a:xfrm>
-          <a:prstGeom prst="rect">
-            <a:avLst/>
-          </a:prstGeom>
-          <a:noFill/>
-        </p:spPr>
-        <p:txBody>
-          <a:bodyPr wrap="square" lIns="0" rIns="0" tIns="0" bIns="0" anchor="t">
-            <a:spAutoFit/>
-          </a:bodyPr>
-          <a:lstStyle/>
-          <a:p>
-            <a:pPr algn="l">
-              <a:lnSpc>
-                <a:spcPct val="100000"/>
-              </a:lnSpc>
-            </a:pPr>
-            <a:r>
-              <a:rPr sz="2475" b="1">
+              <a:rPr sz="2100" b="1">
                 <a:solidFill>
                   <a:srgbClr val="0D2B5E"/>
                 </a:solidFill>
@@ -4171,25 +4251,25 @@
                 <a:ea typeface="Pretendard"/>
                 <a:cs typeface="Pretendard"/>
               </a:rPr>
-              <a:t>날짜 인자·로그·종료 코드 추가</a:t>
-            </a:r>
-          </a:p>
-        </p:txBody>
-      </p:sp>
-      <p:sp>
-        <p:nvSpPr>
-          <p:cNvPr id="17" name="Rounded Rectangle 16"/>
+              <a:t>explain() 둘째에만 Exchange hashpartitioning</a:t>
+            </a:r>
+          </a:p>
+        </p:txBody>
+      </p:sp>
+      <p:sp>
+        <p:nvSpPr>
+          <p:cNvPr id="20" name="Rounded Rectangle 19"/>
           <p:cNvSpPr/>
           <p:nvPr/>
         </p:nvSpPr>
         <p:spPr>
           <a:xfrm>
-            <a:off x="9372600" y="6286500"/>
-            <a:ext cx="7772400" cy="819150"/>
+            <a:off x="1143000" y="5438775"/>
+            <a:ext cx="16002000" cy="742950"/>
           </a:xfrm>
           <a:prstGeom prst="roundRect">
             <a:avLst>
-              <a:gd name="adj" fmla="val 6976"/>
+              <a:gd name="adj" fmla="val 6410"/>
             </a:avLst>
           </a:prstGeom>
           <a:solidFill>
@@ -4212,102 +4292,20 @@
       </p:sp>
       <p:sp>
         <p:nvSpPr>
-          <p:cNvPr id="18" name="TextBox 17"/>
-          <p:cNvSpPr txBox="1"/>
-          <p:nvPr/>
-        </p:nvSpPr>
-        <p:spPr>
-          <a:xfrm>
-            <a:off x="9658350" y="6515100"/>
-            <a:ext cx="419100" cy="381000"/>
-          </a:xfrm>
-          <a:prstGeom prst="rect">
-            <a:avLst/>
-          </a:prstGeom>
-          <a:noFill/>
-        </p:spPr>
-        <p:txBody>
-          <a:bodyPr wrap="square" lIns="0" rIns="0" tIns="0" bIns="0" anchor="t">
-            <a:spAutoFit/>
-          </a:bodyPr>
-          <a:lstStyle/>
-          <a:p>
-            <a:pPr algn="l">
-              <a:lnSpc>
-                <a:spcPct val="100000"/>
-              </a:lnSpc>
-            </a:pPr>
-            <a:r>
-              <a:rPr sz="2475" b="1">
-                <a:solidFill>
-                  <a:srgbClr val="1E5BC6"/>
-                </a:solidFill>
-                <a:latin typeface="Pretendard"/>
-                <a:ea typeface="Pretendard"/>
-                <a:cs typeface="Pretendard"/>
-              </a:rPr>
-              <a:t>✓</a:t>
-            </a:r>
-          </a:p>
-        </p:txBody>
-      </p:sp>
-      <p:sp>
-        <p:nvSpPr>
-          <p:cNvPr id="19" name="TextBox 18"/>
-          <p:cNvSpPr txBox="1"/>
-          <p:nvPr/>
-        </p:nvSpPr>
-        <p:spPr>
-          <a:xfrm>
-            <a:off x="10134600" y="6515100"/>
-            <a:ext cx="6724650" cy="381000"/>
-          </a:xfrm>
-          <a:prstGeom prst="rect">
-            <a:avLst/>
-          </a:prstGeom>
-          <a:noFill/>
-        </p:spPr>
-        <p:txBody>
-          <a:bodyPr wrap="square" lIns="0" rIns="0" tIns="0" bIns="0" anchor="t">
-            <a:spAutoFit/>
-          </a:bodyPr>
-          <a:lstStyle/>
-          <a:p>
-            <a:pPr algn="l">
-              <a:lnSpc>
-                <a:spcPct val="100000"/>
-              </a:lnSpc>
-            </a:pPr>
-            <a:r>
-              <a:rPr sz="2475" b="1">
-                <a:solidFill>
-                  <a:srgbClr val="0D2B5E"/>
-                </a:solidFill>
-                <a:latin typeface="Pretendard"/>
-                <a:ea typeface="Pretendard"/>
-                <a:cs typeface="Pretendard"/>
-              </a:rPr>
-              <a:t>실측표를 채워 산출물 정리</a:t>
-            </a:r>
-          </a:p>
-        </p:txBody>
-      </p:sp>
-      <p:sp>
-        <p:nvSpPr>
-          <p:cNvPr id="20" name="Rectangle 19"/>
+          <p:cNvPr id="21" name="Oval 20"/>
           <p:cNvSpPr/>
           <p:nvPr/>
         </p:nvSpPr>
         <p:spPr>
           <a:xfrm>
-            <a:off x="1143000" y="7715250"/>
-            <a:ext cx="47625" cy="819150"/>
-          </a:xfrm>
-          <a:prstGeom prst="rect">
-            <a:avLst/>
-          </a:prstGeom>
-          <a:solidFill>
-            <a:srgbClr val="1E5BC6"/>
+            <a:off x="1390650" y="5543550"/>
+            <a:ext cx="533400" cy="533400"/>
+          </a:xfrm>
+          <a:prstGeom prst="ellipse">
+            <a:avLst/>
+          </a:prstGeom>
+          <a:solidFill>
+            <a:srgbClr val="0D2B5E"/>
           </a:solidFill>
           <a:ln>
             <a:noFill/>
@@ -4324,6 +4322,1217 @@
       </p:sp>
       <p:sp>
         <p:nvSpPr>
+          <p:cNvPr id="22" name="TextBox 21"/>
+          <p:cNvSpPr txBox="1"/>
+          <p:nvPr/>
+        </p:nvSpPr>
+        <p:spPr>
+          <a:xfrm>
+            <a:off x="1390650" y="5667375"/>
+            <a:ext cx="533400" cy="323850"/>
+          </a:xfrm>
+          <a:prstGeom prst="rect">
+            <a:avLst/>
+          </a:prstGeom>
+          <a:noFill/>
+        </p:spPr>
+        <p:txBody>
+          <a:bodyPr wrap="square" lIns="0" rIns="0" tIns="0" bIns="0" anchor="t">
+            <a:spAutoFit/>
+          </a:bodyPr>
+          <a:lstStyle/>
+          <a:p>
+            <a:pPr algn="ctr">
+              <a:lnSpc>
+                <a:spcPct val="100000"/>
+              </a:lnSpc>
+            </a:pPr>
+            <a:r>
+              <a:rPr sz="2100" b="1">
+                <a:solidFill>
+                  <a:srgbClr val="FFFFFF"/>
+                </a:solidFill>
+                <a:latin typeface="Pretendard"/>
+                <a:ea typeface="Pretendard"/>
+                <a:cs typeface="Pretendard"/>
+              </a:rPr>
+              <a:t>4</a:t>
+            </a:r>
+          </a:p>
+        </p:txBody>
+      </p:sp>
+      <p:sp>
+        <p:nvSpPr>
+          <p:cNvPr id="23" name="TextBox 22"/>
+          <p:cNvSpPr txBox="1"/>
+          <p:nvPr/>
+        </p:nvSpPr>
+        <p:spPr>
+          <a:xfrm>
+            <a:off x="2190750" y="5438775"/>
+            <a:ext cx="14573250" cy="742950"/>
+          </a:xfrm>
+          <a:prstGeom prst="rect">
+            <a:avLst/>
+          </a:prstGeom>
+          <a:noFill/>
+        </p:spPr>
+        <p:txBody>
+          <a:bodyPr wrap="square" lIns="0" rIns="0" tIns="0" bIns="0" anchor="ctr">
+            <a:spAutoFit/>
+          </a:bodyPr>
+          <a:lstStyle/>
+          <a:p>
+            <a:pPr algn="l">
+              <a:lnSpc>
+                <a:spcPct val="100000"/>
+              </a:lnSpc>
+            </a:pPr>
+            <a:r>
+              <a:rPr sz="2100" b="1">
+                <a:solidFill>
+                  <a:srgbClr val="0D2B5E"/>
+                </a:solidFill>
+                <a:latin typeface="Pretendard"/>
+                <a:ea typeface="Pretendard"/>
+                <a:cs typeface="Pretendard"/>
+              </a:rPr>
+              <a:t>AQE 꺼짐에서만 200 이 8 보다 눈에 띄게 느리다</a:t>
+            </a:r>
+          </a:p>
+        </p:txBody>
+      </p:sp>
+      <p:sp>
+        <p:nvSpPr>
+          <p:cNvPr id="24" name="Rounded Rectangle 23"/>
+          <p:cNvSpPr/>
+          <p:nvPr/>
+        </p:nvSpPr>
+        <p:spPr>
+          <a:xfrm>
+            <a:off x="1143000" y="6296025"/>
+            <a:ext cx="16002000" cy="742950"/>
+          </a:xfrm>
+          <a:prstGeom prst="roundRect">
+            <a:avLst>
+              <a:gd name="adj" fmla="val 6410"/>
+            </a:avLst>
+          </a:prstGeom>
+          <a:solidFill>
+            <a:srgbClr val="FAFBFD"/>
+          </a:solidFill>
+          <a:ln w="9525">
+            <a:solidFill>
+              <a:srgbClr val="DCE1E8"/>
+            </a:solidFill>
+          </a:ln>
+          <a:effectLst/>
+        </p:spPr>
+        <p:txBody>
+          <a:bodyPr rtlCol="0" anchor="ctr" wrap="square"/>
+          <a:lstStyle/>
+          <a:p>
+            <a:pPr algn="ctr"/>
+          </a:p>
+        </p:txBody>
+      </p:sp>
+      <p:sp>
+        <p:nvSpPr>
+          <p:cNvPr id="25" name="Oval 24"/>
+          <p:cNvSpPr/>
+          <p:nvPr/>
+        </p:nvSpPr>
+        <p:spPr>
+          <a:xfrm>
+            <a:off x="1390650" y="6400800"/>
+            <a:ext cx="533400" cy="533400"/>
+          </a:xfrm>
+          <a:prstGeom prst="ellipse">
+            <a:avLst/>
+          </a:prstGeom>
+          <a:solidFill>
+            <a:srgbClr val="0D2B5E"/>
+          </a:solidFill>
+          <a:ln>
+            <a:noFill/>
+          </a:ln>
+          <a:effectLst/>
+        </p:spPr>
+        <p:txBody>
+          <a:bodyPr rtlCol="0" anchor="ctr" wrap="square"/>
+          <a:lstStyle/>
+          <a:p>
+            <a:pPr algn="ctr"/>
+          </a:p>
+        </p:txBody>
+      </p:sp>
+      <p:sp>
+        <p:nvSpPr>
+          <p:cNvPr id="26" name="TextBox 25"/>
+          <p:cNvSpPr txBox="1"/>
+          <p:nvPr/>
+        </p:nvSpPr>
+        <p:spPr>
+          <a:xfrm>
+            <a:off x="1390650" y="6524625"/>
+            <a:ext cx="533400" cy="323850"/>
+          </a:xfrm>
+          <a:prstGeom prst="rect">
+            <a:avLst/>
+          </a:prstGeom>
+          <a:noFill/>
+        </p:spPr>
+        <p:txBody>
+          <a:bodyPr wrap="square" lIns="0" rIns="0" tIns="0" bIns="0" anchor="t">
+            <a:spAutoFit/>
+          </a:bodyPr>
+          <a:lstStyle/>
+          <a:p>
+            <a:pPr algn="ctr">
+              <a:lnSpc>
+                <a:spcPct val="100000"/>
+              </a:lnSpc>
+            </a:pPr>
+            <a:r>
+              <a:rPr sz="2100" b="1">
+                <a:solidFill>
+                  <a:srgbClr val="FFFFFF"/>
+                </a:solidFill>
+                <a:latin typeface="Pretendard"/>
+                <a:ea typeface="Pretendard"/>
+                <a:cs typeface="Pretendard"/>
+              </a:rPr>
+              <a:t>5</a:t>
+            </a:r>
+          </a:p>
+        </p:txBody>
+      </p:sp>
+      <p:sp>
+        <p:nvSpPr>
+          <p:cNvPr id="27" name="TextBox 26"/>
+          <p:cNvSpPr txBox="1"/>
+          <p:nvPr/>
+        </p:nvSpPr>
+        <p:spPr>
+          <a:xfrm>
+            <a:off x="2190750" y="6296025"/>
+            <a:ext cx="14573250" cy="742950"/>
+          </a:xfrm>
+          <a:prstGeom prst="rect">
+            <a:avLst/>
+          </a:prstGeom>
+          <a:noFill/>
+        </p:spPr>
+        <p:txBody>
+          <a:bodyPr wrap="square" lIns="0" rIns="0" tIns="0" bIns="0" anchor="ctr">
+            <a:spAutoFit/>
+          </a:bodyPr>
+          <a:lstStyle/>
+          <a:p>
+            <a:pPr algn="l">
+              <a:lnSpc>
+                <a:spcPct val="100000"/>
+              </a:lnSpc>
+            </a:pPr>
+            <a:r>
+              <a:rPr sz="2100" b="1">
+                <a:solidFill>
+                  <a:srgbClr val="0D2B5E"/>
+                </a:solidFill>
+                <a:latin typeface="Pretendard"/>
+                <a:ea typeface="Pretendard"/>
+                <a:cs typeface="Pretendard"/>
+              </a:rPr>
+              <a:t>스큐는 Task Max 가 Median 의 수십 배</a:t>
+            </a:r>
+          </a:p>
+        </p:txBody>
+      </p:sp>
+      <p:sp>
+        <p:nvSpPr>
+          <p:cNvPr id="28" name="Rounded Rectangle 27"/>
+          <p:cNvSpPr/>
+          <p:nvPr/>
+        </p:nvSpPr>
+        <p:spPr>
+          <a:xfrm>
+            <a:off x="1143000" y="7153275"/>
+            <a:ext cx="16002000" cy="742950"/>
+          </a:xfrm>
+          <a:prstGeom prst="roundRect">
+            <a:avLst>
+              <a:gd name="adj" fmla="val 6410"/>
+            </a:avLst>
+          </a:prstGeom>
+          <a:solidFill>
+            <a:srgbClr val="FAFBFD"/>
+          </a:solidFill>
+          <a:ln w="9525">
+            <a:solidFill>
+              <a:srgbClr val="DCE1E8"/>
+            </a:solidFill>
+          </a:ln>
+          <a:effectLst/>
+        </p:spPr>
+        <p:txBody>
+          <a:bodyPr rtlCol="0" anchor="ctr" wrap="square"/>
+          <a:lstStyle/>
+          <a:p>
+            <a:pPr algn="ctr"/>
+          </a:p>
+        </p:txBody>
+      </p:sp>
+      <p:sp>
+        <p:nvSpPr>
+          <p:cNvPr id="29" name="Oval 28"/>
+          <p:cNvSpPr/>
+          <p:nvPr/>
+        </p:nvSpPr>
+        <p:spPr>
+          <a:xfrm>
+            <a:off x="1390650" y="7258050"/>
+            <a:ext cx="533400" cy="533400"/>
+          </a:xfrm>
+          <a:prstGeom prst="ellipse">
+            <a:avLst/>
+          </a:prstGeom>
+          <a:solidFill>
+            <a:srgbClr val="0D2B5E"/>
+          </a:solidFill>
+          <a:ln>
+            <a:noFill/>
+          </a:ln>
+          <a:effectLst/>
+        </p:spPr>
+        <p:txBody>
+          <a:bodyPr rtlCol="0" anchor="ctr" wrap="square"/>
+          <a:lstStyle/>
+          <a:p>
+            <a:pPr algn="ctr"/>
+          </a:p>
+        </p:txBody>
+      </p:sp>
+      <p:sp>
+        <p:nvSpPr>
+          <p:cNvPr id="30" name="TextBox 29"/>
+          <p:cNvSpPr txBox="1"/>
+          <p:nvPr/>
+        </p:nvSpPr>
+        <p:spPr>
+          <a:xfrm>
+            <a:off x="1390650" y="7381875"/>
+            <a:ext cx="533400" cy="323850"/>
+          </a:xfrm>
+          <a:prstGeom prst="rect">
+            <a:avLst/>
+          </a:prstGeom>
+          <a:noFill/>
+        </p:spPr>
+        <p:txBody>
+          <a:bodyPr wrap="square" lIns="0" rIns="0" tIns="0" bIns="0" anchor="t">
+            <a:spAutoFit/>
+          </a:bodyPr>
+          <a:lstStyle/>
+          <a:p>
+            <a:pPr algn="ctr">
+              <a:lnSpc>
+                <a:spcPct val="100000"/>
+              </a:lnSpc>
+            </a:pPr>
+            <a:r>
+              <a:rPr sz="2100" b="1">
+                <a:solidFill>
+                  <a:srgbClr val="FFFFFF"/>
+                </a:solidFill>
+                <a:latin typeface="Pretendard"/>
+                <a:ea typeface="Pretendard"/>
+                <a:cs typeface="Pretendard"/>
+              </a:rPr>
+              <a:t>6</a:t>
+            </a:r>
+          </a:p>
+        </p:txBody>
+      </p:sp>
+      <p:sp>
+        <p:nvSpPr>
+          <p:cNvPr id="31" name="TextBox 30"/>
+          <p:cNvSpPr txBox="1"/>
+          <p:nvPr/>
+        </p:nvSpPr>
+        <p:spPr>
+          <a:xfrm>
+            <a:off x="2190750" y="7153275"/>
+            <a:ext cx="14573250" cy="742950"/>
+          </a:xfrm>
+          <a:prstGeom prst="rect">
+            <a:avLst/>
+          </a:prstGeom>
+          <a:noFill/>
+        </p:spPr>
+        <p:txBody>
+          <a:bodyPr wrap="square" lIns="0" rIns="0" tIns="0" bIns="0" anchor="ctr">
+            <a:spAutoFit/>
+          </a:bodyPr>
+          <a:lstStyle/>
+          <a:p>
+            <a:pPr algn="l">
+              <a:lnSpc>
+                <a:spcPct val="100000"/>
+              </a:lnSpc>
+            </a:pPr>
+            <a:r>
+              <a:rPr sz="2100" b="1">
+                <a:solidFill>
+                  <a:srgbClr val="0D2B5E"/>
+                </a:solidFill>
+                <a:latin typeface="Pretendard"/>
+                <a:ea typeface="Pretendard"/>
+                <a:cs typeface="Pretendard"/>
+              </a:rPr>
+              <a:t>test-narrow 4 · test-one 1</a:t>
+            </a:r>
+          </a:p>
+        </p:txBody>
+      </p:sp>
+      <p:sp>
+        <p:nvSpPr>
+          <p:cNvPr id="32" name="Rectangle 31"/>
+          <p:cNvSpPr/>
+          <p:nvPr/>
+        </p:nvSpPr>
+        <p:spPr>
+          <a:xfrm>
+            <a:off x="1143000" y="8058150"/>
+            <a:ext cx="16002000" cy="9525"/>
+          </a:xfrm>
+          <a:prstGeom prst="rect">
+            <a:avLst/>
+          </a:prstGeom>
+          <a:solidFill>
+            <a:srgbClr val="DCE1E8"/>
+          </a:solidFill>
+          <a:ln>
+            <a:noFill/>
+          </a:ln>
+          <a:effectLst/>
+        </p:spPr>
+        <p:txBody>
+          <a:bodyPr rtlCol="0" anchor="ctr" wrap="square"/>
+          <a:lstStyle/>
+          <a:p>
+            <a:pPr algn="ctr"/>
+          </a:p>
+        </p:txBody>
+      </p:sp>
+      <p:sp>
+        <p:nvSpPr>
+          <p:cNvPr id="33" name="TextBox 32"/>
+          <p:cNvSpPr txBox="1"/>
+          <p:nvPr/>
+        </p:nvSpPr>
+        <p:spPr>
+          <a:xfrm>
+            <a:off x="1143000" y="8248650"/>
+            <a:ext cx="13335000" cy="323850"/>
+          </a:xfrm>
+          <a:prstGeom prst="rect">
+            <a:avLst/>
+          </a:prstGeom>
+          <a:noFill/>
+        </p:spPr>
+        <p:txBody>
+          <a:bodyPr wrap="square" lIns="0" rIns="0" tIns="0" bIns="0" anchor="t">
+            <a:spAutoFit/>
+          </a:bodyPr>
+          <a:lstStyle/>
+          <a:p>
+            <a:pPr algn="l">
+              <a:lnSpc>
+                <a:spcPct val="100000"/>
+              </a:lnSpc>
+            </a:pPr>
+            <a:r>
+              <a:rPr sz="1725" b="0">
+                <a:solidFill>
+                  <a:srgbClr val="7D7D7D"/>
+                </a:solidFill>
+                <a:latin typeface="Pretendard"/>
+                <a:ea typeface="Pretendard"/>
+                <a:cs typeface="Pretendard"/>
+              </a:rPr>
+              <a:t>데이터 엔지니어링 &amp; RAG 파이프라인 160H · 5-5 · 실습 1.5H</a:t>
+            </a:r>
+          </a:p>
+        </p:txBody>
+      </p:sp>
+      <p:sp>
+        <p:nvSpPr>
+          <p:cNvPr id="34" name="TextBox 33"/>
+          <p:cNvSpPr txBox="1"/>
+          <p:nvPr/>
+        </p:nvSpPr>
+        <p:spPr>
+          <a:xfrm>
+            <a:off x="15240000" y="8248650"/>
+            <a:ext cx="1905000" cy="323850"/>
+          </a:xfrm>
+          <a:prstGeom prst="rect">
+            <a:avLst/>
+          </a:prstGeom>
+          <a:noFill/>
+        </p:spPr>
+        <p:txBody>
+          <a:bodyPr wrap="square" lIns="0" rIns="0" tIns="0" bIns="0" anchor="t">
+            <a:spAutoFit/>
+          </a:bodyPr>
+          <a:lstStyle/>
+          <a:p>
+            <a:pPr algn="r">
+              <a:lnSpc>
+                <a:spcPct val="100000"/>
+              </a:lnSpc>
+            </a:pPr>
+            <a:r>
+              <a:rPr sz="1725" b="0">
+                <a:solidFill>
+                  <a:srgbClr val="7D7D7D"/>
+                </a:solidFill>
+                <a:latin typeface="Pretendard"/>
+                <a:ea typeface="Pretendard"/>
+                <a:cs typeface="Pretendard"/>
+              </a:rPr>
+              <a:t>10</a:t>
+            </a:r>
+          </a:p>
+        </p:txBody>
+      </p:sp>
+    </p:spTree>
+  </p:cSld>
+  <p:clrMapOvr>
+    <a:masterClrMapping/>
+  </p:clrMapOvr>
+</p:sld>
+</file>
+
+<file path=ppt/slides/slide11.xml><?xml version="1.0" encoding="utf-8"?>
+<p:sld xmlns:a="http://schemas.openxmlformats.org/drawingml/2006/main" xmlns:p="http://schemas.openxmlformats.org/presentationml/2006/main" xmlns:r="http://schemas.openxmlformats.org/officeDocument/2006/relationships">
+  <p:cSld>
+    <p:spTree>
+      <p:nvGrpSpPr>
+        <p:cNvPr id="1" name=""/>
+        <p:cNvGrpSpPr/>
+        <p:nvPr/>
+      </p:nvGrpSpPr>
+      <p:grpSpPr/>
+      <p:sp>
+        <p:nvSpPr>
+          <p:cNvPr id="2" name="deckgen:decor"/>
+          <p:cNvSpPr/>
+          <p:nvPr/>
+        </p:nvSpPr>
+        <p:spPr>
+          <a:xfrm>
+            <a:off x="14859000" y="6667500"/>
+            <a:ext cx="5905500" cy="5905500"/>
+          </a:xfrm>
+          <a:prstGeom prst="ellipse">
+            <a:avLst/>
+          </a:prstGeom>
+          <a:solidFill>
+            <a:srgbClr val="F3F6FC"/>
+          </a:solidFill>
+          <a:ln>
+            <a:noFill/>
+          </a:ln>
+          <a:effectLst/>
+        </p:spPr>
+        <p:txBody>
+          <a:bodyPr rtlCol="0" anchor="ctr" wrap="square"/>
+          <a:lstStyle/>
+          <a:p>
+            <a:pPr algn="ctr"/>
+          </a:p>
+        </p:txBody>
+      </p:sp>
+      <p:sp>
+        <p:nvSpPr>
+          <p:cNvPr id="3" name="deckgen:decor"/>
+          <p:cNvSpPr/>
+          <p:nvPr/>
+        </p:nvSpPr>
+        <p:spPr>
+          <a:xfrm>
+            <a:off x="-2095500" y="-2095500"/>
+            <a:ext cx="4381500" cy="4381500"/>
+          </a:xfrm>
+          <a:prstGeom prst="ellipse">
+            <a:avLst/>
+          </a:prstGeom>
+          <a:solidFill>
+            <a:srgbClr val="F5F6F8"/>
+          </a:solidFill>
+          <a:ln>
+            <a:noFill/>
+          </a:ln>
+          <a:effectLst/>
+        </p:spPr>
+        <p:txBody>
+          <a:bodyPr rtlCol="0" anchor="ctr" wrap="square"/>
+          <a:lstStyle/>
+          <a:p>
+            <a:pPr algn="ctr"/>
+          </a:p>
+        </p:txBody>
+      </p:sp>
+      <p:sp>
+        <p:nvSpPr>
+          <p:cNvPr id="4" name="Rectangle 3"/>
+          <p:cNvSpPr/>
+          <p:nvPr/>
+        </p:nvSpPr>
+        <p:spPr>
+          <a:xfrm>
+            <a:off x="1143000" y="2857500"/>
+            <a:ext cx="16002000" cy="28575"/>
+          </a:xfrm>
+          <a:prstGeom prst="rect">
+            <a:avLst/>
+          </a:prstGeom>
+          <a:solidFill>
+            <a:srgbClr val="0D2B5E"/>
+          </a:solidFill>
+          <a:ln>
+            <a:noFill/>
+          </a:ln>
+          <a:effectLst/>
+        </p:spPr>
+        <p:txBody>
+          <a:bodyPr rtlCol="0" anchor="ctr" wrap="square"/>
+          <a:lstStyle/>
+          <a:p>
+            <a:pPr algn="ctr"/>
+          </a:p>
+        </p:txBody>
+      </p:sp>
+      <p:sp>
+        <p:nvSpPr>
+          <p:cNvPr id="5" name="TextBox 4"/>
+          <p:cNvSpPr txBox="1"/>
+          <p:nvPr/>
+        </p:nvSpPr>
+        <p:spPr>
+          <a:xfrm>
+            <a:off x="1143000" y="3352800"/>
+            <a:ext cx="8572500" cy="419100"/>
+          </a:xfrm>
+          <a:prstGeom prst="rect">
+            <a:avLst/>
+          </a:prstGeom>
+          <a:noFill/>
+        </p:spPr>
+        <p:txBody>
+          <a:bodyPr wrap="square" lIns="0" rIns="0" tIns="0" bIns="0" anchor="t">
+            <a:spAutoFit/>
+          </a:bodyPr>
+          <a:lstStyle/>
+          <a:p>
+            <a:pPr algn="l">
+              <a:lnSpc>
+                <a:spcPct val="100000"/>
+              </a:lnSpc>
+            </a:pPr>
+            <a:r>
+              <a:rPr sz="2400" b="1">
+                <a:solidFill>
+                  <a:srgbClr val="1E5BC6"/>
+                </a:solidFill>
+                <a:latin typeface="Pretendard"/>
+                <a:ea typeface="Pretendard"/>
+                <a:cs typeface="Pretendard"/>
+              </a:rPr>
+              <a:t>5-5 · 실습 1.5H 마무리</a:t>
+            </a:r>
+          </a:p>
+        </p:txBody>
+      </p:sp>
+      <p:sp>
+        <p:nvSpPr>
+          <p:cNvPr id="6" name="TextBox 5"/>
+          <p:cNvSpPr txBox="1"/>
+          <p:nvPr/>
+        </p:nvSpPr>
+        <p:spPr>
+          <a:xfrm>
+            <a:off x="1143000" y="3771900"/>
+            <a:ext cx="16002000" cy="800100"/>
+          </a:xfrm>
+          <a:prstGeom prst="rect">
+            <a:avLst/>
+          </a:prstGeom>
+          <a:noFill/>
+        </p:spPr>
+        <p:txBody>
+          <a:bodyPr wrap="square" lIns="0" rIns="0" tIns="0" bIns="0" anchor="t">
+            <a:spAutoFit/>
+          </a:bodyPr>
+          <a:lstStyle/>
+          <a:p>
+            <a:pPr algn="l">
+              <a:lnSpc>
+                <a:spcPct val="100000"/>
+              </a:lnSpc>
+            </a:pPr>
+            <a:r>
+              <a:rPr sz="5100" b="1">
+                <a:solidFill>
+                  <a:srgbClr val="0D2B5E"/>
+                </a:solidFill>
+                <a:latin typeface="Pretendard"/>
+                <a:ea typeface="Pretendard"/>
+                <a:cs typeface="Pretendard"/>
+              </a:rPr>
+              <a:t>다음은 배치 스크립트로 데이터 마트 (1H)</a:t>
+            </a:r>
+          </a:p>
+        </p:txBody>
+      </p:sp>
+      <p:sp>
+        <p:nvSpPr>
+          <p:cNvPr id="7" name="TextBox 6"/>
+          <p:cNvSpPr txBox="1"/>
+          <p:nvPr/>
+        </p:nvSpPr>
+        <p:spPr>
+          <a:xfrm>
+            <a:off x="1143000" y="4724400"/>
+            <a:ext cx="16002000" cy="438150"/>
+          </a:xfrm>
+          <a:prstGeom prst="rect">
+            <a:avLst/>
+          </a:prstGeom>
+          <a:noFill/>
+        </p:spPr>
+        <p:txBody>
+          <a:bodyPr wrap="square" lIns="0" rIns="0" tIns="0" bIns="0" anchor="t">
+            <a:spAutoFit/>
+          </a:bodyPr>
+          <a:lstStyle/>
+          <a:p>
+            <a:pPr algn="l">
+              <a:lnSpc>
+                <a:spcPct val="130000"/>
+              </a:lnSpc>
+            </a:pPr>
+            <a:r>
+              <a:rPr sz="2400" b="0">
+                <a:solidFill>
+                  <a:srgbClr val="3D3D3D"/>
+                </a:solidFill>
+                <a:latin typeface="Pretendard"/>
+                <a:ea typeface="Pretendard"/>
+                <a:cs typeface="Pretendard"/>
+              </a:rPr>
+              <a:t>셸을 exit() 로 나온 뒤, 지금까지의 가공을 mart.py 한 파일로 묶어 spark-submit 으로 돌립니다 — 5주차 산출물입니다</a:t>
+            </a:r>
+          </a:p>
+        </p:txBody>
+      </p:sp>
+      <p:sp>
+        <p:nvSpPr>
+          <p:cNvPr id="8" name="Rounded Rectangle 7"/>
+          <p:cNvSpPr/>
+          <p:nvPr/>
+        </p:nvSpPr>
+        <p:spPr>
+          <a:xfrm>
+            <a:off x="1143000" y="5257800"/>
+            <a:ext cx="7772400" cy="819150"/>
+          </a:xfrm>
+          <a:prstGeom prst="roundRect">
+            <a:avLst>
+              <a:gd name="adj" fmla="val 6976"/>
+            </a:avLst>
+          </a:prstGeom>
+          <a:solidFill>
+            <a:srgbClr val="FAFBFD"/>
+          </a:solidFill>
+          <a:ln w="9525">
+            <a:solidFill>
+              <a:srgbClr val="DCE1E8"/>
+            </a:solidFill>
+          </a:ln>
+          <a:effectLst/>
+        </p:spPr>
+        <p:txBody>
+          <a:bodyPr rtlCol="0" anchor="ctr" wrap="square"/>
+          <a:lstStyle/>
+          <a:p>
+            <a:pPr algn="ctr"/>
+          </a:p>
+        </p:txBody>
+      </p:sp>
+      <p:sp>
+        <p:nvSpPr>
+          <p:cNvPr id="9" name="TextBox 8"/>
+          <p:cNvSpPr txBox="1"/>
+          <p:nvPr/>
+        </p:nvSpPr>
+        <p:spPr>
+          <a:xfrm>
+            <a:off x="1428750" y="5486400"/>
+            <a:ext cx="419100" cy="381000"/>
+          </a:xfrm>
+          <a:prstGeom prst="rect">
+            <a:avLst/>
+          </a:prstGeom>
+          <a:noFill/>
+        </p:spPr>
+        <p:txBody>
+          <a:bodyPr wrap="square" lIns="0" rIns="0" tIns="0" bIns="0" anchor="t">
+            <a:spAutoFit/>
+          </a:bodyPr>
+          <a:lstStyle/>
+          <a:p>
+            <a:pPr algn="l">
+              <a:lnSpc>
+                <a:spcPct val="100000"/>
+              </a:lnSpc>
+            </a:pPr>
+            <a:r>
+              <a:rPr sz="2475" b="1">
+                <a:solidFill>
+                  <a:srgbClr val="1E5BC6"/>
+                </a:solidFill>
+                <a:latin typeface="Pretendard"/>
+                <a:ea typeface="Pretendard"/>
+                <a:cs typeface="Pretendard"/>
+              </a:rPr>
+              <a:t>✓</a:t>
+            </a:r>
+          </a:p>
+        </p:txBody>
+      </p:sp>
+      <p:sp>
+        <p:nvSpPr>
+          <p:cNvPr id="10" name="TextBox 9"/>
+          <p:cNvSpPr txBox="1"/>
+          <p:nvPr/>
+        </p:nvSpPr>
+        <p:spPr>
+          <a:xfrm>
+            <a:off x="1905000" y="5486400"/>
+            <a:ext cx="6724650" cy="381000"/>
+          </a:xfrm>
+          <a:prstGeom prst="rect">
+            <a:avLst/>
+          </a:prstGeom>
+          <a:noFill/>
+        </p:spPr>
+        <p:txBody>
+          <a:bodyPr wrap="square" lIns="0" rIns="0" tIns="0" bIns="0" anchor="t">
+            <a:spAutoFit/>
+          </a:bodyPr>
+          <a:lstStyle/>
+          <a:p>
+            <a:pPr algn="l">
+              <a:lnSpc>
+                <a:spcPct val="100000"/>
+              </a:lnSpc>
+            </a:pPr>
+            <a:r>
+              <a:rPr sz="2475" b="1">
+                <a:solidFill>
+                  <a:srgbClr val="0D2B5E"/>
+                </a:solidFill>
+                <a:latin typeface="Pretendard"/>
+                <a:ea typeface="Pretendard"/>
+                <a:cs typeface="Pretendard"/>
+              </a:rPr>
+              <a:t>exit() 로 셸의 코어 4개 놓아주기</a:t>
+            </a:r>
+          </a:p>
+        </p:txBody>
+      </p:sp>
+      <p:sp>
+        <p:nvSpPr>
+          <p:cNvPr id="11" name="Rounded Rectangle 10"/>
+          <p:cNvSpPr/>
+          <p:nvPr/>
+        </p:nvSpPr>
+        <p:spPr>
+          <a:xfrm>
+            <a:off x="9372600" y="5257800"/>
+            <a:ext cx="7772400" cy="819150"/>
+          </a:xfrm>
+          <a:prstGeom prst="roundRect">
+            <a:avLst>
+              <a:gd name="adj" fmla="val 6976"/>
+            </a:avLst>
+          </a:prstGeom>
+          <a:solidFill>
+            <a:srgbClr val="FAFBFD"/>
+          </a:solidFill>
+          <a:ln w="9525">
+            <a:solidFill>
+              <a:srgbClr val="DCE1E8"/>
+            </a:solidFill>
+          </a:ln>
+          <a:effectLst/>
+        </p:spPr>
+        <p:txBody>
+          <a:bodyPr rtlCol="0" anchor="ctr" wrap="square"/>
+          <a:lstStyle/>
+          <a:p>
+            <a:pPr algn="ctr"/>
+          </a:p>
+        </p:txBody>
+      </p:sp>
+      <p:sp>
+        <p:nvSpPr>
+          <p:cNvPr id="12" name="TextBox 11"/>
+          <p:cNvSpPr txBox="1"/>
+          <p:nvPr/>
+        </p:nvSpPr>
+        <p:spPr>
+          <a:xfrm>
+            <a:off x="9658350" y="5486400"/>
+            <a:ext cx="419100" cy="381000"/>
+          </a:xfrm>
+          <a:prstGeom prst="rect">
+            <a:avLst/>
+          </a:prstGeom>
+          <a:noFill/>
+        </p:spPr>
+        <p:txBody>
+          <a:bodyPr wrap="square" lIns="0" rIns="0" tIns="0" bIns="0" anchor="t">
+            <a:spAutoFit/>
+          </a:bodyPr>
+          <a:lstStyle/>
+          <a:p>
+            <a:pPr algn="l">
+              <a:lnSpc>
+                <a:spcPct val="100000"/>
+              </a:lnSpc>
+            </a:pPr>
+            <a:r>
+              <a:rPr sz="2475" b="1">
+                <a:solidFill>
+                  <a:srgbClr val="1E5BC6"/>
+                </a:solidFill>
+                <a:latin typeface="Pretendard"/>
+                <a:ea typeface="Pretendard"/>
+                <a:cs typeface="Pretendard"/>
+              </a:rPr>
+              <a:t>✓</a:t>
+            </a:r>
+          </a:p>
+        </p:txBody>
+      </p:sp>
+      <p:sp>
+        <p:nvSpPr>
+          <p:cNvPr id="13" name="TextBox 12"/>
+          <p:cNvSpPr txBox="1"/>
+          <p:nvPr/>
+        </p:nvSpPr>
+        <p:spPr>
+          <a:xfrm>
+            <a:off x="10134600" y="5486400"/>
+            <a:ext cx="6724650" cy="381000"/>
+          </a:xfrm>
+          <a:prstGeom prst="rect">
+            <a:avLst/>
+          </a:prstGeom>
+          <a:noFill/>
+        </p:spPr>
+        <p:txBody>
+          <a:bodyPr wrap="square" lIns="0" rIns="0" tIns="0" bIns="0" anchor="t">
+            <a:spAutoFit/>
+          </a:bodyPr>
+          <a:lstStyle/>
+          <a:p>
+            <a:pPr algn="l">
+              <a:lnSpc>
+                <a:spcPct val="100000"/>
+              </a:lnSpc>
+            </a:pPr>
+            <a:r>
+              <a:rPr sz="2475" b="1">
+                <a:solidFill>
+                  <a:srgbClr val="0D2B5E"/>
+                </a:solidFill>
+                <a:latin typeface="Pretendard"/>
+                <a:ea typeface="Pretendard"/>
+                <a:cs typeface="Pretendard"/>
+              </a:rPr>
+              <a:t>히어독으로 mart.py 작성 · spark-submit</a:t>
+            </a:r>
+          </a:p>
+        </p:txBody>
+      </p:sp>
+      <p:sp>
+        <p:nvSpPr>
+          <p:cNvPr id="14" name="Rounded Rectangle 13"/>
+          <p:cNvSpPr/>
+          <p:nvPr/>
+        </p:nvSpPr>
+        <p:spPr>
+          <a:xfrm>
+            <a:off x="1143000" y="6286500"/>
+            <a:ext cx="7772400" cy="819150"/>
+          </a:xfrm>
+          <a:prstGeom prst="roundRect">
+            <a:avLst>
+              <a:gd name="adj" fmla="val 6976"/>
+            </a:avLst>
+          </a:prstGeom>
+          <a:solidFill>
+            <a:srgbClr val="FAFBFD"/>
+          </a:solidFill>
+          <a:ln w="9525">
+            <a:solidFill>
+              <a:srgbClr val="DCE1E8"/>
+            </a:solidFill>
+          </a:ln>
+          <a:effectLst/>
+        </p:spPr>
+        <p:txBody>
+          <a:bodyPr rtlCol="0" anchor="ctr" wrap="square"/>
+          <a:lstStyle/>
+          <a:p>
+            <a:pPr algn="ctr"/>
+          </a:p>
+        </p:txBody>
+      </p:sp>
+      <p:sp>
+        <p:nvSpPr>
+          <p:cNvPr id="15" name="TextBox 14"/>
+          <p:cNvSpPr txBox="1"/>
+          <p:nvPr/>
+        </p:nvSpPr>
+        <p:spPr>
+          <a:xfrm>
+            <a:off x="1428750" y="6515100"/>
+            <a:ext cx="419100" cy="381000"/>
+          </a:xfrm>
+          <a:prstGeom prst="rect">
+            <a:avLst/>
+          </a:prstGeom>
+          <a:noFill/>
+        </p:spPr>
+        <p:txBody>
+          <a:bodyPr wrap="square" lIns="0" rIns="0" tIns="0" bIns="0" anchor="t">
+            <a:spAutoFit/>
+          </a:bodyPr>
+          <a:lstStyle/>
+          <a:p>
+            <a:pPr algn="l">
+              <a:lnSpc>
+                <a:spcPct val="100000"/>
+              </a:lnSpc>
+            </a:pPr>
+            <a:r>
+              <a:rPr sz="2475" b="1">
+                <a:solidFill>
+                  <a:srgbClr val="1E5BC6"/>
+                </a:solidFill>
+                <a:latin typeface="Pretendard"/>
+                <a:ea typeface="Pretendard"/>
+                <a:cs typeface="Pretendard"/>
+              </a:rPr>
+              <a:t>✓</a:t>
+            </a:r>
+          </a:p>
+        </p:txBody>
+      </p:sp>
+      <p:sp>
+        <p:nvSpPr>
+          <p:cNvPr id="16" name="TextBox 15"/>
+          <p:cNvSpPr txBox="1"/>
+          <p:nvPr/>
+        </p:nvSpPr>
+        <p:spPr>
+          <a:xfrm>
+            <a:off x="1905000" y="6515100"/>
+            <a:ext cx="6724650" cy="381000"/>
+          </a:xfrm>
+          <a:prstGeom prst="rect">
+            <a:avLst/>
+          </a:prstGeom>
+          <a:noFill/>
+        </p:spPr>
+        <p:txBody>
+          <a:bodyPr wrap="square" lIns="0" rIns="0" tIns="0" bIns="0" anchor="t">
+            <a:spAutoFit/>
+          </a:bodyPr>
+          <a:lstStyle/>
+          <a:p>
+            <a:pPr algn="l">
+              <a:lnSpc>
+                <a:spcPct val="100000"/>
+              </a:lnSpc>
+            </a:pPr>
+            <a:r>
+              <a:rPr sz="2475" b="1">
+                <a:solidFill>
+                  <a:srgbClr val="0D2B5E"/>
+                </a:solidFill>
+                <a:latin typeface="Pretendard"/>
+                <a:ea typeface="Pretendard"/>
+                <a:cs typeface="Pretendard"/>
+              </a:rPr>
+              <a:t>두 번 돌려 멱등 확인</a:t>
+            </a:r>
+          </a:p>
+        </p:txBody>
+      </p:sp>
+      <p:sp>
+        <p:nvSpPr>
+          <p:cNvPr id="17" name="Rounded Rectangle 16"/>
+          <p:cNvSpPr/>
+          <p:nvPr/>
+        </p:nvSpPr>
+        <p:spPr>
+          <a:xfrm>
+            <a:off x="9372600" y="6286500"/>
+            <a:ext cx="7772400" cy="819150"/>
+          </a:xfrm>
+          <a:prstGeom prst="roundRect">
+            <a:avLst>
+              <a:gd name="adj" fmla="val 6976"/>
+            </a:avLst>
+          </a:prstGeom>
+          <a:solidFill>
+            <a:srgbClr val="FAFBFD"/>
+          </a:solidFill>
+          <a:ln w="9525">
+            <a:solidFill>
+              <a:srgbClr val="DCE1E8"/>
+            </a:solidFill>
+          </a:ln>
+          <a:effectLst/>
+        </p:spPr>
+        <p:txBody>
+          <a:bodyPr rtlCol="0" anchor="ctr" wrap="square"/>
+          <a:lstStyle/>
+          <a:p>
+            <a:pPr algn="ctr"/>
+          </a:p>
+        </p:txBody>
+      </p:sp>
+      <p:sp>
+        <p:nvSpPr>
+          <p:cNvPr id="18" name="TextBox 17"/>
+          <p:cNvSpPr txBox="1"/>
+          <p:nvPr/>
+        </p:nvSpPr>
+        <p:spPr>
+          <a:xfrm>
+            <a:off x="9658350" y="6515100"/>
+            <a:ext cx="419100" cy="381000"/>
+          </a:xfrm>
+          <a:prstGeom prst="rect">
+            <a:avLst/>
+          </a:prstGeom>
+          <a:noFill/>
+        </p:spPr>
+        <p:txBody>
+          <a:bodyPr wrap="square" lIns="0" rIns="0" tIns="0" bIns="0" anchor="t">
+            <a:spAutoFit/>
+          </a:bodyPr>
+          <a:lstStyle/>
+          <a:p>
+            <a:pPr algn="l">
+              <a:lnSpc>
+                <a:spcPct val="100000"/>
+              </a:lnSpc>
+            </a:pPr>
+            <a:r>
+              <a:rPr sz="2475" b="1">
+                <a:solidFill>
+                  <a:srgbClr val="1E5BC6"/>
+                </a:solidFill>
+                <a:latin typeface="Pretendard"/>
+                <a:ea typeface="Pretendard"/>
+                <a:cs typeface="Pretendard"/>
+              </a:rPr>
+              <a:t>✓</a:t>
+            </a:r>
+          </a:p>
+        </p:txBody>
+      </p:sp>
+      <p:sp>
+        <p:nvSpPr>
+          <p:cNvPr id="19" name="TextBox 18"/>
+          <p:cNvSpPr txBox="1"/>
+          <p:nvPr/>
+        </p:nvSpPr>
+        <p:spPr>
+          <a:xfrm>
+            <a:off x="10134600" y="6515100"/>
+            <a:ext cx="6724650" cy="381000"/>
+          </a:xfrm>
+          <a:prstGeom prst="rect">
+            <a:avLst/>
+          </a:prstGeom>
+          <a:noFill/>
+        </p:spPr>
+        <p:txBody>
+          <a:bodyPr wrap="square" lIns="0" rIns="0" tIns="0" bIns="0" anchor="t">
+            <a:spAutoFit/>
+          </a:bodyPr>
+          <a:lstStyle/>
+          <a:p>
+            <a:pPr algn="l">
+              <a:lnSpc>
+                <a:spcPct val="100000"/>
+              </a:lnSpc>
+            </a:pPr>
+            <a:r>
+              <a:rPr sz="2475" b="1">
+                <a:solidFill>
+                  <a:srgbClr val="0D2B5E"/>
+                </a:solidFill>
+                <a:latin typeface="Pretendard"/>
+                <a:ea typeface="Pretendard"/>
+                <a:cs typeface="Pretendard"/>
+              </a:rPr>
+              <a:t>날짜 인자 · mart.log · 종료 코드</a:t>
+            </a:r>
+          </a:p>
+        </p:txBody>
+      </p:sp>
+      <p:sp>
+        <p:nvSpPr>
+          <p:cNvPr id="20" name="Rectangle 19"/>
+          <p:cNvSpPr/>
+          <p:nvPr/>
+        </p:nvSpPr>
+        <p:spPr>
+          <a:xfrm>
+            <a:off x="1143000" y="7715250"/>
+            <a:ext cx="47625" cy="819150"/>
+          </a:xfrm>
+          <a:prstGeom prst="rect">
+            <a:avLst/>
+          </a:prstGeom>
+          <a:solidFill>
+            <a:srgbClr val="1E5BC6"/>
+          </a:solidFill>
+          <a:ln>
+            <a:noFill/>
+          </a:ln>
+          <a:effectLst/>
+        </p:spPr>
+        <p:txBody>
+          <a:bodyPr rtlCol="0" anchor="ctr" wrap="square"/>
+          <a:lstStyle/>
+          <a:p>
+            <a:pPr algn="ctr"/>
+          </a:p>
+        </p:txBody>
+      </p:sp>
+      <p:sp>
+        <p:nvSpPr>
           <p:cNvPr id="21" name="TextBox 20"/>
           <p:cNvSpPr txBox="1"/>
           <p:nvPr/>
@@ -4399,7 +5608,7 @@
                 <a:ea typeface="Pretendard"/>
                 <a:cs typeface="Pretendard"/>
               </a:rPr>
-              <a:t>파티션 수 · 200 vs 8 시간 · 파일 수</a:t>
+              <a:t>4·8·2·2 · 200 vs 8 시간 · 파일 4·1</a:t>
             </a:r>
           </a:p>
         </p:txBody>
@@ -4765,7 +5974,7 @@
                 <a:ea typeface="Pretendard"/>
                 <a:cs typeface="Pretendard"/>
               </a:rPr>
-              <a:t>파티션 수 변화를 getNumPartitions() 로 확인한다</a:t>
+              <a:t>getNumPartitions() 로 4 · 8 · 2 · 2 를 확인한다</a:t>
             </a:r>
           </a:p>
         </p:txBody>
@@ -4911,7 +6120,7 @@
                 <a:ea typeface="Pretendard"/>
                 <a:cs typeface="Pretendard"/>
               </a:rPr>
-              <a:t>Spark UI 에서 Stage 수와 Shuffle Read/Write 를 읽는다</a:t>
+              <a:t>4040 Jobs 탭에서 셔플 있는 잡과 없는 잡을 가른다</a:t>
             </a:r>
           </a:p>
         </p:txBody>
@@ -5057,7 +6266,7 @@
                 <a:ea typeface="Pretendard"/>
                 <a:cs typeface="Pretendard"/>
               </a:rPr>
-              <a:t>shuffle.partitions 를 200·32·8 로 바꿔 시간을 비교한다</a:t>
+              <a:t>AQE 를 켜고·끄고 shuffle.partitions 200 · 8 을 잰다</a:t>
             </a:r>
           </a:p>
         </p:txBody>
@@ -5203,7 +6412,7 @@
                 <a:ea typeface="Pretendard"/>
                 <a:cs typeface="Pretendard"/>
               </a:rPr>
-              <a:t>스큐를 만들어 한 태스크만 오래 걸리는 것을 본다</a:t>
+              <a:t>스큐를 만들어 Task 시간 Max 와 Median 을 비교한다</a:t>
             </a:r>
           </a:p>
         </p:txBody>
@@ -5278,7 +6487,7 @@
                 <a:ea typeface="Pretendard"/>
                 <a:cs typeface="Pretendard"/>
               </a:rPr>
-              <a:t>잰 값(파티션 수·실행 시간·파일 수)은 다음 1H 산출물 실측표에 그대로 적습니다</a:t>
+              <a:t>잰 값(파티션 수·시간·파일 수)은 다음 1H 실측표에 그대로 적습니다</a:t>
             </a:r>
           </a:p>
         </p:txBody>
@@ -5651,7 +6860,7 @@
                 <a:ea typeface="Pretendard"/>
                 <a:cs typeface="Pretendard"/>
               </a:rPr>
-              <a:t>5-4 에서 쓴 옵션 그대로 PySpark 셸을 열고 시작합니다</a:t>
+              <a:t>bash lake-pyspark.sh 로 셸을 띄우고 localhost:4040 Jobs 탭을 열어 둡니다</a:t>
             </a:r>
           </a:p>
         </p:txBody>
@@ -5756,7 +6965,7 @@
                 <a:ea typeface="Pretendard"/>
                 <a:cs typeface="Pretendard"/>
               </a:rPr>
-              <a:t>1. 파티션 수</a:t>
+              <a:t>1·2. 파티션</a:t>
             </a:r>
           </a:p>
         </p:txBody>
@@ -5797,7 +7006,7 @@
                 <a:ea typeface="Pretendard"/>
                 <a:cs typeface="Pretendard"/>
               </a:rPr>
-              <a:t>repartition(8)</a:t>
+              <a:t>수 4·8·2·2</a:t>
             </a:r>
           </a:p>
           <a:p>
@@ -5815,7 +7024,7 @@
                 <a:ea typeface="Pretendard"/>
                 <a:cs typeface="Pretendard"/>
               </a:rPr>
-              <a:t>coalesce(2)</a:t>
+              <a:t>조각별 행 수</a:t>
             </a:r>
           </a:p>
         </p:txBody>
@@ -5920,7 +7129,7 @@
                 <a:ea typeface="Pretendard"/>
                 <a:cs typeface="Pretendard"/>
               </a:rPr>
-              <a:t>2. 분포</a:t>
+              <a:t>3. 셔플 관찰</a:t>
             </a:r>
           </a:p>
         </p:txBody>
@@ -5961,7 +7170,7 @@
                 <a:ea typeface="Pretendard"/>
                 <a:cs typeface="Pretendard"/>
               </a:rPr>
-              <a:t>파티션별</a:t>
+              <a:t>Jobs 탭</a:t>
             </a:r>
           </a:p>
           <a:p>
@@ -5979,7 +7188,7 @@
                 <a:ea typeface="Pretendard"/>
                 <a:cs typeface="Pretendard"/>
               </a:rPr>
-              <a:t>행 수</a:t>
+              <a:t>explain()</a:t>
             </a:r>
           </a:p>
         </p:txBody>
@@ -6084,7 +7293,7 @@
                 <a:ea typeface="Pretendard"/>
                 <a:cs typeface="Pretendard"/>
               </a:rPr>
-              <a:t>3. 셔플 관찰</a:t>
+              <a:t>4. 셔플 파티션</a:t>
             </a:r>
           </a:p>
         </p:txBody>
@@ -6125,7 +7334,7 @@
                 <a:ea typeface="Pretendard"/>
                 <a:cs typeface="Pretendard"/>
               </a:rPr>
-              <a:t>UI Stages</a:t>
+              <a:t>AQE 켜고·끄고</a:t>
             </a:r>
           </a:p>
           <a:p>
@@ -6143,7 +7352,7 @@
                 <a:ea typeface="Pretendard"/>
                 <a:cs typeface="Pretendard"/>
               </a:rPr>
-              <a:t>explain()</a:t>
+              <a:t>200 vs 8</a:t>
             </a:r>
           </a:p>
         </p:txBody>
@@ -6248,7 +7457,7 @@
                 <a:ea typeface="Pretendard"/>
                 <a:cs typeface="Pretendard"/>
               </a:rPr>
-              <a:t>4. 셔플 파티션</a:t>
+              <a:t>5. 스큐</a:t>
             </a:r>
           </a:p>
         </p:txBody>
@@ -6289,7 +7498,7 @@
                 <a:ea typeface="Pretendard"/>
                 <a:cs typeface="Pretendard"/>
               </a:rPr>
-              <a:t>200·32·8</a:t>
+              <a:t>키 0 에 90%</a:t>
             </a:r>
           </a:p>
           <a:p>
@@ -6307,7 +7516,7 @@
                 <a:ea typeface="Pretendard"/>
                 <a:cs typeface="Pretendard"/>
               </a:rPr>
-              <a:t>시간 비교</a:t>
+              <a:t>Max / Median</a:t>
             </a:r>
           </a:p>
         </p:txBody>
@@ -6412,7 +7621,7 @@
                 <a:ea typeface="Pretendard"/>
                 <a:cs typeface="Pretendard"/>
               </a:rPr>
-              <a:t>5·6. 스큐·파일</a:t>
+              <a:t>6. 파일 수</a:t>
             </a:r>
           </a:p>
         </p:txBody>
@@ -6453,7 +7662,7 @@
                 <a:ea typeface="Pretendard"/>
                 <a:cs typeface="Pretendard"/>
               </a:rPr>
-              <a:t>hot 키</a:t>
+              <a:t>test-narrow 4</a:t>
             </a:r>
           </a:p>
           <a:p>
@@ -6471,7 +7680,7 @@
                 <a:ea typeface="Pretendard"/>
                 <a:cs typeface="Pretendard"/>
               </a:rPr>
-              <a:t>coalesce(1)</a:t>
+              <a:t>test-one 1</a:t>
             </a:r>
           </a:p>
         </p:txBody>
@@ -6773,7 +7982,7 @@
                 <a:ea typeface="Pretendard"/>
                 <a:cs typeface="Pretendard"/>
               </a:rPr>
-              <a:t>핵심 명령 — 파티션 수와 분포</a:t>
+              <a:t>파티션 수와 조각별 행 수 — 실측</a:t>
             </a:r>
           </a:p>
         </p:txBody>
@@ -6817,7 +8026,7 @@
         <p:spPr>
           <a:xfrm>
             <a:off x="1143000" y="2781300"/>
-            <a:ext cx="1633633" cy="571500"/>
+            <a:ext cx="7162800" cy="590550"/>
           </a:xfrm>
           <a:prstGeom prst="rect">
             <a:avLst/>
@@ -6847,7 +8056,7 @@
         <p:spPr>
           <a:xfrm>
             <a:off x="1143000" y="2781300"/>
-            <a:ext cx="1633633" cy="571500"/>
+            <a:ext cx="7162800" cy="590550"/>
           </a:xfrm>
           <a:prstGeom prst="rect">
             <a:avLst/>
@@ -6866,7 +8075,7 @@
               </a:lnSpc>
             </a:pPr>
             <a:r>
-              <a:rPr sz="1800" b="1">
+              <a:rPr sz="2025" b="1">
                 <a:solidFill>
                   <a:srgbClr val="FFFFFF"/>
                 </a:solidFill>
@@ -6874,7 +8083,7 @@
                 <a:ea typeface="Pretendard"/>
                 <a:cs typeface="Pretendard"/>
               </a:rPr>
-              <a:t>1천만 행</a:t>
+              <a:t>명령</a:t>
             </a:r>
           </a:p>
         </p:txBody>
@@ -6887,11 +8096,159 @@
         </p:nvSpPr>
         <p:spPr>
           <a:xfrm>
-            <a:off x="2776633" y="2781300"/>
-            <a:ext cx="14368367" cy="571500"/>
-          </a:xfrm>
-          <a:prstGeom prst="rect">
-            <a:avLst/>
+            <a:off x="8343900" y="2781300"/>
+            <a:ext cx="8801100" cy="590550"/>
+          </a:xfrm>
+          <a:prstGeom prst="rect">
+            <a:avLst/>
+          </a:prstGeom>
+          <a:solidFill>
+            <a:srgbClr val="1E5BC6"/>
+          </a:solidFill>
+          <a:ln>
+            <a:noFill/>
+          </a:ln>
+          <a:effectLst/>
+        </p:spPr>
+        <p:txBody>
+          <a:bodyPr rtlCol="0" anchor="ctr" wrap="square"/>
+          <a:lstStyle/>
+          <a:p>
+            <a:pPr algn="ctr"/>
+          </a:p>
+        </p:txBody>
+      </p:sp>
+      <p:sp>
+        <p:nvSpPr>
+          <p:cNvPr id="11" name="TextBox 10"/>
+          <p:cNvSpPr txBox="1"/>
+          <p:nvPr/>
+        </p:nvSpPr>
+        <p:spPr>
+          <a:xfrm>
+            <a:off x="8343900" y="2781300"/>
+            <a:ext cx="8801100" cy="590550"/>
+          </a:xfrm>
+          <a:prstGeom prst="rect">
+            <a:avLst/>
+          </a:prstGeom>
+          <a:noFill/>
+        </p:spPr>
+        <p:txBody>
+          <a:bodyPr wrap="square" lIns="0" rIns="0" tIns="0" bIns="0" anchor="ctr">
+            <a:spAutoFit/>
+          </a:bodyPr>
+          <a:lstStyle/>
+          <a:p>
+            <a:pPr algn="ctr">
+              <a:lnSpc>
+                <a:spcPct val="100000"/>
+              </a:lnSpc>
+            </a:pPr>
+            <a:r>
+              <a:rPr sz="2025" b="1">
+                <a:solidFill>
+                  <a:srgbClr val="FFFFFF"/>
+                </a:solidFill>
+                <a:latin typeface="Pretendard"/>
+                <a:ea typeface="Pretendard"/>
+                <a:cs typeface="Pretendard"/>
+              </a:rPr>
+              <a:t>실측</a:t>
+            </a:r>
+          </a:p>
+        </p:txBody>
+      </p:sp>
+      <p:sp>
+        <p:nvSpPr>
+          <p:cNvPr id="12" name="Rounded Rectangle 11"/>
+          <p:cNvSpPr/>
+          <p:nvPr/>
+        </p:nvSpPr>
+        <p:spPr>
+          <a:xfrm>
+            <a:off x="1143000" y="3448050"/>
+            <a:ext cx="7162800" cy="519793"/>
+          </a:xfrm>
+          <a:prstGeom prst="roundRect">
+            <a:avLst>
+              <a:gd name="adj" fmla="val 7329"/>
+            </a:avLst>
+          </a:prstGeom>
+          <a:solidFill>
+            <a:srgbClr val="EDF3FD"/>
+          </a:solidFill>
+          <a:ln w="9525">
+            <a:solidFill>
+              <a:srgbClr val="BFD3F5"/>
+            </a:solidFill>
+          </a:ln>
+          <a:effectLst/>
+        </p:spPr>
+        <p:txBody>
+          <a:bodyPr rtlCol="0" anchor="ctr" wrap="square"/>
+          <a:lstStyle/>
+          <a:p>
+            <a:pPr algn="ctr"/>
+          </a:p>
+        </p:txBody>
+      </p:sp>
+      <p:sp>
+        <p:nvSpPr>
+          <p:cNvPr id="13" name="TextBox 12"/>
+          <p:cNvSpPr txBox="1"/>
+          <p:nvPr/>
+        </p:nvSpPr>
+        <p:spPr>
+          <a:xfrm>
+            <a:off x="1238250" y="3448050"/>
+            <a:ext cx="6972300" cy="519793"/>
+          </a:xfrm>
+          <a:prstGeom prst="rect">
+            <a:avLst/>
+          </a:prstGeom>
+          <a:noFill/>
+        </p:spPr>
+        <p:txBody>
+          <a:bodyPr wrap="square" lIns="0" rIns="0" tIns="0" bIns="0" anchor="ctr">
+            <a:spAutoFit/>
+          </a:bodyPr>
+          <a:lstStyle/>
+          <a:p>
+            <a:pPr algn="l">
+              <a:lnSpc>
+                <a:spcPct val="115000"/>
+              </a:lnSpc>
+            </a:pPr>
+            <a:r>
+              <a:rPr sz="1875" b="1">
+                <a:solidFill>
+                  <a:srgbClr val="0D2B5E"/>
+                </a:solidFill>
+                <a:latin typeface="Pretendard"/>
+                <a:ea typeface="Pretendard"/>
+                <a:cs typeface="Pretendard"/>
+              </a:rPr>
+              <a:t>spark.range(1, 10_000_001)</a:t>
+            </a:r>
+          </a:p>
+        </p:txBody>
+      </p:sp>
+      <p:sp>
+        <p:nvSpPr>
+          <p:cNvPr id="14" name="Rounded Rectangle 13"/>
+          <p:cNvSpPr/>
+          <p:nvPr/>
+        </p:nvSpPr>
+        <p:spPr>
+          <a:xfrm>
+            <a:off x="8343900" y="3448050"/>
+            <a:ext cx="8801100" cy="519793"/>
+          </a:xfrm>
+          <a:prstGeom prst="roundRect">
+            <a:avLst>
+              <a:gd name="adj" fmla="val 7329"/>
+            </a:avLst>
           </a:prstGeom>
           <a:solidFill>
             <a:srgbClr val="FAFBFD"/>
@@ -6913,14 +8270,14 @@
       </p:sp>
       <p:sp>
         <p:nvSpPr>
-          <p:cNvPr id="11" name="TextBox 10"/>
-          <p:cNvSpPr txBox="1"/>
-          <p:nvPr/>
-        </p:nvSpPr>
-        <p:spPr>
-          <a:xfrm>
-            <a:off x="2929033" y="2781300"/>
-            <a:ext cx="14063567" cy="571500"/>
+          <p:cNvPr id="15" name="TextBox 14"/>
+          <p:cNvSpPr txBox="1"/>
+          <p:nvPr/>
+        </p:nvSpPr>
+        <p:spPr>
+          <a:xfrm>
+            <a:off x="8439150" y="3448050"/>
+            <a:ext cx="8610600" cy="519793"/>
           </a:xfrm>
           <a:prstGeom prst="rect">
             <a:avLst/>
@@ -6933,13 +8290,13 @@
           </a:bodyPr>
           <a:lstStyle/>
           <a:p>
-            <a:pPr algn="l">
+            <a:pPr algn="ctr">
               <a:lnSpc>
                 <a:spcPct val="115000"/>
               </a:lnSpc>
             </a:pPr>
             <a:r>
-              <a:rPr sz="1800" b="0">
+              <a:rPr sz="1875" b="0">
                 <a:solidFill>
                   <a:srgbClr val="3D3D3D"/>
                 </a:solidFill>
@@ -6947,30 +8304,34 @@
                 <a:ea typeface="Pretendard"/>
                 <a:cs typeface="Pretendard"/>
               </a:rPr>
-              <a:t>df = spark.range(1, 10_000_001)</a:t>
-            </a:r>
-          </a:p>
-        </p:txBody>
-      </p:sp>
-      <p:sp>
-        <p:nvSpPr>
-          <p:cNvPr id="12" name="Rectangle 11"/>
+              <a:t>기본 4 (워커 둘 × 코어 2)</a:t>
+            </a:r>
+          </a:p>
+        </p:txBody>
+      </p:sp>
+      <p:sp>
+        <p:nvSpPr>
+          <p:cNvPr id="16" name="Rounded Rectangle 15"/>
           <p:cNvSpPr/>
           <p:nvPr/>
         </p:nvSpPr>
         <p:spPr>
           <a:xfrm>
-            <a:off x="1143000" y="3429000"/>
-            <a:ext cx="1633633" cy="571500"/>
-          </a:xfrm>
-          <a:prstGeom prst="rect">
-            <a:avLst/>
-          </a:prstGeom>
-          <a:solidFill>
-            <a:srgbClr val="0D2B5E"/>
-          </a:solidFill>
-          <a:ln>
-            <a:noFill/>
+            <a:off x="1143000" y="4044043"/>
+            <a:ext cx="7162800" cy="519793"/>
+          </a:xfrm>
+          <a:prstGeom prst="roundRect">
+            <a:avLst>
+              <a:gd name="adj" fmla="val 7329"/>
+            </a:avLst>
+          </a:prstGeom>
+          <a:solidFill>
+            <a:srgbClr val="EDF3FD"/>
+          </a:solidFill>
+          <a:ln w="9525">
+            <a:solidFill>
+              <a:srgbClr val="BFD3F5"/>
+            </a:solidFill>
           </a:ln>
           <a:effectLst/>
         </p:spPr>
@@ -6984,14 +8345,14 @@
       </p:sp>
       <p:sp>
         <p:nvSpPr>
-          <p:cNvPr id="13" name="TextBox 12"/>
-          <p:cNvSpPr txBox="1"/>
-          <p:nvPr/>
-        </p:nvSpPr>
-        <p:spPr>
-          <a:xfrm>
-            <a:off x="1143000" y="3429000"/>
-            <a:ext cx="1633633" cy="571500"/>
+          <p:cNvPr id="17" name="TextBox 16"/>
+          <p:cNvSpPr txBox="1"/>
+          <p:nvPr/>
+        </p:nvSpPr>
+        <p:spPr>
+          <a:xfrm>
+            <a:off x="1238250" y="4044043"/>
+            <a:ext cx="6972300" cy="519793"/>
           </a:xfrm>
           <a:prstGeom prst="rect">
             <a:avLst/>
@@ -7004,38 +8365,40 @@
           </a:bodyPr>
           <a:lstStyle/>
           <a:p>
-            <a:pPr algn="ctr">
-              <a:lnSpc>
-                <a:spcPct val="100000"/>
-              </a:lnSpc>
-            </a:pPr>
-            <a:r>
-              <a:rPr sz="1800" b="1">
-                <a:solidFill>
-                  <a:srgbClr val="FFFFFF"/>
-                </a:solidFill>
-                <a:latin typeface="Pretendard"/>
-                <a:ea typeface="Pretendard"/>
-                <a:cs typeface="Pretendard"/>
-              </a:rPr>
-              <a:t>파티션 수</a:t>
-            </a:r>
-          </a:p>
-        </p:txBody>
-      </p:sp>
-      <p:sp>
-        <p:nvSpPr>
-          <p:cNvPr id="14" name="Rectangle 13"/>
+            <a:pPr algn="l">
+              <a:lnSpc>
+                <a:spcPct val="115000"/>
+              </a:lnSpc>
+            </a:pPr>
+            <a:r>
+              <a:rPr sz="1875" b="1">
+                <a:solidFill>
+                  <a:srgbClr val="0D2B5E"/>
+                </a:solidFill>
+                <a:latin typeface="Pretendard"/>
+                <a:ea typeface="Pretendard"/>
+                <a:cs typeface="Pretendard"/>
+              </a:rPr>
+              <a:t>repartition(8)</a:t>
+            </a:r>
+          </a:p>
+        </p:txBody>
+      </p:sp>
+      <p:sp>
+        <p:nvSpPr>
+          <p:cNvPr id="18" name="Rounded Rectangle 17"/>
           <p:cNvSpPr/>
           <p:nvPr/>
         </p:nvSpPr>
         <p:spPr>
           <a:xfrm>
-            <a:off x="2776633" y="3429000"/>
-            <a:ext cx="14368367" cy="571500"/>
-          </a:xfrm>
-          <a:prstGeom prst="rect">
-            <a:avLst/>
+            <a:off x="8343900" y="4044043"/>
+            <a:ext cx="8801100" cy="519793"/>
+          </a:xfrm>
+          <a:prstGeom prst="roundRect">
+            <a:avLst>
+              <a:gd name="adj" fmla="val 7329"/>
+            </a:avLst>
           </a:prstGeom>
           <a:solidFill>
             <a:srgbClr val="FAFBFD"/>
@@ -7057,14 +8420,14 @@
       </p:sp>
       <p:sp>
         <p:nvSpPr>
-          <p:cNvPr id="15" name="TextBox 14"/>
-          <p:cNvSpPr txBox="1"/>
-          <p:nvPr/>
-        </p:nvSpPr>
-        <p:spPr>
-          <a:xfrm>
-            <a:off x="2929033" y="3429000"/>
-            <a:ext cx="14063567" cy="571500"/>
+          <p:cNvPr id="19" name="TextBox 18"/>
+          <p:cNvSpPr txBox="1"/>
+          <p:nvPr/>
+        </p:nvSpPr>
+        <p:spPr>
+          <a:xfrm>
+            <a:off x="8439150" y="4044043"/>
+            <a:ext cx="8610600" cy="519793"/>
           </a:xfrm>
           <a:prstGeom prst="rect">
             <a:avLst/>
@@ -7077,13 +8440,13 @@
           </a:bodyPr>
           <a:lstStyle/>
           <a:p>
-            <a:pPr algn="l">
+            <a:pPr algn="ctr">
               <a:lnSpc>
                 <a:spcPct val="115000"/>
               </a:lnSpc>
             </a:pPr>
             <a:r>
-              <a:rPr sz="1800" b="0">
+              <a:rPr sz="1875" b="0">
                 <a:solidFill>
                   <a:srgbClr val="3D3D3D"/>
                 </a:solidFill>
@@ -7091,30 +8454,34 @@
                 <a:ea typeface="Pretendard"/>
                 <a:cs typeface="Pretendard"/>
               </a:rPr>
-              <a:t>df.rdd.getNumPartitions()   # 환경에 따라 다름</a:t>
-            </a:r>
-          </a:p>
-        </p:txBody>
-      </p:sp>
-      <p:sp>
-        <p:nvSpPr>
-          <p:cNvPr id="16" name="Rectangle 15"/>
+              <a:t>8</a:t>
+            </a:r>
+          </a:p>
+        </p:txBody>
+      </p:sp>
+      <p:sp>
+        <p:nvSpPr>
+          <p:cNvPr id="20" name="Rounded Rectangle 19"/>
           <p:cNvSpPr/>
           <p:nvPr/>
         </p:nvSpPr>
         <p:spPr>
           <a:xfrm>
-            <a:off x="1143000" y="4076700"/>
-            <a:ext cx="1633633" cy="571500"/>
-          </a:xfrm>
-          <a:prstGeom prst="rect">
-            <a:avLst/>
-          </a:prstGeom>
-          <a:solidFill>
-            <a:srgbClr val="0D2B5E"/>
-          </a:solidFill>
-          <a:ln>
-            <a:noFill/>
+            <a:off x="1143000" y="4640036"/>
+            <a:ext cx="7162800" cy="519793"/>
+          </a:xfrm>
+          <a:prstGeom prst="roundRect">
+            <a:avLst>
+              <a:gd name="adj" fmla="val 7329"/>
+            </a:avLst>
+          </a:prstGeom>
+          <a:solidFill>
+            <a:srgbClr val="EDF3FD"/>
+          </a:solidFill>
+          <a:ln w="9525">
+            <a:solidFill>
+              <a:srgbClr val="BFD3F5"/>
+            </a:solidFill>
           </a:ln>
           <a:effectLst/>
         </p:spPr>
@@ -7128,14 +8495,14 @@
       </p:sp>
       <p:sp>
         <p:nvSpPr>
-          <p:cNvPr id="17" name="TextBox 16"/>
-          <p:cNvSpPr txBox="1"/>
-          <p:nvPr/>
-        </p:nvSpPr>
-        <p:spPr>
-          <a:xfrm>
-            <a:off x="1143000" y="4076700"/>
-            <a:ext cx="1633633" cy="571500"/>
+          <p:cNvPr id="21" name="TextBox 20"/>
+          <p:cNvSpPr txBox="1"/>
+          <p:nvPr/>
+        </p:nvSpPr>
+        <p:spPr>
+          <a:xfrm>
+            <a:off x="1238250" y="4640036"/>
+            <a:ext cx="6972300" cy="519793"/>
           </a:xfrm>
           <a:prstGeom prst="rect">
             <a:avLst/>
@@ -7148,38 +8515,40 @@
           </a:bodyPr>
           <a:lstStyle/>
           <a:p>
-            <a:pPr algn="ctr">
-              <a:lnSpc>
-                <a:spcPct val="100000"/>
-              </a:lnSpc>
-            </a:pPr>
-            <a:r>
-              <a:rPr sz="1800" b="1">
-                <a:solidFill>
-                  <a:srgbClr val="FFFFFF"/>
-                </a:solidFill>
-                <a:latin typeface="Pretendard"/>
-                <a:ea typeface="Pretendard"/>
-                <a:cs typeface="Pretendard"/>
-              </a:rPr>
-              <a:t>다시 나누기</a:t>
-            </a:r>
-          </a:p>
-        </p:txBody>
-      </p:sp>
-      <p:sp>
-        <p:nvSpPr>
-          <p:cNvPr id="18" name="Rectangle 17"/>
+            <a:pPr algn="l">
+              <a:lnSpc>
+                <a:spcPct val="115000"/>
+              </a:lnSpc>
+            </a:pPr>
+            <a:r>
+              <a:rPr sz="1875" b="1">
+                <a:solidFill>
+                  <a:srgbClr val="0D2B5E"/>
+                </a:solidFill>
+                <a:latin typeface="Pretendard"/>
+                <a:ea typeface="Pretendard"/>
+                <a:cs typeface="Pretendard"/>
+              </a:rPr>
+              <a:t>coalesce(2)</a:t>
+            </a:r>
+          </a:p>
+        </p:txBody>
+      </p:sp>
+      <p:sp>
+        <p:nvSpPr>
+          <p:cNvPr id="22" name="Rounded Rectangle 21"/>
           <p:cNvSpPr/>
           <p:nvPr/>
         </p:nvSpPr>
         <p:spPr>
           <a:xfrm>
-            <a:off x="2776633" y="4076700"/>
-            <a:ext cx="14368367" cy="571500"/>
-          </a:xfrm>
-          <a:prstGeom prst="rect">
-            <a:avLst/>
+            <a:off x="8343900" y="4640036"/>
+            <a:ext cx="8801100" cy="519793"/>
+          </a:xfrm>
+          <a:prstGeom prst="roundRect">
+            <a:avLst>
+              <a:gd name="adj" fmla="val 7329"/>
+            </a:avLst>
           </a:prstGeom>
           <a:solidFill>
             <a:srgbClr val="FAFBFD"/>
@@ -7201,14 +8570,14 @@
       </p:sp>
       <p:sp>
         <p:nvSpPr>
-          <p:cNvPr id="19" name="TextBox 18"/>
-          <p:cNvSpPr txBox="1"/>
-          <p:nvPr/>
-        </p:nvSpPr>
-        <p:spPr>
-          <a:xfrm>
-            <a:off x="2929033" y="4076700"/>
-            <a:ext cx="14063567" cy="571500"/>
+          <p:cNvPr id="23" name="TextBox 22"/>
+          <p:cNvSpPr txBox="1"/>
+          <p:nvPr/>
+        </p:nvSpPr>
+        <p:spPr>
+          <a:xfrm>
+            <a:off x="8439150" y="4640036"/>
+            <a:ext cx="8610600" cy="519793"/>
           </a:xfrm>
           <a:prstGeom prst="rect">
             <a:avLst/>
@@ -7221,13 +8590,13 @@
           </a:bodyPr>
           <a:lstStyle/>
           <a:p>
-            <a:pPr algn="l">
+            <a:pPr algn="ctr">
               <a:lnSpc>
                 <a:spcPct val="115000"/>
               </a:lnSpc>
             </a:pPr>
             <a:r>
-              <a:rPr sz="1800" b="0">
+              <a:rPr sz="1875" b="0">
                 <a:solidFill>
                   <a:srgbClr val="3D3D3D"/>
                 </a:solidFill>
@@ -7235,30 +8604,34 @@
                 <a:ea typeface="Pretendard"/>
                 <a:cs typeface="Pretendard"/>
               </a:rPr>
-              <a:t>df.repartition(8)   → 8</a:t>
-            </a:r>
-          </a:p>
-        </p:txBody>
-      </p:sp>
-      <p:sp>
-        <p:nvSpPr>
-          <p:cNvPr id="20" name="Rectangle 19"/>
+              <a:t>2</a:t>
+            </a:r>
+          </a:p>
+        </p:txBody>
+      </p:sp>
+      <p:sp>
+        <p:nvSpPr>
+          <p:cNvPr id="24" name="Rounded Rectangle 23"/>
           <p:cNvSpPr/>
           <p:nvPr/>
         </p:nvSpPr>
         <p:spPr>
           <a:xfrm>
-            <a:off x="1143000" y="4724400"/>
-            <a:ext cx="1633633" cy="571500"/>
-          </a:xfrm>
-          <a:prstGeom prst="rect">
-            <a:avLst/>
-          </a:prstGeom>
-          <a:solidFill>
-            <a:srgbClr val="0D2B5E"/>
-          </a:solidFill>
-          <a:ln>
-            <a:noFill/>
+            <a:off x="1143000" y="5236029"/>
+            <a:ext cx="7162800" cy="519793"/>
+          </a:xfrm>
+          <a:prstGeom prst="roundRect">
+            <a:avLst>
+              <a:gd name="adj" fmla="val 7329"/>
+            </a:avLst>
+          </a:prstGeom>
+          <a:solidFill>
+            <a:srgbClr val="EDF3FD"/>
+          </a:solidFill>
+          <a:ln w="9525">
+            <a:solidFill>
+              <a:srgbClr val="BFD3F5"/>
+            </a:solidFill>
           </a:ln>
           <a:effectLst/>
         </p:spPr>
@@ -7272,14 +8645,14 @@
       </p:sp>
       <p:sp>
         <p:nvSpPr>
-          <p:cNvPr id="21" name="TextBox 20"/>
-          <p:cNvSpPr txBox="1"/>
-          <p:nvPr/>
-        </p:nvSpPr>
-        <p:spPr>
-          <a:xfrm>
-            <a:off x="1143000" y="4724400"/>
-            <a:ext cx="1633633" cy="571500"/>
+          <p:cNvPr id="25" name="TextBox 24"/>
+          <p:cNvSpPr txBox="1"/>
+          <p:nvPr/>
+        </p:nvSpPr>
+        <p:spPr>
+          <a:xfrm>
+            <a:off x="1238250" y="5236029"/>
+            <a:ext cx="6972300" cy="519793"/>
           </a:xfrm>
           <a:prstGeom prst="rect">
             <a:avLst/>
@@ -7292,38 +8665,40 @@
           </a:bodyPr>
           <a:lstStyle/>
           <a:p>
-            <a:pPr algn="ctr">
-              <a:lnSpc>
-                <a:spcPct val="100000"/>
-              </a:lnSpc>
-            </a:pPr>
-            <a:r>
-              <a:rPr sz="1800" b="1">
-                <a:solidFill>
-                  <a:srgbClr val="FFFFFF"/>
-                </a:solidFill>
-                <a:latin typeface="Pretendard"/>
-                <a:ea typeface="Pretendard"/>
-                <a:cs typeface="Pretendard"/>
-              </a:rPr>
-              <a:t>합치기</a:t>
-            </a:r>
-          </a:p>
-        </p:txBody>
-      </p:sp>
-      <p:sp>
-        <p:nvSpPr>
-          <p:cNvPr id="22" name="Rectangle 21"/>
+            <a:pPr algn="l">
+              <a:lnSpc>
+                <a:spcPct val="115000"/>
+              </a:lnSpc>
+            </a:pPr>
+            <a:r>
+              <a:rPr sz="1875" b="1">
+                <a:solidFill>
+                  <a:srgbClr val="0D2B5E"/>
+                </a:solidFill>
+                <a:latin typeface="Pretendard"/>
+                <a:ea typeface="Pretendard"/>
+                <a:cs typeface="Pretendard"/>
+              </a:rPr>
+              <a:t>coalesce(16)</a:t>
+            </a:r>
+          </a:p>
+        </p:txBody>
+      </p:sp>
+      <p:sp>
+        <p:nvSpPr>
+          <p:cNvPr id="26" name="Rounded Rectangle 25"/>
           <p:cNvSpPr/>
           <p:nvPr/>
         </p:nvSpPr>
         <p:spPr>
           <a:xfrm>
-            <a:off x="2776633" y="4724400"/>
-            <a:ext cx="14368367" cy="571500"/>
-          </a:xfrm>
-          <a:prstGeom prst="rect">
-            <a:avLst/>
+            <a:off x="8343900" y="5236029"/>
+            <a:ext cx="8801100" cy="519793"/>
+          </a:xfrm>
+          <a:prstGeom prst="roundRect">
+            <a:avLst>
+              <a:gd name="adj" fmla="val 7329"/>
+            </a:avLst>
           </a:prstGeom>
           <a:solidFill>
             <a:srgbClr val="FAFBFD"/>
@@ -7345,14 +8720,14 @@
       </p:sp>
       <p:sp>
         <p:nvSpPr>
-          <p:cNvPr id="23" name="TextBox 22"/>
-          <p:cNvSpPr txBox="1"/>
-          <p:nvPr/>
-        </p:nvSpPr>
-        <p:spPr>
-          <a:xfrm>
-            <a:off x="2929033" y="4724400"/>
-            <a:ext cx="14063567" cy="571500"/>
+          <p:cNvPr id="27" name="TextBox 26"/>
+          <p:cNvSpPr txBox="1"/>
+          <p:nvPr/>
+        </p:nvSpPr>
+        <p:spPr>
+          <a:xfrm>
+            <a:off x="8439150" y="5236029"/>
+            <a:ext cx="8610600" cy="519793"/>
           </a:xfrm>
           <a:prstGeom prst="rect">
             <a:avLst/>
@@ -7365,13 +8740,13 @@
           </a:bodyPr>
           <a:lstStyle/>
           <a:p>
-            <a:pPr algn="l">
+            <a:pPr algn="ctr">
               <a:lnSpc>
                 <a:spcPct val="115000"/>
               </a:lnSpc>
             </a:pPr>
             <a:r>
-              <a:rPr sz="1800" b="0">
+              <a:rPr sz="1875" b="0">
                 <a:solidFill>
                   <a:srgbClr val="3D3D3D"/>
                 </a:solidFill>
@@ -7379,30 +8754,34 @@
                 <a:ea typeface="Pretendard"/>
                 <a:cs typeface="Pretendard"/>
               </a:rPr>
-              <a:t>repartitioned.coalesce(2)   → 2</a:t>
-            </a:r>
-          </a:p>
-        </p:txBody>
-      </p:sp>
-      <p:sp>
-        <p:nvSpPr>
-          <p:cNvPr id="24" name="Rectangle 23"/>
+              <a:t>여전히 2 — 늘릴 수 없다</a:t>
+            </a:r>
+          </a:p>
+        </p:txBody>
+      </p:sp>
+      <p:sp>
+        <p:nvSpPr>
+          <p:cNvPr id="28" name="Rounded Rectangle 27"/>
           <p:cNvSpPr/>
           <p:nvPr/>
         </p:nvSpPr>
         <p:spPr>
           <a:xfrm>
-            <a:off x="1143000" y="5372100"/>
-            <a:ext cx="1633633" cy="571500"/>
-          </a:xfrm>
-          <a:prstGeom prst="rect">
-            <a:avLst/>
-          </a:prstGeom>
-          <a:solidFill>
-            <a:srgbClr val="0D2B5E"/>
-          </a:solidFill>
-          <a:ln>
-            <a:noFill/>
+            <a:off x="1143000" y="5832021"/>
+            <a:ext cx="7162800" cy="519793"/>
+          </a:xfrm>
+          <a:prstGeom prst="roundRect">
+            <a:avLst>
+              <a:gd name="adj" fmla="val 7329"/>
+            </a:avLst>
+          </a:prstGeom>
+          <a:solidFill>
+            <a:srgbClr val="EDF3FD"/>
+          </a:solidFill>
+          <a:ln w="9525">
+            <a:solidFill>
+              <a:srgbClr val="BFD3F5"/>
+            </a:solidFill>
           </a:ln>
           <a:effectLst/>
         </p:spPr>
@@ -7416,14 +8795,14 @@
       </p:sp>
       <p:sp>
         <p:nvSpPr>
-          <p:cNvPr id="25" name="TextBox 24"/>
-          <p:cNvSpPr txBox="1"/>
-          <p:nvPr/>
-        </p:nvSpPr>
-        <p:spPr>
-          <a:xfrm>
-            <a:off x="1143000" y="5372100"/>
-            <a:ext cx="1633633" cy="571500"/>
+          <p:cNvPr id="29" name="TextBox 28"/>
+          <p:cNvSpPr txBox="1"/>
+          <p:nvPr/>
+        </p:nvSpPr>
+        <p:spPr>
+          <a:xfrm>
+            <a:off x="1238250" y="5832021"/>
+            <a:ext cx="6972300" cy="519793"/>
           </a:xfrm>
           <a:prstGeom prst="rect">
             <a:avLst/>
@@ -7436,38 +8815,40 @@
           </a:bodyPr>
           <a:lstStyle/>
           <a:p>
-            <a:pPr algn="ctr">
-              <a:lnSpc>
-                <a:spcPct val="100000"/>
-              </a:lnSpc>
-            </a:pPr>
-            <a:r>
-              <a:rPr sz="1800" b="1">
-                <a:solidFill>
-                  <a:srgbClr val="FFFFFF"/>
-                </a:solidFill>
-                <a:latin typeface="Pretendard"/>
-                <a:ea typeface="Pretendard"/>
-                <a:cs typeface="Pretendard"/>
-              </a:rPr>
-              <a:t>파티션별 행 수</a:t>
-            </a:r>
-          </a:p>
-        </p:txBody>
-      </p:sp>
-      <p:sp>
-        <p:nvSpPr>
-          <p:cNvPr id="26" name="Rectangle 25"/>
+            <a:pPr algn="l">
+              <a:lnSpc>
+                <a:spcPct val="115000"/>
+              </a:lnSpc>
+            </a:pPr>
+            <a:r>
+              <a:rPr sz="1875" b="1">
+                <a:solidFill>
+                  <a:srgbClr val="0D2B5E"/>
+                </a:solidFill>
+                <a:latin typeface="Pretendard"/>
+                <a:ea typeface="Pretendard"/>
+                <a:cs typeface="Pretendard"/>
+              </a:rPr>
+              <a:t>repartition(4) 분포</a:t>
+            </a:r>
+          </a:p>
+        </p:txBody>
+      </p:sp>
+      <p:sp>
+        <p:nvSpPr>
+          <p:cNvPr id="30" name="Rounded Rectangle 29"/>
           <p:cNvSpPr/>
           <p:nvPr/>
         </p:nvSpPr>
         <p:spPr>
           <a:xfrm>
-            <a:off x="2776633" y="5372100"/>
-            <a:ext cx="14368367" cy="571500"/>
-          </a:xfrm>
-          <a:prstGeom prst="rect">
-            <a:avLst/>
+            <a:off x="8343900" y="5832021"/>
+            <a:ext cx="8801100" cy="519793"/>
+          </a:xfrm>
+          <a:prstGeom prst="roundRect">
+            <a:avLst>
+              <a:gd name="adj" fmla="val 7329"/>
+            </a:avLst>
           </a:prstGeom>
           <a:solidFill>
             <a:srgbClr val="FAFBFD"/>
@@ -7489,14 +8870,14 @@
       </p:sp>
       <p:sp>
         <p:nvSpPr>
-          <p:cNvPr id="27" name="TextBox 26"/>
-          <p:cNvSpPr txBox="1"/>
-          <p:nvPr/>
-        </p:nvSpPr>
-        <p:spPr>
-          <a:xfrm>
-            <a:off x="2929033" y="5372100"/>
-            <a:ext cx="14063567" cy="571500"/>
+          <p:cNvPr id="31" name="TextBox 30"/>
+          <p:cNvSpPr txBox="1"/>
+          <p:nvPr/>
+        </p:nvSpPr>
+        <p:spPr>
+          <a:xfrm>
+            <a:off x="8439150" y="5832021"/>
+            <a:ext cx="8610600" cy="519793"/>
           </a:xfrm>
           <a:prstGeom prst="rect">
             <a:avLst/>
@@ -7509,13 +8890,163 @@
           </a:bodyPr>
           <a:lstStyle/>
           <a:p>
+            <a:pPr algn="ctr">
+              <a:lnSpc>
+                <a:spcPct val="115000"/>
+              </a:lnSpc>
+            </a:pPr>
+            <a:r>
+              <a:rPr sz="1875" b="0">
+                <a:solidFill>
+                  <a:srgbClr val="3D3D3D"/>
+                </a:solidFill>
+                <a:latin typeface="Pretendard"/>
+                <a:ea typeface="Pretendard"/>
+                <a:cs typeface="Pretendard"/>
+              </a:rPr>
+              <a:t>2500000 × 4 — 고르게</a:t>
+            </a:r>
+          </a:p>
+        </p:txBody>
+      </p:sp>
+      <p:sp>
+        <p:nvSpPr>
+          <p:cNvPr id="32" name="Rounded Rectangle 31"/>
+          <p:cNvSpPr/>
+          <p:nvPr/>
+        </p:nvSpPr>
+        <p:spPr>
+          <a:xfrm>
+            <a:off x="1143000" y="6428014"/>
+            <a:ext cx="7162800" cy="519793"/>
+          </a:xfrm>
+          <a:prstGeom prst="roundRect">
+            <a:avLst>
+              <a:gd name="adj" fmla="val 7329"/>
+            </a:avLst>
+          </a:prstGeom>
+          <a:solidFill>
+            <a:srgbClr val="EDF3FD"/>
+          </a:solidFill>
+          <a:ln w="9525">
+            <a:solidFill>
+              <a:srgbClr val="BFD3F5"/>
+            </a:solidFill>
+          </a:ln>
+          <a:effectLst/>
+        </p:spPr>
+        <p:txBody>
+          <a:bodyPr rtlCol="0" anchor="ctr" wrap="square"/>
+          <a:lstStyle/>
+          <a:p>
+            <a:pPr algn="ctr"/>
+          </a:p>
+        </p:txBody>
+      </p:sp>
+      <p:sp>
+        <p:nvSpPr>
+          <p:cNvPr id="33" name="TextBox 32"/>
+          <p:cNvSpPr txBox="1"/>
+          <p:nvPr/>
+        </p:nvSpPr>
+        <p:spPr>
+          <a:xfrm>
+            <a:off x="1238250" y="6428014"/>
+            <a:ext cx="6972300" cy="519793"/>
+          </a:xfrm>
+          <a:prstGeom prst="rect">
+            <a:avLst/>
+          </a:prstGeom>
+          <a:noFill/>
+        </p:spPr>
+        <p:txBody>
+          <a:bodyPr wrap="square" lIns="0" rIns="0" tIns="0" bIns="0" anchor="ctr">
+            <a:spAutoFit/>
+          </a:bodyPr>
+          <a:lstStyle/>
+          <a:p>
             <a:pPr algn="l">
               <a:lnSpc>
                 <a:spcPct val="115000"/>
               </a:lnSpc>
             </a:pPr>
             <a:r>
-              <a:rPr sz="1800" b="0">
+              <a:rPr sz="1875" b="1">
+                <a:solidFill>
+                  <a:srgbClr val="0D2B5E"/>
+                </a:solidFill>
+                <a:latin typeface="Pretendard"/>
+                <a:ea typeface="Pretendard"/>
+                <a:cs typeface="Pretendard"/>
+              </a:rPr>
+              <a:t>coalesce(2) 분포</a:t>
+            </a:r>
+          </a:p>
+        </p:txBody>
+      </p:sp>
+      <p:sp>
+        <p:nvSpPr>
+          <p:cNvPr id="34" name="Rounded Rectangle 33"/>
+          <p:cNvSpPr/>
+          <p:nvPr/>
+        </p:nvSpPr>
+        <p:spPr>
+          <a:xfrm>
+            <a:off x="8343900" y="6428014"/>
+            <a:ext cx="8801100" cy="519793"/>
+          </a:xfrm>
+          <a:prstGeom prst="roundRect">
+            <a:avLst>
+              <a:gd name="adj" fmla="val 7329"/>
+            </a:avLst>
+          </a:prstGeom>
+          <a:solidFill>
+            <a:srgbClr val="FAFBFD"/>
+          </a:solidFill>
+          <a:ln w="9525">
+            <a:solidFill>
+              <a:srgbClr val="DCE1E8"/>
+            </a:solidFill>
+          </a:ln>
+          <a:effectLst/>
+        </p:spPr>
+        <p:txBody>
+          <a:bodyPr rtlCol="0" anchor="ctr" wrap="square"/>
+          <a:lstStyle/>
+          <a:p>
+            <a:pPr algn="ctr"/>
+          </a:p>
+        </p:txBody>
+      </p:sp>
+      <p:sp>
+        <p:nvSpPr>
+          <p:cNvPr id="35" name="TextBox 34"/>
+          <p:cNvSpPr txBox="1"/>
+          <p:nvPr/>
+        </p:nvSpPr>
+        <p:spPr>
+          <a:xfrm>
+            <a:off x="8439150" y="6428014"/>
+            <a:ext cx="8610600" cy="519793"/>
+          </a:xfrm>
+          <a:prstGeom prst="rect">
+            <a:avLst/>
+          </a:prstGeom>
+          <a:noFill/>
+        </p:spPr>
+        <p:txBody>
+          <a:bodyPr wrap="square" lIns="0" rIns="0" tIns="0" bIns="0" anchor="ctr">
+            <a:spAutoFit/>
+          </a:bodyPr>
+          <a:lstStyle/>
+          <a:p>
+            <a:pPr algn="ctr">
+              <a:lnSpc>
+                <a:spcPct val="115000"/>
+              </a:lnSpc>
+            </a:pPr>
+            <a:r>
+              <a:rPr sz="1875" b="0">
                 <a:solidFill>
                   <a:srgbClr val="3D3D3D"/>
                 </a:solidFill>
@@ -7523,14 +9054,164 @@
                 <a:ea typeface="Pretendard"/>
                 <a:cs typeface="Pretendard"/>
               </a:rPr>
-              <a:t>groupBy(F.spark_partition_id()).count()</a:t>
-            </a:r>
-          </a:p>
-        </p:txBody>
-      </p:sp>
-      <p:sp>
-        <p:nvSpPr>
-          <p:cNvPr id="28" name="TextBox 27"/>
+              <a:t>[5000000, 5000000]</a:t>
+            </a:r>
+          </a:p>
+        </p:txBody>
+      </p:sp>
+      <p:sp>
+        <p:nvSpPr>
+          <p:cNvPr id="36" name="Rounded Rectangle 35"/>
+          <p:cNvSpPr/>
+          <p:nvPr/>
+        </p:nvSpPr>
+        <p:spPr>
+          <a:xfrm>
+            <a:off x="1143000" y="7024007"/>
+            <a:ext cx="7162800" cy="519793"/>
+          </a:xfrm>
+          <a:prstGeom prst="roundRect">
+            <a:avLst>
+              <a:gd name="adj" fmla="val 7329"/>
+            </a:avLst>
+          </a:prstGeom>
+          <a:solidFill>
+            <a:srgbClr val="EDF3FD"/>
+          </a:solidFill>
+          <a:ln w="9525">
+            <a:solidFill>
+              <a:srgbClr val="BFD3F5"/>
+            </a:solidFill>
+          </a:ln>
+          <a:effectLst/>
+        </p:spPr>
+        <p:txBody>
+          <a:bodyPr rtlCol="0" anchor="ctr" wrap="square"/>
+          <a:lstStyle/>
+          <a:p>
+            <a:pPr algn="ctr"/>
+          </a:p>
+        </p:txBody>
+      </p:sp>
+      <p:sp>
+        <p:nvSpPr>
+          <p:cNvPr id="37" name="TextBox 36"/>
+          <p:cNvSpPr txBox="1"/>
+          <p:nvPr/>
+        </p:nvSpPr>
+        <p:spPr>
+          <a:xfrm>
+            <a:off x="1238250" y="7024007"/>
+            <a:ext cx="6972300" cy="519793"/>
+          </a:xfrm>
+          <a:prstGeom prst="rect">
+            <a:avLst/>
+          </a:prstGeom>
+          <a:noFill/>
+        </p:spPr>
+        <p:txBody>
+          <a:bodyPr wrap="square" lIns="0" rIns="0" tIns="0" bIns="0" anchor="ctr">
+            <a:spAutoFit/>
+          </a:bodyPr>
+          <a:lstStyle/>
+          <a:p>
+            <a:pPr algn="l">
+              <a:lnSpc>
+                <a:spcPct val="115000"/>
+              </a:lnSpc>
+            </a:pPr>
+            <a:r>
+              <a:rPr sz="1875" b="1">
+                <a:solidFill>
+                  <a:srgbClr val="0D2B5E"/>
+                </a:solidFill>
+                <a:latin typeface="Pretendard"/>
+                <a:ea typeface="Pretendard"/>
+                <a:cs typeface="Pretendard"/>
+              </a:rPr>
+              <a:t>3조각 → coalesce(2)</a:t>
+            </a:r>
+          </a:p>
+        </p:txBody>
+      </p:sp>
+      <p:sp>
+        <p:nvSpPr>
+          <p:cNvPr id="38" name="Rounded Rectangle 37"/>
+          <p:cNvSpPr/>
+          <p:nvPr/>
+        </p:nvSpPr>
+        <p:spPr>
+          <a:xfrm>
+            <a:off x="8343900" y="7024007"/>
+            <a:ext cx="8801100" cy="519793"/>
+          </a:xfrm>
+          <a:prstGeom prst="roundRect">
+            <a:avLst>
+              <a:gd name="adj" fmla="val 7329"/>
+            </a:avLst>
+          </a:prstGeom>
+          <a:solidFill>
+            <a:srgbClr val="FAFBFD"/>
+          </a:solidFill>
+          <a:ln w="9525">
+            <a:solidFill>
+              <a:srgbClr val="DCE1E8"/>
+            </a:solidFill>
+          </a:ln>
+          <a:effectLst/>
+        </p:spPr>
+        <p:txBody>
+          <a:bodyPr rtlCol="0" anchor="ctr" wrap="square"/>
+          <a:lstStyle/>
+          <a:p>
+            <a:pPr algn="ctr"/>
+          </a:p>
+        </p:txBody>
+      </p:sp>
+      <p:sp>
+        <p:nvSpPr>
+          <p:cNvPr id="39" name="TextBox 38"/>
+          <p:cNvSpPr txBox="1"/>
+          <p:nvPr/>
+        </p:nvSpPr>
+        <p:spPr>
+          <a:xfrm>
+            <a:off x="8439150" y="7024007"/>
+            <a:ext cx="8610600" cy="519793"/>
+          </a:xfrm>
+          <a:prstGeom prst="rect">
+            <a:avLst/>
+          </a:prstGeom>
+          <a:noFill/>
+        </p:spPr>
+        <p:txBody>
+          <a:bodyPr wrap="square" lIns="0" rIns="0" tIns="0" bIns="0" anchor="ctr">
+            <a:spAutoFit/>
+          </a:bodyPr>
+          <a:lstStyle/>
+          <a:p>
+            <a:pPr algn="ctr">
+              <a:lnSpc>
+                <a:spcPct val="115000"/>
+              </a:lnSpc>
+            </a:pPr>
+            <a:r>
+              <a:rPr sz="1875" b="0">
+                <a:solidFill>
+                  <a:srgbClr val="3D3D3D"/>
+                </a:solidFill>
+                <a:latin typeface="Pretendard"/>
+                <a:ea typeface="Pretendard"/>
+                <a:cs typeface="Pretendard"/>
+              </a:rPr>
+              <a:t>[6666667, 3333333]</a:t>
+            </a:r>
+          </a:p>
+        </p:txBody>
+      </p:sp>
+      <p:sp>
+        <p:nvSpPr>
+          <p:cNvPr id="40" name="TextBox 39"/>
           <p:cNvSpPr txBox="1"/>
           <p:nvPr/>
         </p:nvSpPr>
@@ -7564,14 +9245,14 @@
                 <a:ea typeface="Pretendard"/>
                 <a:cs typeface="Pretendard"/>
               </a:rPr>
-              <a:t>coalesce(16) 처럼 현재보다 큰 값을 주면 파티션이 늘지 않고 그대로 — 이론에서 말한 그대로</a:t>
-            </a:r>
-          </a:p>
-        </p:txBody>
-      </p:sp>
-      <p:sp>
-        <p:nvSpPr>
-          <p:cNvPr id="29" name="Rectangle 28"/>
+              <a:t>coalesce 는 셔플 없이 옆 조각을 붙이기만 — 고른 4조각은 둘씩 고르게, 3조각은 한쪽이 두 배</a:t>
+            </a:r>
+          </a:p>
+        </p:txBody>
+      </p:sp>
+      <p:sp>
+        <p:nvSpPr>
+          <p:cNvPr id="41" name="Rectangle 40"/>
           <p:cNvSpPr/>
           <p:nvPr/>
         </p:nvSpPr>
@@ -7601,7 +9282,7 @@
       </p:sp>
       <p:sp>
         <p:nvSpPr>
-          <p:cNvPr id="30" name="TextBox 29"/>
+          <p:cNvPr id="42" name="TextBox 41"/>
           <p:cNvSpPr txBox="1"/>
           <p:nvPr/>
         </p:nvSpPr>
@@ -7642,7 +9323,7 @@
       </p:sp>
       <p:sp>
         <p:nvSpPr>
-          <p:cNvPr id="31" name="TextBox 30"/>
+          <p:cNvPr id="43" name="TextBox 42"/>
           <p:cNvSpPr txBox="1"/>
           <p:nvPr/>
         </p:nvSpPr>
@@ -7866,7 +9547,7 @@
                 <a:ea typeface="Pretendard"/>
                 <a:cs typeface="Pretendard"/>
               </a:rPr>
-              <a:t>셔플을 Spark UI 와 explain() 에서 관찰</a:t>
+              <a:t>셔플을 Jobs 탭과 explain() 에서 관찰</a:t>
             </a:r>
           </a:p>
         </p:txBody>
@@ -8042,7 +9723,7 @@
                 <a:ea typeface="Pretendard"/>
                 <a:cs typeface="Pretendard"/>
               </a:rPr>
-              <a:t>(A) 좁은 변환만 — filter 후 count</a:t>
+              <a:t>(A) filter 후 test-narrow 로 저장</a:t>
             </a:r>
           </a:p>
         </p:txBody>
@@ -8083,7 +9764,7 @@
                 <a:ea typeface="Pretendard"/>
                 <a:cs typeface="Pretendard"/>
               </a:rPr>
-              <a:t>Stages 탭에 Stage 1개 · explain() 에 Exchange 없음</a:t>
+              <a:t>잡 하나 · Stage 1/1 · Task 4/4 — 셔플 없음</a:t>
             </a:r>
           </a:p>
         </p:txBody>
@@ -8229,7 +9910,7 @@
                 <a:ea typeface="Pretendard"/>
                 <a:cs typeface="Pretendard"/>
               </a:rPr>
-              <a:t>(B) 넓은 변환 — groupBy(bucket).count</a:t>
+              <a:t>(B) groupBy(bucket).count().collect()</a:t>
             </a:r>
           </a:p>
         </p:txBody>
@@ -8270,7 +9951,7 @@
                 <a:ea typeface="Pretendard"/>
                 <a:cs typeface="Pretendard"/>
               </a:rPr>
-              <a:t>Stage 2개 · 앞 Stage 에 Shuffle Write, 뒤 Stage 에 Shuffle Read</a:t>
+              <a:t>AQE 가 잡 둘로 — 4/4 Shuffle Write 2.4 KiB → 1/1 Read 2.4 KiB</a:t>
             </a:r>
           </a:p>
         </p:txBody>
@@ -8416,7 +10097,7 @@
                 <a:ea typeface="Pretendard"/>
                 <a:cs typeface="Pretendard"/>
               </a:rPr>
-              <a:t>explain() 만으로도 판정</a:t>
+              <a:t>explain() 으로 같은 판정</a:t>
             </a:r>
           </a:p>
         </p:txBody>
@@ -8457,7 +10138,7 @@
                 <a:ea typeface="Pretendard"/>
                 <a:cs typeface="Pretendard"/>
               </a:rPr>
-              <a:t>두 번째에만 Exchange hashpartitioning — UI 를 안 열어도 셔플 여부를 안다</a:t>
+              <a:t>둘째에만 Exchange hashpartitioning(b#59L, 200)</a:t>
             </a:r>
           </a:p>
         </p:txBody>
@@ -8573,7 +10254,7 @@
                 <a:ea typeface="Pretendard"/>
                 <a:cs typeface="Pretendard"/>
               </a:rPr>
-              <a:t>4040</a:t>
+              <a:t>localhost:4040</a:t>
             </a:r>
           </a:p>
           <a:p>
@@ -8591,7 +10272,7 @@
                 <a:ea typeface="Pretendard"/>
                 <a:cs typeface="Pretendard"/>
               </a:rPr>
-              <a:t>Stages 탭</a:t>
+              <a:t>Jobs 탭</a:t>
             </a:r>
           </a:p>
         </p:txBody>
@@ -8604,14 +10285,14 @@
         </p:nvSpPr>
         <p:spPr>
           <a:xfrm>
-            <a:off x="1143000" y="8058150"/>
-            <a:ext cx="16002000" cy="9525"/>
-          </a:xfrm>
-          <a:prstGeom prst="rect">
-            <a:avLst/>
-          </a:prstGeom>
-          <a:solidFill>
-            <a:srgbClr val="DCE1E8"/>
+            <a:off x="1143000" y="7581900"/>
+            <a:ext cx="38100" cy="323850"/>
+          </a:xfrm>
+          <a:prstGeom prst="rect">
+            <a:avLst/>
+          </a:prstGeom>
+          <a:solidFill>
+            <a:srgbClr val="BFD3F5"/>
           </a:solidFill>
           <a:ln>
             <a:noFill/>
@@ -8634,6 +10315,77 @@
         </p:nvSpPr>
         <p:spPr>
           <a:xfrm>
+            <a:off x="1314450" y="7581900"/>
+            <a:ext cx="15830550" cy="342900"/>
+          </a:xfrm>
+          <a:prstGeom prst="rect">
+            <a:avLst/>
+          </a:prstGeom>
+          <a:noFill/>
+        </p:spPr>
+        <p:txBody>
+          <a:bodyPr wrap="square" lIns="0" rIns="0" tIns="0" bIns="0" anchor="t">
+            <a:spAutoFit/>
+          </a:bodyPr>
+          <a:lstStyle/>
+          <a:p>
+            <a:pPr algn="l">
+              <a:lnSpc>
+                <a:spcPct val="100000"/>
+              </a:lnSpc>
+            </a:pPr>
+            <a:r>
+              <a:rPr sz="1725" b="1">
+                <a:solidFill>
+                  <a:srgbClr val="7D7D7D"/>
+                </a:solidFill>
+                <a:latin typeface="Pretendard"/>
+                <a:ea typeface="Pretendard"/>
+                <a:cs typeface="Pretendard"/>
+              </a:rPr>
+              <a:t>(A) 를 count() 로 끝내면 Stage 가 둘 — count 도 마지막에 조각별 개수를 모은다. 그래서 저장으로 끝낸다</a:t>
+            </a:r>
+          </a:p>
+        </p:txBody>
+      </p:sp>
+      <p:sp>
+        <p:nvSpPr>
+          <p:cNvPr id="28" name="Rectangle 27"/>
+          <p:cNvSpPr/>
+          <p:nvPr/>
+        </p:nvSpPr>
+        <p:spPr>
+          <a:xfrm>
+            <a:off x="1143000" y="8058150"/>
+            <a:ext cx="16002000" cy="9525"/>
+          </a:xfrm>
+          <a:prstGeom prst="rect">
+            <a:avLst/>
+          </a:prstGeom>
+          <a:solidFill>
+            <a:srgbClr val="DCE1E8"/>
+          </a:solidFill>
+          <a:ln>
+            <a:noFill/>
+          </a:ln>
+          <a:effectLst/>
+        </p:spPr>
+        <p:txBody>
+          <a:bodyPr rtlCol="0" anchor="ctr" wrap="square"/>
+          <a:lstStyle/>
+          <a:p>
+            <a:pPr algn="ctr"/>
+          </a:p>
+        </p:txBody>
+      </p:sp>
+      <p:sp>
+        <p:nvSpPr>
+          <p:cNvPr id="29" name="TextBox 28"/>
+          <p:cNvSpPr txBox="1"/>
+          <p:nvPr/>
+        </p:nvSpPr>
+        <p:spPr>
+          <a:xfrm>
             <a:off x="1143000" y="8248650"/>
             <a:ext cx="13335000" cy="323850"/>
           </a:xfrm>
@@ -8669,7 +10421,7 @@
       </p:sp>
       <p:sp>
         <p:nvSpPr>
-          <p:cNvPr id="28" name="TextBox 27"/>
+          <p:cNvPr id="30" name="TextBox 29"/>
           <p:cNvSpPr txBox="1"/>
           <p:nvPr/>
         </p:nvSpPr>
@@ -8893,7 +10645,7 @@
                 <a:ea typeface="Pretendard"/>
                 <a:cs typeface="Pretendard"/>
               </a:rPr>
-              <a:t>셔플 파티션 200·32·8 로 재 보기</a:t>
+              <a:t>bench(n) — 셔플 파티션 수를 바꿔 시간 재기</a:t>
             </a:r>
           </a:p>
         </p:txBody>
@@ -8936,8 +10688,8 @@
         </p:nvSpPr>
         <p:spPr>
           <a:xfrm>
-            <a:off x="1143000" y="2857500"/>
-            <a:ext cx="7372350" cy="533400"/>
+            <a:off x="1143000" y="3067050"/>
+            <a:ext cx="16002000" cy="438150"/>
           </a:xfrm>
           <a:prstGeom prst="rect">
             <a:avLst/>
@@ -8952,52 +10704,11 @@
           <a:p>
             <a:pPr algn="l">
               <a:lnSpc>
-                <a:spcPct val="110000"/>
-              </a:lnSpc>
-            </a:pPr>
-            <a:r>
-              <a:rPr sz="3150" b="1">
-                <a:solidFill>
-                  <a:srgbClr val="0D2B5E"/>
-                </a:solidFill>
-                <a:latin typeface="Pretendard"/>
-                <a:ea typeface="Pretendard"/>
-                <a:cs typeface="Pretendard"/>
-              </a:rPr>
-              <a:t>shuffle.partitions = 200 (기본)</a:t>
-            </a:r>
-          </a:p>
-        </p:txBody>
-      </p:sp>
-      <p:sp>
-        <p:nvSpPr>
-          <p:cNvPr id="9" name="TextBox 8"/>
-          <p:cNvSpPr txBox="1"/>
-          <p:nvPr/>
-        </p:nvSpPr>
-        <p:spPr>
-          <a:xfrm>
-            <a:off x="1143000" y="3467100"/>
-            <a:ext cx="7372350" cy="876300"/>
-          </a:xfrm>
-          <a:prstGeom prst="rect">
-            <a:avLst/>
-          </a:prstGeom>
-          <a:noFill/>
-        </p:spPr>
-        <p:txBody>
-          <a:bodyPr wrap="square" lIns="0" rIns="0" tIns="0" bIns="0" anchor="t">
-            <a:spAutoFit/>
-          </a:bodyPr>
-          <a:lstStyle/>
-          <a:p>
-            <a:pPr algn="l">
-              <a:lnSpc>
-                <a:spcPct val="146000"/>
-              </a:lnSpc>
-            </a:pPr>
-            <a:r>
-              <a:rPr sz="2250" b="0">
+                <a:spcPct val="130000"/>
+              </a:lnSpc>
+            </a:pPr>
+            <a:r>
+              <a:rPr sz="2550" b="1">
                 <a:solidFill>
                   <a:srgbClr val="3D3D3D"/>
                 </a:solidFill>
@@ -9005,25 +10716,25 @@
                 <a:ea typeface="Pretendard"/>
                 <a:cs typeface="Pretendard"/>
               </a:rPr>
-              <a:t>그룹이 10개뿐인데 200조각 — 빈 태스크 190개</a:t>
-            </a:r>
-          </a:p>
-        </p:txBody>
-      </p:sp>
-      <p:sp>
-        <p:nvSpPr>
-          <p:cNvPr id="10" name="Rounded Rectangle 9"/>
+              <a:t>그룹은 10개뿐 — 기본값 200 이 이 데이터에 맞는지 봅니다</a:t>
+            </a:r>
+          </a:p>
+        </p:txBody>
+      </p:sp>
+      <p:sp>
+        <p:nvSpPr>
+          <p:cNvPr id="9" name="Rounded Rectangle 8"/>
           <p:cNvSpPr/>
           <p:nvPr/>
         </p:nvSpPr>
         <p:spPr>
           <a:xfrm>
-            <a:off x="1143000" y="4610100"/>
-            <a:ext cx="7372350" cy="2857500"/>
+            <a:off x="1143000" y="3924300"/>
+            <a:ext cx="2895600" cy="3143250"/>
           </a:xfrm>
           <a:prstGeom prst="roundRect">
             <a:avLst>
-              <a:gd name="adj" fmla="val 1666"/>
+              <a:gd name="adj" fmla="val 1644"/>
             </a:avLst>
           </a:prstGeom>
           <a:solidFill>
@@ -9046,20 +10757,20 @@
       </p:sp>
       <p:sp>
         <p:nvSpPr>
-          <p:cNvPr id="11" name="Oval 10"/>
+          <p:cNvPr id="10" name="Rectangle 9"/>
           <p:cNvSpPr/>
           <p:nvPr/>
         </p:nvSpPr>
         <p:spPr>
           <a:xfrm>
-            <a:off x="1447800" y="5016817"/>
-            <a:ext cx="97155" cy="97155"/>
-          </a:xfrm>
-          <a:prstGeom prst="ellipse">
-            <a:avLst/>
-          </a:prstGeom>
-          <a:solidFill>
-            <a:srgbClr val="1E5BC6"/>
+            <a:off x="1143000" y="3924300"/>
+            <a:ext cx="2895600" cy="914400"/>
+          </a:xfrm>
+          <a:prstGeom prst="rect">
+            <a:avLst/>
+          </a:prstGeom>
+          <a:solidFill>
+            <a:srgbClr val="0D2B5E"/>
           </a:solidFill>
           <a:ln>
             <a:noFill/>
@@ -9076,33 +10787,74 @@
       </p:sp>
       <p:sp>
         <p:nvSpPr>
+          <p:cNvPr id="11" name="TextBox 10"/>
+          <p:cNvSpPr txBox="1"/>
+          <p:nvPr/>
+        </p:nvSpPr>
+        <p:spPr>
+          <a:xfrm>
+            <a:off x="1143000" y="4171950"/>
+            <a:ext cx="2895600" cy="419100"/>
+          </a:xfrm>
+          <a:prstGeom prst="rect">
+            <a:avLst/>
+          </a:prstGeom>
+          <a:noFill/>
+        </p:spPr>
+        <p:txBody>
+          <a:bodyPr wrap="square" lIns="0" rIns="0" tIns="0" bIns="0" anchor="t">
+            <a:spAutoFit/>
+          </a:bodyPr>
+          <a:lstStyle/>
+          <a:p>
+            <a:pPr algn="ctr">
+              <a:lnSpc>
+                <a:spcPct val="100000"/>
+              </a:lnSpc>
+            </a:pPr>
+            <a:r>
+              <a:rPr sz="2475" b="1">
+                <a:solidFill>
+                  <a:srgbClr val="FFFFFF"/>
+                </a:solidFill>
+                <a:latin typeface="Pretendard"/>
+                <a:ea typeface="Pretendard"/>
+                <a:cs typeface="Pretendard"/>
+              </a:rPr>
+              <a:t>AQE 확인</a:t>
+            </a:r>
+          </a:p>
+        </p:txBody>
+      </p:sp>
+      <p:sp>
+        <p:nvSpPr>
           <p:cNvPr id="12" name="TextBox 11"/>
           <p:cNvSpPr txBox="1"/>
           <p:nvPr/>
         </p:nvSpPr>
         <p:spPr>
           <a:xfrm>
-            <a:off x="1633538" y="4838700"/>
-            <a:ext cx="6634162" cy="453390"/>
-          </a:xfrm>
-          <a:prstGeom prst="rect">
-            <a:avLst/>
-          </a:prstGeom>
-          <a:noFill/>
-        </p:spPr>
-        <p:txBody>
-          <a:bodyPr wrap="square" lIns="0" rIns="0" tIns="0" bIns="0" anchor="ctr">
-            <a:spAutoFit/>
-          </a:bodyPr>
-          <a:lstStyle/>
-          <a:p>
-            <a:pPr algn="l">
-              <a:lnSpc>
-                <a:spcPct val="120000"/>
-              </a:lnSpc>
-            </a:pPr>
-            <a:r>
-              <a:rPr sz="1575" b="0">
+            <a:off x="1352550" y="5143500"/>
+            <a:ext cx="2476500" cy="1524000"/>
+          </a:xfrm>
+          <a:prstGeom prst="rect">
+            <a:avLst/>
+          </a:prstGeom>
+          <a:noFill/>
+        </p:spPr>
+        <p:txBody>
+          <a:bodyPr wrap="square" lIns="0" rIns="0" tIns="0" bIns="0" anchor="t">
+            <a:spAutoFit/>
+          </a:bodyPr>
+          <a:lstStyle/>
+          <a:p>
+            <a:pPr algn="ctr">
+              <a:lnSpc>
+                <a:spcPct val="146000"/>
+              </a:lnSpc>
+            </a:pPr>
+            <a:r>
+              <a:rPr sz="2100" b="0">
                 <a:solidFill>
                   <a:srgbClr val="3D3D3D"/>
                 </a:solidFill>
@@ -9110,249 +10862,43 @@
                 <a:ea typeface="Pretendard"/>
                 <a:cs typeface="Pretendard"/>
               </a:rPr>
-              <a:t>bench(200) 이 가장 느린 경향</a:t>
-            </a:r>
-          </a:p>
-        </p:txBody>
-      </p:sp>
-      <p:sp>
-        <p:nvSpPr>
-          <p:cNvPr id="13" name="Oval 12"/>
+              <a:t>adaptive.enabled</a:t>
+            </a:r>
+          </a:p>
+          <a:p>
+            <a:pPr algn="ctr">
+              <a:lnSpc>
+                <a:spcPct val="146000"/>
+              </a:lnSpc>
+            </a:pPr>
+            <a:r>
+              <a:rPr sz="2100" b="0">
+                <a:solidFill>
+                  <a:srgbClr val="3D3D3D"/>
+                </a:solidFill>
+                <a:latin typeface="Pretendard"/>
+                <a:ea typeface="Pretendard"/>
+                <a:cs typeface="Pretendard"/>
+              </a:rPr>
+              <a:t>true</a:t>
+            </a:r>
+          </a:p>
+        </p:txBody>
+      </p:sp>
+      <p:sp>
+        <p:nvSpPr>
+          <p:cNvPr id="13" name="Rounded Rectangle 12"/>
           <p:cNvSpPr/>
           <p:nvPr/>
         </p:nvSpPr>
         <p:spPr>
           <a:xfrm>
-            <a:off x="1447800" y="5527358"/>
-            <a:ext cx="97155" cy="97155"/>
-          </a:xfrm>
-          <a:prstGeom prst="ellipse">
-            <a:avLst/>
-          </a:prstGeom>
-          <a:solidFill>
-            <a:srgbClr val="1E5BC6"/>
-          </a:solidFill>
-          <a:ln>
-            <a:noFill/>
-          </a:ln>
-          <a:effectLst/>
-        </p:spPr>
-        <p:txBody>
-          <a:bodyPr rtlCol="0" anchor="ctr" wrap="square"/>
-          <a:lstStyle/>
-          <a:p>
-            <a:pPr algn="ctr"/>
-          </a:p>
-        </p:txBody>
-      </p:sp>
-      <p:sp>
-        <p:nvSpPr>
-          <p:cNvPr id="14" name="TextBox 13"/>
-          <p:cNvSpPr txBox="1"/>
-          <p:nvPr/>
-        </p:nvSpPr>
-        <p:spPr>
-          <a:xfrm>
-            <a:off x="1633538" y="5349240"/>
-            <a:ext cx="6634162" cy="453390"/>
-          </a:xfrm>
-          <a:prstGeom prst="rect">
-            <a:avLst/>
-          </a:prstGeom>
-          <a:noFill/>
-        </p:spPr>
-        <p:txBody>
-          <a:bodyPr wrap="square" lIns="0" rIns="0" tIns="0" bIns="0" anchor="ctr">
-            <a:spAutoFit/>
-          </a:bodyPr>
-          <a:lstStyle/>
-          <a:p>
-            <a:pPr algn="l">
-              <a:lnSpc>
-                <a:spcPct val="120000"/>
-              </a:lnSpc>
-            </a:pPr>
-            <a:r>
-              <a:rPr sz="1575" b="0">
-                <a:solidFill>
-                  <a:srgbClr val="3D3D3D"/>
-                </a:solidFill>
-                <a:latin typeface="Pretendard"/>
-                <a:ea typeface="Pretendard"/>
-                <a:cs typeface="Pretendard"/>
-              </a:rPr>
-              <a:t>Task 수 200</a:t>
-            </a:r>
-          </a:p>
-        </p:txBody>
-      </p:sp>
-      <p:sp>
-        <p:nvSpPr>
-          <p:cNvPr id="15" name="Oval 14"/>
-          <p:cNvSpPr/>
-          <p:nvPr/>
-        </p:nvSpPr>
-        <p:spPr>
-          <a:xfrm>
-            <a:off x="1447800" y="6037898"/>
-            <a:ext cx="97155" cy="97155"/>
-          </a:xfrm>
-          <a:prstGeom prst="ellipse">
-            <a:avLst/>
-          </a:prstGeom>
-          <a:solidFill>
-            <a:srgbClr val="1E5BC6"/>
-          </a:solidFill>
-          <a:ln>
-            <a:noFill/>
-          </a:ln>
-          <a:effectLst/>
-        </p:spPr>
-        <p:txBody>
-          <a:bodyPr rtlCol="0" anchor="ctr" wrap="square"/>
-          <a:lstStyle/>
-          <a:p>
-            <a:pPr algn="ctr"/>
-          </a:p>
-        </p:txBody>
-      </p:sp>
-      <p:sp>
-        <p:nvSpPr>
-          <p:cNvPr id="16" name="TextBox 15"/>
-          <p:cNvSpPr txBox="1"/>
-          <p:nvPr/>
-        </p:nvSpPr>
-        <p:spPr>
-          <a:xfrm>
-            <a:off x="1633538" y="5859780"/>
-            <a:ext cx="6634162" cy="453390"/>
-          </a:xfrm>
-          <a:prstGeom prst="rect">
-            <a:avLst/>
-          </a:prstGeom>
-          <a:noFill/>
-        </p:spPr>
-        <p:txBody>
-          <a:bodyPr wrap="square" lIns="0" rIns="0" tIns="0" bIns="0" anchor="ctr">
-            <a:spAutoFit/>
-          </a:bodyPr>
-          <a:lstStyle/>
-          <a:p>
-            <a:pPr algn="l">
-              <a:lnSpc>
-                <a:spcPct val="120000"/>
-              </a:lnSpc>
-            </a:pPr>
-            <a:r>
-              <a:rPr sz="1575" b="0">
-                <a:solidFill>
-                  <a:srgbClr val="3D3D3D"/>
-                </a:solidFill>
-                <a:latin typeface="Pretendard"/>
-                <a:ea typeface="Pretendard"/>
-                <a:cs typeface="Pretendard"/>
-              </a:rPr>
-              <a:t>AQE 가 켜져 있으면 차이가 작을 수 있다</a:t>
-            </a:r>
-          </a:p>
-        </p:txBody>
-      </p:sp>
-      <p:sp>
-        <p:nvSpPr>
-          <p:cNvPr id="17" name="TextBox 16"/>
-          <p:cNvSpPr txBox="1"/>
-          <p:nvPr/>
-        </p:nvSpPr>
-        <p:spPr>
-          <a:xfrm>
-            <a:off x="9772650" y="2857500"/>
-            <a:ext cx="7372350" cy="533400"/>
-          </a:xfrm>
-          <a:prstGeom prst="rect">
-            <a:avLst/>
-          </a:prstGeom>
-          <a:noFill/>
-        </p:spPr>
-        <p:txBody>
-          <a:bodyPr wrap="square" lIns="0" rIns="0" tIns="0" bIns="0" anchor="t">
-            <a:spAutoFit/>
-          </a:bodyPr>
-          <a:lstStyle/>
-          <a:p>
-            <a:pPr algn="l">
-              <a:lnSpc>
-                <a:spcPct val="110000"/>
-              </a:lnSpc>
-            </a:pPr>
-            <a:r>
-              <a:rPr sz="3150" b="1">
-                <a:solidFill>
-                  <a:srgbClr val="0D2B5E"/>
-                </a:solidFill>
-                <a:latin typeface="Pretendard"/>
-                <a:ea typeface="Pretendard"/>
-                <a:cs typeface="Pretendard"/>
-              </a:rPr>
-              <a:t>shuffle.partitions = 8</a:t>
-            </a:r>
-          </a:p>
-        </p:txBody>
-      </p:sp>
-      <p:sp>
-        <p:nvSpPr>
-          <p:cNvPr id="18" name="TextBox 17"/>
-          <p:cNvSpPr txBox="1"/>
-          <p:nvPr/>
-        </p:nvSpPr>
-        <p:spPr>
-          <a:xfrm>
-            <a:off x="9772650" y="3467100"/>
-            <a:ext cx="7372350" cy="876300"/>
-          </a:xfrm>
-          <a:prstGeom prst="rect">
-            <a:avLst/>
-          </a:prstGeom>
-          <a:noFill/>
-        </p:spPr>
-        <p:txBody>
-          <a:bodyPr wrap="square" lIns="0" rIns="0" tIns="0" bIns="0" anchor="t">
-            <a:spAutoFit/>
-          </a:bodyPr>
-          <a:lstStyle/>
-          <a:p>
-            <a:pPr algn="l">
-              <a:lnSpc>
-                <a:spcPct val="146000"/>
-              </a:lnSpc>
-            </a:pPr>
-            <a:r>
-              <a:rPr sz="2250" b="0">
-                <a:solidFill>
-                  <a:srgbClr val="3D3D3D"/>
-                </a:solidFill>
-                <a:latin typeface="Pretendard"/>
-                <a:ea typeface="Pretendard"/>
-                <a:cs typeface="Pretendard"/>
-              </a:rPr>
-              <a:t>그룹 수에 가까운 조각 — 빈 태스크가 거의 없다</a:t>
-            </a:r>
-          </a:p>
-        </p:txBody>
-      </p:sp>
-      <p:sp>
-        <p:nvSpPr>
-          <p:cNvPr id="19" name="Rounded Rectangle 18"/>
-          <p:cNvSpPr/>
-          <p:nvPr/>
-        </p:nvSpPr>
-        <p:spPr>
-          <a:xfrm>
-            <a:off x="9772650" y="4610100"/>
-            <a:ext cx="7372350" cy="2857500"/>
+            <a:off x="4419600" y="3924300"/>
+            <a:ext cx="2895600" cy="3143250"/>
           </a:xfrm>
           <a:prstGeom prst="roundRect">
             <a:avLst>
-              <a:gd name="adj" fmla="val 1666"/>
+              <a:gd name="adj" fmla="val 1644"/>
             </a:avLst>
           </a:prstGeom>
           <a:solidFill>
@@ -9375,16 +10921,16 @@
       </p:sp>
       <p:sp>
         <p:nvSpPr>
-          <p:cNvPr id="20" name="Oval 19"/>
+          <p:cNvPr id="14" name="Rectangle 13"/>
           <p:cNvSpPr/>
           <p:nvPr/>
         </p:nvSpPr>
         <p:spPr>
           <a:xfrm>
-            <a:off x="10077450" y="5016817"/>
-            <a:ext cx="97155" cy="97155"/>
-          </a:xfrm>
-          <a:prstGeom prst="ellipse">
+            <a:off x="4419600" y="3924300"/>
+            <a:ext cx="2895600" cy="914400"/>
+          </a:xfrm>
+          <a:prstGeom prst="rect">
             <a:avLst/>
           </a:prstGeom>
           <a:solidFill>
@@ -9405,33 +10951,74 @@
       </p:sp>
       <p:sp>
         <p:nvSpPr>
-          <p:cNvPr id="21" name="TextBox 20"/>
-          <p:cNvSpPr txBox="1"/>
-          <p:nvPr/>
-        </p:nvSpPr>
-        <p:spPr>
-          <a:xfrm>
-            <a:off x="10263188" y="4838700"/>
-            <a:ext cx="6634162" cy="453390"/>
-          </a:xfrm>
-          <a:prstGeom prst="rect">
-            <a:avLst/>
-          </a:prstGeom>
-          <a:noFill/>
-        </p:spPr>
-        <p:txBody>
-          <a:bodyPr wrap="square" lIns="0" rIns="0" tIns="0" bIns="0" anchor="ctr">
-            <a:spAutoFit/>
-          </a:bodyPr>
-          <a:lstStyle/>
-          <a:p>
-            <a:pPr algn="l">
-              <a:lnSpc>
-                <a:spcPct val="120000"/>
-              </a:lnSpc>
-            </a:pPr>
-            <a:r>
-              <a:rPr sz="1575" b="0">
+          <p:cNvPr id="15" name="TextBox 14"/>
+          <p:cNvSpPr txBox="1"/>
+          <p:nvPr/>
+        </p:nvSpPr>
+        <p:spPr>
+          <a:xfrm>
+            <a:off x="4419600" y="4171950"/>
+            <a:ext cx="2895600" cy="419100"/>
+          </a:xfrm>
+          <a:prstGeom prst="rect">
+            <a:avLst/>
+          </a:prstGeom>
+          <a:noFill/>
+        </p:spPr>
+        <p:txBody>
+          <a:bodyPr wrap="square" lIns="0" rIns="0" tIns="0" bIns="0" anchor="t">
+            <a:spAutoFit/>
+          </a:bodyPr>
+          <a:lstStyle/>
+          <a:p>
+            <a:pPr algn="ctr">
+              <a:lnSpc>
+                <a:spcPct val="100000"/>
+              </a:lnSpc>
+            </a:pPr>
+            <a:r>
+              <a:rPr sz="2475" b="1">
+                <a:solidFill>
+                  <a:srgbClr val="FFFFFF"/>
+                </a:solidFill>
+                <a:latin typeface="Pretendard"/>
+                <a:ea typeface="Pretendard"/>
+                <a:cs typeface="Pretendard"/>
+              </a:rPr>
+              <a:t>켠 채로</a:t>
+            </a:r>
+          </a:p>
+        </p:txBody>
+      </p:sp>
+      <p:sp>
+        <p:nvSpPr>
+          <p:cNvPr id="16" name="TextBox 15"/>
+          <p:cNvSpPr txBox="1"/>
+          <p:nvPr/>
+        </p:nvSpPr>
+        <p:spPr>
+          <a:xfrm>
+            <a:off x="4629150" y="5143500"/>
+            <a:ext cx="2476500" cy="1524000"/>
+          </a:xfrm>
+          <a:prstGeom prst="rect">
+            <a:avLst/>
+          </a:prstGeom>
+          <a:noFill/>
+        </p:spPr>
+        <p:txBody>
+          <a:bodyPr wrap="square" lIns="0" rIns="0" tIns="0" bIns="0" anchor="t">
+            <a:spAutoFit/>
+          </a:bodyPr>
+          <a:lstStyle/>
+          <a:p>
+            <a:pPr algn="ctr">
+              <a:lnSpc>
+                <a:spcPct val="146000"/>
+              </a:lnSpc>
+            </a:pPr>
+            <a:r>
+              <a:rPr sz="2100" b="0">
                 <a:solidFill>
                   <a:srgbClr val="3D3D3D"/>
                 </a:solidFill>
@@ -9439,27 +11026,79 @@
                 <a:ea typeface="Pretendard"/>
                 <a:cs typeface="Pretendard"/>
               </a:rPr>
-              <a:t>bench(8) 이 빠른 경향</a:t>
-            </a:r>
-          </a:p>
-        </p:txBody>
-      </p:sp>
-      <p:sp>
-        <p:nvSpPr>
-          <p:cNvPr id="22" name="Oval 21"/>
+              <a:t>200 · 8</a:t>
+            </a:r>
+          </a:p>
+          <a:p>
+            <a:pPr algn="ctr">
+              <a:lnSpc>
+                <a:spcPct val="146000"/>
+              </a:lnSpc>
+            </a:pPr>
+            <a:r>
+              <a:rPr sz="2100" b="0">
+                <a:solidFill>
+                  <a:srgbClr val="3D3D3D"/>
+                </a:solidFill>
+                <a:latin typeface="Pretendard"/>
+                <a:ea typeface="Pretendard"/>
+                <a:cs typeface="Pretendard"/>
+              </a:rPr>
+              <a:t>각각 시간</a:t>
+            </a:r>
+          </a:p>
+        </p:txBody>
+      </p:sp>
+      <p:sp>
+        <p:nvSpPr>
+          <p:cNvPr id="17" name="Rounded Rectangle 16"/>
           <p:cNvSpPr/>
           <p:nvPr/>
         </p:nvSpPr>
         <p:spPr>
           <a:xfrm>
-            <a:off x="10077450" y="5527358"/>
-            <a:ext cx="97155" cy="97155"/>
-          </a:xfrm>
-          <a:prstGeom prst="ellipse">
-            <a:avLst/>
-          </a:prstGeom>
-          <a:solidFill>
-            <a:srgbClr val="1E5BC6"/>
+            <a:off x="7696200" y="3924300"/>
+            <a:ext cx="2895600" cy="3143250"/>
+          </a:xfrm>
+          <a:prstGeom prst="roundRect">
+            <a:avLst>
+              <a:gd name="adj" fmla="val 1644"/>
+            </a:avLst>
+          </a:prstGeom>
+          <a:solidFill>
+            <a:srgbClr val="FAFBFD"/>
+          </a:solidFill>
+          <a:ln w="9525">
+            <a:solidFill>
+              <a:srgbClr val="DCE1E8"/>
+            </a:solidFill>
+          </a:ln>
+          <a:effectLst/>
+        </p:spPr>
+        <p:txBody>
+          <a:bodyPr rtlCol="0" anchor="ctr" wrap="square"/>
+          <a:lstStyle/>
+          <a:p>
+            <a:pPr algn="ctr"/>
+          </a:p>
+        </p:txBody>
+      </p:sp>
+      <p:sp>
+        <p:nvSpPr>
+          <p:cNvPr id="18" name="Rectangle 17"/>
+          <p:cNvSpPr/>
+          <p:nvPr/>
+        </p:nvSpPr>
+        <p:spPr>
+          <a:xfrm>
+            <a:off x="7696200" y="3924300"/>
+            <a:ext cx="2895600" cy="914400"/>
+          </a:xfrm>
+          <a:prstGeom prst="rect">
+            <a:avLst/>
+          </a:prstGeom>
+          <a:solidFill>
+            <a:srgbClr val="0D2B5E"/>
           </a:solidFill>
           <a:ln>
             <a:noFill/>
@@ -9476,33 +11115,74 @@
       </p:sp>
       <p:sp>
         <p:nvSpPr>
-          <p:cNvPr id="23" name="TextBox 22"/>
-          <p:cNvSpPr txBox="1"/>
-          <p:nvPr/>
-        </p:nvSpPr>
-        <p:spPr>
-          <a:xfrm>
-            <a:off x="10263188" y="5349240"/>
-            <a:ext cx="6634162" cy="453390"/>
-          </a:xfrm>
-          <a:prstGeom prst="rect">
-            <a:avLst/>
-          </a:prstGeom>
-          <a:noFill/>
-        </p:spPr>
-        <p:txBody>
-          <a:bodyPr wrap="square" lIns="0" rIns="0" tIns="0" bIns="0" anchor="ctr">
-            <a:spAutoFit/>
-          </a:bodyPr>
-          <a:lstStyle/>
-          <a:p>
-            <a:pPr algn="l">
-              <a:lnSpc>
-                <a:spcPct val="120000"/>
-              </a:lnSpc>
-            </a:pPr>
-            <a:r>
-              <a:rPr sz="1575" b="0">
+          <p:cNvPr id="19" name="TextBox 18"/>
+          <p:cNvSpPr txBox="1"/>
+          <p:nvPr/>
+        </p:nvSpPr>
+        <p:spPr>
+          <a:xfrm>
+            <a:off x="7696200" y="4171950"/>
+            <a:ext cx="2895600" cy="419100"/>
+          </a:xfrm>
+          <a:prstGeom prst="rect">
+            <a:avLst/>
+          </a:prstGeom>
+          <a:noFill/>
+        </p:spPr>
+        <p:txBody>
+          <a:bodyPr wrap="square" lIns="0" rIns="0" tIns="0" bIns="0" anchor="t">
+            <a:spAutoFit/>
+          </a:bodyPr>
+          <a:lstStyle/>
+          <a:p>
+            <a:pPr algn="ctr">
+              <a:lnSpc>
+                <a:spcPct val="100000"/>
+              </a:lnSpc>
+            </a:pPr>
+            <a:r>
+              <a:rPr sz="2475" b="1">
+                <a:solidFill>
+                  <a:srgbClr val="FFFFFF"/>
+                </a:solidFill>
+                <a:latin typeface="Pretendard"/>
+                <a:ea typeface="Pretendard"/>
+                <a:cs typeface="Pretendard"/>
+              </a:rPr>
+              <a:t>AQE 끄기</a:t>
+            </a:r>
+          </a:p>
+        </p:txBody>
+      </p:sp>
+      <p:sp>
+        <p:nvSpPr>
+          <p:cNvPr id="20" name="TextBox 19"/>
+          <p:cNvSpPr txBox="1"/>
+          <p:nvPr/>
+        </p:nvSpPr>
+        <p:spPr>
+          <a:xfrm>
+            <a:off x="7905750" y="5143500"/>
+            <a:ext cx="2476500" cy="1524000"/>
+          </a:xfrm>
+          <a:prstGeom prst="rect">
+            <a:avLst/>
+          </a:prstGeom>
+          <a:noFill/>
+        </p:spPr>
+        <p:txBody>
+          <a:bodyPr wrap="square" lIns="0" rIns="0" tIns="0" bIns="0" anchor="t">
+            <a:spAutoFit/>
+          </a:bodyPr>
+          <a:lstStyle/>
+          <a:p>
+            <a:pPr algn="ctr">
+              <a:lnSpc>
+                <a:spcPct val="146000"/>
+              </a:lnSpc>
+            </a:pPr>
+            <a:r>
+              <a:rPr sz="2100" b="0">
                 <a:solidFill>
                   <a:srgbClr val="3D3D3D"/>
                 </a:solidFill>
@@ -9510,23 +11190,75 @@
                 <a:ea typeface="Pretendard"/>
                 <a:cs typeface="Pretendard"/>
               </a:rPr>
-              <a:t>재고 나서 200 으로 원복</a:t>
-            </a:r>
-          </a:p>
-        </p:txBody>
-      </p:sp>
-      <p:sp>
-        <p:nvSpPr>
-          <p:cNvPr id="24" name="Oval 23"/>
+              <a:t>enabled</a:t>
+            </a:r>
+          </a:p>
+          <a:p>
+            <a:pPr algn="ctr">
+              <a:lnSpc>
+                <a:spcPct val="146000"/>
+              </a:lnSpc>
+            </a:pPr>
+            <a:r>
+              <a:rPr sz="2100" b="0">
+                <a:solidFill>
+                  <a:srgbClr val="3D3D3D"/>
+                </a:solidFill>
+                <a:latin typeface="Pretendard"/>
+                <a:ea typeface="Pretendard"/>
+                <a:cs typeface="Pretendard"/>
+              </a:rPr>
+              <a:t>false</a:t>
+            </a:r>
+          </a:p>
+        </p:txBody>
+      </p:sp>
+      <p:sp>
+        <p:nvSpPr>
+          <p:cNvPr id="21" name="Rounded Rectangle 20"/>
           <p:cNvSpPr/>
           <p:nvPr/>
         </p:nvSpPr>
         <p:spPr>
           <a:xfrm>
-            <a:off x="10077450" y="6037898"/>
-            <a:ext cx="97155" cy="97155"/>
-          </a:xfrm>
-          <a:prstGeom prst="ellipse">
+            <a:off x="10972800" y="3924300"/>
+            <a:ext cx="2895600" cy="3143250"/>
+          </a:xfrm>
+          <a:prstGeom prst="roundRect">
+            <a:avLst>
+              <a:gd name="adj" fmla="val 1644"/>
+            </a:avLst>
+          </a:prstGeom>
+          <a:solidFill>
+            <a:srgbClr val="FAFBFD"/>
+          </a:solidFill>
+          <a:ln w="9525">
+            <a:solidFill>
+              <a:srgbClr val="DCE1E8"/>
+            </a:solidFill>
+          </a:ln>
+          <a:effectLst/>
+        </p:spPr>
+        <p:txBody>
+          <a:bodyPr rtlCol="0" anchor="ctr" wrap="square"/>
+          <a:lstStyle/>
+          <a:p>
+            <a:pPr algn="ctr"/>
+          </a:p>
+        </p:txBody>
+      </p:sp>
+      <p:sp>
+        <p:nvSpPr>
+          <p:cNvPr id="22" name="Rectangle 21"/>
+          <p:cNvSpPr/>
+          <p:nvPr/>
+        </p:nvSpPr>
+        <p:spPr>
+          <a:xfrm>
+            <a:off x="10972800" y="3924300"/>
+            <a:ext cx="2895600" cy="914400"/>
+          </a:xfrm>
+          <a:prstGeom prst="rect">
             <a:avLst/>
           </a:prstGeom>
           <a:solidFill>
@@ -9547,33 +11279,74 @@
       </p:sp>
       <p:sp>
         <p:nvSpPr>
-          <p:cNvPr id="25" name="TextBox 24"/>
-          <p:cNvSpPr txBox="1"/>
-          <p:nvPr/>
-        </p:nvSpPr>
-        <p:spPr>
-          <a:xfrm>
-            <a:off x="10263188" y="5859780"/>
-            <a:ext cx="6634162" cy="453390"/>
-          </a:xfrm>
-          <a:prstGeom prst="rect">
-            <a:avLst/>
-          </a:prstGeom>
-          <a:noFill/>
-        </p:spPr>
-        <p:txBody>
-          <a:bodyPr wrap="square" lIns="0" rIns="0" tIns="0" bIns="0" anchor="ctr">
-            <a:spAutoFit/>
-          </a:bodyPr>
-          <a:lstStyle/>
-          <a:p>
-            <a:pPr algn="l">
-              <a:lnSpc>
-                <a:spcPct val="120000"/>
-              </a:lnSpc>
-            </a:pPr>
-            <a:r>
-              <a:rPr sz="1575" b="0">
+          <p:cNvPr id="23" name="TextBox 22"/>
+          <p:cNvSpPr txBox="1"/>
+          <p:nvPr/>
+        </p:nvSpPr>
+        <p:spPr>
+          <a:xfrm>
+            <a:off x="10972800" y="4171950"/>
+            <a:ext cx="2895600" cy="419100"/>
+          </a:xfrm>
+          <a:prstGeom prst="rect">
+            <a:avLst/>
+          </a:prstGeom>
+          <a:noFill/>
+        </p:spPr>
+        <p:txBody>
+          <a:bodyPr wrap="square" lIns="0" rIns="0" tIns="0" bIns="0" anchor="t">
+            <a:spAutoFit/>
+          </a:bodyPr>
+          <a:lstStyle/>
+          <a:p>
+            <a:pPr algn="ctr">
+              <a:lnSpc>
+                <a:spcPct val="100000"/>
+              </a:lnSpc>
+            </a:pPr>
+            <a:r>
+              <a:rPr sz="2475" b="1">
+                <a:solidFill>
+                  <a:srgbClr val="FFFFFF"/>
+                </a:solidFill>
+                <a:latin typeface="Pretendard"/>
+                <a:ea typeface="Pretendard"/>
+                <a:cs typeface="Pretendard"/>
+              </a:rPr>
+              <a:t>끈 채로</a:t>
+            </a:r>
+          </a:p>
+        </p:txBody>
+      </p:sp>
+      <p:sp>
+        <p:nvSpPr>
+          <p:cNvPr id="24" name="TextBox 23"/>
+          <p:cNvSpPr txBox="1"/>
+          <p:nvPr/>
+        </p:nvSpPr>
+        <p:spPr>
+          <a:xfrm>
+            <a:off x="11182350" y="5143500"/>
+            <a:ext cx="2476500" cy="1524000"/>
+          </a:xfrm>
+          <a:prstGeom prst="rect">
+            <a:avLst/>
+          </a:prstGeom>
+          <a:noFill/>
+        </p:spPr>
+        <p:txBody>
+          <a:bodyPr wrap="square" lIns="0" rIns="0" tIns="0" bIns="0" anchor="t">
+            <a:spAutoFit/>
+          </a:bodyPr>
+          <a:lstStyle/>
+          <a:p>
+            <a:pPr algn="ctr">
+              <a:lnSpc>
+                <a:spcPct val="146000"/>
+              </a:lnSpc>
+            </a:pPr>
+            <a:r>
+              <a:rPr sz="2100" b="0">
                 <a:solidFill>
                   <a:srgbClr val="3D3D3D"/>
                 </a:solidFill>
@@ -9581,23 +11354,75 @@
                 <a:ea typeface="Pretendard"/>
                 <a:cs typeface="Pretendard"/>
               </a:rPr>
-              <a:t>adaptive.enabled 가 true 면 자동 조정</a:t>
-            </a:r>
-          </a:p>
-        </p:txBody>
-      </p:sp>
-      <p:sp>
-        <p:nvSpPr>
-          <p:cNvPr id="26" name="Oval 25"/>
+              <a:t>200 · 8</a:t>
+            </a:r>
+          </a:p>
+          <a:p>
+            <a:pPr algn="ctr">
+              <a:lnSpc>
+                <a:spcPct val="146000"/>
+              </a:lnSpc>
+            </a:pPr>
+            <a:r>
+              <a:rPr sz="2100" b="0">
+                <a:solidFill>
+                  <a:srgbClr val="3D3D3D"/>
+                </a:solidFill>
+                <a:latin typeface="Pretendard"/>
+                <a:ea typeface="Pretendard"/>
+                <a:cs typeface="Pretendard"/>
+              </a:rPr>
+              <a:t>다시 시간</a:t>
+            </a:r>
+          </a:p>
+        </p:txBody>
+      </p:sp>
+      <p:sp>
+        <p:nvSpPr>
+          <p:cNvPr id="25" name="Rounded Rectangle 24"/>
           <p:cNvSpPr/>
           <p:nvPr/>
         </p:nvSpPr>
         <p:spPr>
           <a:xfrm>
-            <a:off x="8686800" y="3771900"/>
-            <a:ext cx="914400" cy="914400"/>
-          </a:xfrm>
-          <a:prstGeom prst="ellipse">
+            <a:off x="14249400" y="3924300"/>
+            <a:ext cx="2895600" cy="3143250"/>
+          </a:xfrm>
+          <a:prstGeom prst="roundRect">
+            <a:avLst>
+              <a:gd name="adj" fmla="val 1644"/>
+            </a:avLst>
+          </a:prstGeom>
+          <a:solidFill>
+            <a:srgbClr val="FAFBFD"/>
+          </a:solidFill>
+          <a:ln w="9525">
+            <a:solidFill>
+              <a:srgbClr val="DCE1E8"/>
+            </a:solidFill>
+          </a:ln>
+          <a:effectLst/>
+        </p:spPr>
+        <p:txBody>
+          <a:bodyPr rtlCol="0" anchor="ctr" wrap="square"/>
+          <a:lstStyle/>
+          <a:p>
+            <a:pPr algn="ctr"/>
+          </a:p>
+        </p:txBody>
+      </p:sp>
+      <p:sp>
+        <p:nvSpPr>
+          <p:cNvPr id="26" name="Rectangle 25"/>
+          <p:cNvSpPr/>
+          <p:nvPr/>
+        </p:nvSpPr>
+        <p:spPr>
+          <a:xfrm>
+            <a:off x="14249400" y="3924300"/>
+            <a:ext cx="2895600" cy="914400"/>
+          </a:xfrm>
+          <a:prstGeom prst="rect">
             <a:avLst/>
           </a:prstGeom>
           <a:solidFill>
@@ -9624,8 +11449,8 @@
         </p:nvSpPr>
         <p:spPr>
           <a:xfrm>
-            <a:off x="8686800" y="4057650"/>
-            <a:ext cx="914400" cy="381000"/>
+            <a:off x="14249400" y="4171950"/>
+            <a:ext cx="2895600" cy="419100"/>
           </a:xfrm>
           <a:prstGeom prst="rect">
             <a:avLst/>
@@ -9644,7 +11469,7 @@
               </a:lnSpc>
             </a:pPr>
             <a:r>
-              <a:rPr sz="2250" b="1">
+              <a:rPr sz="2475" b="1">
                 <a:solidFill>
                   <a:srgbClr val="FFFFFF"/>
                 </a:solidFill>
@@ -9652,14 +11477,73 @@
                 <a:ea typeface="Pretendard"/>
                 <a:cs typeface="Pretendard"/>
               </a:rPr>
-              <a:t>VS</a:t>
-            </a:r>
-          </a:p>
-        </p:txBody>
-      </p:sp>
-      <p:sp>
-        <p:nvSpPr>
-          <p:cNvPr id="28" name="Rectangle 27"/>
+              <a:t>원복</a:t>
+            </a:r>
+          </a:p>
+        </p:txBody>
+      </p:sp>
+      <p:sp>
+        <p:nvSpPr>
+          <p:cNvPr id="28" name="TextBox 27"/>
+          <p:cNvSpPr txBox="1"/>
+          <p:nvPr/>
+        </p:nvSpPr>
+        <p:spPr>
+          <a:xfrm>
+            <a:off x="14458950" y="5143500"/>
+            <a:ext cx="2476500" cy="1524000"/>
+          </a:xfrm>
+          <a:prstGeom prst="rect">
+            <a:avLst/>
+          </a:prstGeom>
+          <a:noFill/>
+        </p:spPr>
+        <p:txBody>
+          <a:bodyPr wrap="square" lIns="0" rIns="0" tIns="0" bIns="0" anchor="t">
+            <a:spAutoFit/>
+          </a:bodyPr>
+          <a:lstStyle/>
+          <a:p>
+            <a:pPr algn="ctr">
+              <a:lnSpc>
+                <a:spcPct val="146000"/>
+              </a:lnSpc>
+            </a:pPr>
+            <a:r>
+              <a:rPr sz="2100" b="0">
+                <a:solidFill>
+                  <a:srgbClr val="3D3D3D"/>
+                </a:solidFill>
+                <a:latin typeface="Pretendard"/>
+                <a:ea typeface="Pretendard"/>
+                <a:cs typeface="Pretendard"/>
+              </a:rPr>
+              <a:t>AQE true</a:t>
+            </a:r>
+          </a:p>
+          <a:p>
+            <a:pPr algn="ctr">
+              <a:lnSpc>
+                <a:spcPct val="146000"/>
+              </a:lnSpc>
+            </a:pPr>
+            <a:r>
+              <a:rPr sz="2100" b="0">
+                <a:solidFill>
+                  <a:srgbClr val="3D3D3D"/>
+                </a:solidFill>
+                <a:latin typeface="Pretendard"/>
+                <a:ea typeface="Pretendard"/>
+                <a:cs typeface="Pretendard"/>
+              </a:rPr>
+              <a:t>partitions 200</a:t>
+            </a:r>
+          </a:p>
+        </p:txBody>
+      </p:sp>
+      <p:sp>
+        <p:nvSpPr>
+          <p:cNvPr id="29" name="Rectangle 28"/>
           <p:cNvSpPr/>
           <p:nvPr/>
         </p:nvSpPr>
@@ -9689,7 +11573,7 @@
       </p:sp>
       <p:sp>
         <p:nvSpPr>
-          <p:cNvPr id="29" name="TextBox 28"/>
+          <p:cNvPr id="30" name="TextBox 29"/>
           <p:cNvSpPr txBox="1"/>
           <p:nvPr/>
         </p:nvSpPr>
@@ -9730,7 +11614,7 @@
       </p:sp>
       <p:sp>
         <p:nvSpPr>
-          <p:cNvPr id="30" name="TextBox 29"/>
+          <p:cNvPr id="31" name="TextBox 30"/>
           <p:cNvSpPr txBox="1"/>
           <p:nvPr/>
         </p:nvSpPr>
@@ -9913,7 +11797,7 @@
                 <a:ea typeface="Pretendard"/>
                 <a:cs typeface="Pretendard"/>
               </a:rPr>
-              <a:t>5단계 — 일부러 느리게 만들기</a:t>
+              <a:t>4단계 — 일부러 헛짚기</a:t>
             </a:r>
           </a:p>
         </p:txBody>
@@ -9954,7 +11838,7 @@
                 <a:ea typeface="Pretendard"/>
                 <a:cs typeface="Pretendard"/>
               </a:rPr>
-              <a:t>스큐 — 90% 가 한 키에 몰리면</a:t>
+              <a:t>AQE 를 켠 채로는 200 vs 8 차이가 작다</a:t>
             </a:r>
           </a:p>
         </p:txBody>
@@ -9991,18 +11875,100 @@
       </p:sp>
       <p:sp>
         <p:nvSpPr>
-          <p:cNvPr id="8" name="Rounded Rectangle 7"/>
+          <p:cNvPr id="8" name="TextBox 7"/>
+          <p:cNvSpPr txBox="1"/>
+          <p:nvPr/>
+        </p:nvSpPr>
+        <p:spPr>
+          <a:xfrm>
+            <a:off x="1143000" y="2857500"/>
+            <a:ext cx="7372350" cy="533400"/>
+          </a:xfrm>
+          <a:prstGeom prst="rect">
+            <a:avLst/>
+          </a:prstGeom>
+          <a:noFill/>
+        </p:spPr>
+        <p:txBody>
+          <a:bodyPr wrap="square" lIns="0" rIns="0" tIns="0" bIns="0" anchor="t">
+            <a:spAutoFit/>
+          </a:bodyPr>
+          <a:lstStyle/>
+          <a:p>
+            <a:pPr algn="l">
+              <a:lnSpc>
+                <a:spcPct val="110000"/>
+              </a:lnSpc>
+            </a:pPr>
+            <a:r>
+              <a:rPr sz="3150" b="1">
+                <a:solidFill>
+                  <a:srgbClr val="0D2B5E"/>
+                </a:solidFill>
+                <a:latin typeface="Pretendard"/>
+                <a:ea typeface="Pretendard"/>
+                <a:cs typeface="Pretendard"/>
+              </a:rPr>
+              <a:t>AQE 켜짐 (기본)</a:t>
+            </a:r>
+          </a:p>
+        </p:txBody>
+      </p:sp>
+      <p:sp>
+        <p:nvSpPr>
+          <p:cNvPr id="9" name="TextBox 8"/>
+          <p:cNvSpPr txBox="1"/>
+          <p:nvPr/>
+        </p:nvSpPr>
+        <p:spPr>
+          <a:xfrm>
+            <a:off x="1143000" y="3467100"/>
+            <a:ext cx="7372350" cy="876300"/>
+          </a:xfrm>
+          <a:prstGeom prst="rect">
+            <a:avLst/>
+          </a:prstGeom>
+          <a:noFill/>
+        </p:spPr>
+        <p:txBody>
+          <a:bodyPr wrap="square" lIns="0" rIns="0" tIns="0" bIns="0" anchor="t">
+            <a:spAutoFit/>
+          </a:bodyPr>
+          <a:lstStyle/>
+          <a:p>
+            <a:pPr algn="l">
+              <a:lnSpc>
+                <a:spcPct val="146000"/>
+              </a:lnSpc>
+            </a:pPr>
+            <a:r>
+              <a:rPr sz="2250" b="0">
+                <a:solidFill>
+                  <a:srgbClr val="3D3D3D"/>
+                </a:solidFill>
+                <a:latin typeface="Pretendard"/>
+                <a:ea typeface="Pretendard"/>
+                <a:cs typeface="Pretendard"/>
+              </a:rPr>
+              <a:t>실행 중에 빈 조각을 합쳐 준다 — 차이가 작다</a:t>
+            </a:r>
+          </a:p>
+        </p:txBody>
+      </p:sp>
+      <p:sp>
+        <p:nvSpPr>
+          <p:cNvPr id="10" name="Rounded Rectangle 9"/>
           <p:cNvSpPr/>
           <p:nvPr/>
         </p:nvSpPr>
         <p:spPr>
           <a:xfrm>
-            <a:off x="1143000" y="2933700"/>
-            <a:ext cx="11430000" cy="1095375"/>
+            <a:off x="1143000" y="4610100"/>
+            <a:ext cx="7372350" cy="2857500"/>
           </a:xfrm>
           <a:prstGeom prst="roundRect">
             <a:avLst>
-              <a:gd name="adj" fmla="val 4347"/>
+              <a:gd name="adj" fmla="val 1666"/>
             </a:avLst>
           </a:prstGeom>
           <a:solidFill>
@@ -10025,20 +11991,20 @@
       </p:sp>
       <p:sp>
         <p:nvSpPr>
-          <p:cNvPr id="9" name="Oval 8"/>
+          <p:cNvPr id="11" name="Oval 10"/>
           <p:cNvSpPr/>
           <p:nvPr/>
         </p:nvSpPr>
         <p:spPr>
           <a:xfrm>
-            <a:off x="1447800" y="3181350"/>
-            <a:ext cx="590550" cy="590550"/>
+            <a:off x="1447800" y="5016817"/>
+            <a:ext cx="97155" cy="97155"/>
           </a:xfrm>
           <a:prstGeom prst="ellipse">
             <a:avLst/>
           </a:prstGeom>
           <a:solidFill>
-            <a:srgbClr val="0D2B5E"/>
+            <a:srgbClr val="1E5BC6"/>
           </a:solidFill>
           <a:ln>
             <a:noFill/>
@@ -10055,14 +12021,197 @@
       </p:sp>
       <p:sp>
         <p:nvSpPr>
-          <p:cNvPr id="10" name="TextBox 9"/>
-          <p:cNvSpPr txBox="1"/>
-          <p:nvPr/>
-        </p:nvSpPr>
-        <p:spPr>
-          <a:xfrm>
-            <a:off x="1447800" y="3333750"/>
-            <a:ext cx="590550" cy="323850"/>
+          <p:cNvPr id="12" name="TextBox 11"/>
+          <p:cNvSpPr txBox="1"/>
+          <p:nvPr/>
+        </p:nvSpPr>
+        <p:spPr>
+          <a:xfrm>
+            <a:off x="1633538" y="4838700"/>
+            <a:ext cx="6634162" cy="453390"/>
+          </a:xfrm>
+          <a:prstGeom prst="rect">
+            <a:avLst/>
+          </a:prstGeom>
+          <a:noFill/>
+        </p:spPr>
+        <p:txBody>
+          <a:bodyPr wrap="square" lIns="0" rIns="0" tIns="0" bIns="0" anchor="ctr">
+            <a:spAutoFit/>
+          </a:bodyPr>
+          <a:lstStyle/>
+          <a:p>
+            <a:pPr algn="l">
+              <a:lnSpc>
+                <a:spcPct val="120000"/>
+              </a:lnSpc>
+            </a:pPr>
+            <a:r>
+              <a:rPr sz="1575" b="0">
+                <a:solidFill>
+                  <a:srgbClr val="3D3D3D"/>
+                </a:solidFill>
+                <a:latin typeface="Pretendard"/>
+                <a:ea typeface="Pretendard"/>
+                <a:cs typeface="Pretendard"/>
+              </a:rPr>
+              <a:t>200 → 1.34초</a:t>
+            </a:r>
+          </a:p>
+        </p:txBody>
+      </p:sp>
+      <p:sp>
+        <p:nvSpPr>
+          <p:cNvPr id="13" name="Oval 12"/>
+          <p:cNvSpPr/>
+          <p:nvPr/>
+        </p:nvSpPr>
+        <p:spPr>
+          <a:xfrm>
+            <a:off x="1447800" y="5527358"/>
+            <a:ext cx="97155" cy="97155"/>
+          </a:xfrm>
+          <a:prstGeom prst="ellipse">
+            <a:avLst/>
+          </a:prstGeom>
+          <a:solidFill>
+            <a:srgbClr val="1E5BC6"/>
+          </a:solidFill>
+          <a:ln>
+            <a:noFill/>
+          </a:ln>
+          <a:effectLst/>
+        </p:spPr>
+        <p:txBody>
+          <a:bodyPr rtlCol="0" anchor="ctr" wrap="square"/>
+          <a:lstStyle/>
+          <a:p>
+            <a:pPr algn="ctr"/>
+          </a:p>
+        </p:txBody>
+      </p:sp>
+      <p:sp>
+        <p:nvSpPr>
+          <p:cNvPr id="14" name="TextBox 13"/>
+          <p:cNvSpPr txBox="1"/>
+          <p:nvPr/>
+        </p:nvSpPr>
+        <p:spPr>
+          <a:xfrm>
+            <a:off x="1633538" y="5349240"/>
+            <a:ext cx="6634162" cy="453390"/>
+          </a:xfrm>
+          <a:prstGeom prst="rect">
+            <a:avLst/>
+          </a:prstGeom>
+          <a:noFill/>
+        </p:spPr>
+        <p:txBody>
+          <a:bodyPr wrap="square" lIns="0" rIns="0" tIns="0" bIns="0" anchor="ctr">
+            <a:spAutoFit/>
+          </a:bodyPr>
+          <a:lstStyle/>
+          <a:p>
+            <a:pPr algn="l">
+              <a:lnSpc>
+                <a:spcPct val="120000"/>
+              </a:lnSpc>
+            </a:pPr>
+            <a:r>
+              <a:rPr sz="1575" b="0">
+                <a:solidFill>
+                  <a:srgbClr val="3D3D3D"/>
+                </a:solidFill>
+                <a:latin typeface="Pretendard"/>
+                <a:ea typeface="Pretendard"/>
+                <a:cs typeface="Pretendard"/>
+              </a:rPr>
+              <a:t>8 → 0.96초</a:t>
+            </a:r>
+          </a:p>
+        </p:txBody>
+      </p:sp>
+      <p:sp>
+        <p:nvSpPr>
+          <p:cNvPr id="15" name="Oval 14"/>
+          <p:cNvSpPr/>
+          <p:nvPr/>
+        </p:nvSpPr>
+        <p:spPr>
+          <a:xfrm>
+            <a:off x="1447800" y="6037898"/>
+            <a:ext cx="97155" cy="97155"/>
+          </a:xfrm>
+          <a:prstGeom prst="ellipse">
+            <a:avLst/>
+          </a:prstGeom>
+          <a:solidFill>
+            <a:srgbClr val="1E5BC6"/>
+          </a:solidFill>
+          <a:ln>
+            <a:noFill/>
+          </a:ln>
+          <a:effectLst/>
+        </p:spPr>
+        <p:txBody>
+          <a:bodyPr rtlCol="0" anchor="ctr" wrap="square"/>
+          <a:lstStyle/>
+          <a:p>
+            <a:pPr algn="ctr"/>
+          </a:p>
+        </p:txBody>
+      </p:sp>
+      <p:sp>
+        <p:nvSpPr>
+          <p:cNvPr id="16" name="TextBox 15"/>
+          <p:cNvSpPr txBox="1"/>
+          <p:nvPr/>
+        </p:nvSpPr>
+        <p:spPr>
+          <a:xfrm>
+            <a:off x="1633538" y="5859780"/>
+            <a:ext cx="6634162" cy="453390"/>
+          </a:xfrm>
+          <a:prstGeom prst="rect">
+            <a:avLst/>
+          </a:prstGeom>
+          <a:noFill/>
+        </p:spPr>
+        <p:txBody>
+          <a:bodyPr wrap="square" lIns="0" rIns="0" tIns="0" bIns="0" anchor="ctr">
+            <a:spAutoFit/>
+          </a:bodyPr>
+          <a:lstStyle/>
+          <a:p>
+            <a:pPr algn="l">
+              <a:lnSpc>
+                <a:spcPct val="120000"/>
+              </a:lnSpc>
+            </a:pPr>
+            <a:r>
+              <a:rPr sz="1575" b="0">
+                <a:solidFill>
+                  <a:srgbClr val="3D3D3D"/>
+                </a:solidFill>
+                <a:latin typeface="Pretendard"/>
+                <a:ea typeface="Pretendard"/>
+                <a:cs typeface="Pretendard"/>
+              </a:rPr>
+              <a:t>「줄이면 빨라진다」가 안 보인다</a:t>
+            </a:r>
+          </a:p>
+        </p:txBody>
+      </p:sp>
+      <p:sp>
+        <p:nvSpPr>
+          <p:cNvPr id="17" name="TextBox 16"/>
+          <p:cNvSpPr txBox="1"/>
+          <p:nvPr/>
+        </p:nvSpPr>
+        <p:spPr>
+          <a:xfrm>
+            <a:off x="9772650" y="2857500"/>
+            <a:ext cx="7372350" cy="533400"/>
           </a:xfrm>
           <a:prstGeom prst="rect">
             <a:avLst/>
@@ -10075,35 +12224,35 @@
           </a:bodyPr>
           <a:lstStyle/>
           <a:p>
-            <a:pPr algn="ctr">
-              <a:lnSpc>
-                <a:spcPct val="100000"/>
-              </a:lnSpc>
-            </a:pPr>
-            <a:r>
-              <a:rPr sz="2250" b="1">
-                <a:solidFill>
-                  <a:srgbClr val="FFFFFF"/>
-                </a:solidFill>
-                <a:latin typeface="Pretendard"/>
-                <a:ea typeface="Pretendard"/>
-                <a:cs typeface="Pretendard"/>
-              </a:rPr>
-              <a:t>1</a:t>
-            </a:r>
-          </a:p>
-        </p:txBody>
-      </p:sp>
-      <p:sp>
-        <p:nvSpPr>
-          <p:cNvPr id="11" name="TextBox 10"/>
-          <p:cNvSpPr txBox="1"/>
-          <p:nvPr/>
-        </p:nvSpPr>
-        <p:spPr>
-          <a:xfrm>
-            <a:off x="2324100" y="3143250"/>
-            <a:ext cx="9906000" cy="400050"/>
+            <a:pPr algn="l">
+              <a:lnSpc>
+                <a:spcPct val="110000"/>
+              </a:lnSpc>
+            </a:pPr>
+            <a:r>
+              <a:rPr sz="3150" b="1">
+                <a:solidFill>
+                  <a:srgbClr val="0D2B5E"/>
+                </a:solidFill>
+                <a:latin typeface="Pretendard"/>
+                <a:ea typeface="Pretendard"/>
+                <a:cs typeface="Pretendard"/>
+              </a:rPr>
+              <a:t>AQE 꺼짐</a:t>
+            </a:r>
+          </a:p>
+        </p:txBody>
+      </p:sp>
+      <p:sp>
+        <p:nvSpPr>
+          <p:cNvPr id="18" name="TextBox 17"/>
+          <p:cNvSpPr txBox="1"/>
+          <p:nvPr/>
+        </p:nvSpPr>
+        <p:spPr>
+          <a:xfrm>
+            <a:off x="9772650" y="3467100"/>
+            <a:ext cx="7372350" cy="876300"/>
           </a:xfrm>
           <a:prstGeom prst="rect">
             <a:avLst/>
@@ -10118,52 +12267,11 @@
           <a:p>
             <a:pPr algn="l">
               <a:lnSpc>
-                <a:spcPct val="110000"/>
-              </a:lnSpc>
-            </a:pPr>
-            <a:r>
-              <a:rPr sz="2475" b="1">
-                <a:solidFill>
-                  <a:srgbClr val="0D2B5E"/>
-                </a:solidFill>
-                <a:latin typeface="Pretendard"/>
-                <a:ea typeface="Pretendard"/>
-                <a:cs typeface="Pretendard"/>
-              </a:rPr>
-              <a:t>hot 키에 90% 를 몰아넣는다</a:t>
-            </a:r>
-          </a:p>
-        </p:txBody>
-      </p:sp>
-      <p:sp>
-        <p:nvSpPr>
-          <p:cNvPr id="12" name="TextBox 11"/>
-          <p:cNvSpPr txBox="1"/>
-          <p:nvPr/>
-        </p:nvSpPr>
-        <p:spPr>
-          <a:xfrm>
-            <a:off x="2324100" y="3543300"/>
-            <a:ext cx="9906000" cy="361950"/>
-          </a:xfrm>
-          <a:prstGeom prst="rect">
-            <a:avLst/>
-          </a:prstGeom>
-          <a:noFill/>
-        </p:spPr>
-        <p:txBody>
-          <a:bodyPr wrap="square" lIns="0" rIns="0" tIns="0" bIns="0" anchor="t">
-            <a:spAutoFit/>
-          </a:bodyPr>
-          <a:lstStyle/>
-          <a:p>
-            <a:pPr algn="l">
-              <a:lnSpc>
-                <a:spcPct val="120000"/>
-              </a:lnSpc>
-            </a:pPr>
-            <a:r>
-              <a:rPr sz="2025" b="0">
+                <a:spcPct val="146000"/>
+              </a:lnSpc>
+            </a:pPr>
+            <a:r>
+              <a:rPr sz="2250" b="0">
                 <a:solidFill>
                   <a:srgbClr val="3D3D3D"/>
                 </a:solidFill>
@@ -10171,25 +12279,25 @@
                 <a:ea typeface="Pretendard"/>
                 <a:cs typeface="Pretendard"/>
               </a:rPr>
-              <a:t>F.when(id % 10 &lt; 9, "hot") — 고른 분포(id % 10)와 짝으로</a:t>
-            </a:r>
-          </a:p>
-        </p:txBody>
-      </p:sp>
-      <p:sp>
-        <p:nvSpPr>
-          <p:cNvPr id="13" name="Rounded Rectangle 12"/>
+              <a:t>Task 200개 중 190개가 빈 태스크</a:t>
+            </a:r>
+          </a:p>
+        </p:txBody>
+      </p:sp>
+      <p:sp>
+        <p:nvSpPr>
+          <p:cNvPr id="19" name="Rounded Rectangle 18"/>
           <p:cNvSpPr/>
           <p:nvPr/>
         </p:nvSpPr>
         <p:spPr>
           <a:xfrm>
-            <a:off x="1143000" y="4200525"/>
-            <a:ext cx="11430000" cy="1095375"/>
+            <a:off x="9772650" y="4610100"/>
+            <a:ext cx="7372350" cy="2857500"/>
           </a:xfrm>
           <a:prstGeom prst="roundRect">
             <a:avLst>
-              <a:gd name="adj" fmla="val 4347"/>
+              <a:gd name="adj" fmla="val 1666"/>
             </a:avLst>
           </a:prstGeom>
           <a:solidFill>
@@ -10212,20 +12320,20 @@
       </p:sp>
       <p:sp>
         <p:nvSpPr>
-          <p:cNvPr id="14" name="Oval 13"/>
+          <p:cNvPr id="20" name="Oval 19"/>
           <p:cNvSpPr/>
           <p:nvPr/>
         </p:nvSpPr>
         <p:spPr>
           <a:xfrm>
-            <a:off x="1447800" y="4448175"/>
-            <a:ext cx="590550" cy="590550"/>
+            <a:off x="10077450" y="5016817"/>
+            <a:ext cx="97155" cy="97155"/>
           </a:xfrm>
           <a:prstGeom prst="ellipse">
             <a:avLst/>
           </a:prstGeom>
           <a:solidFill>
-            <a:srgbClr val="0D2B5E"/>
+            <a:srgbClr val="1E5BC6"/>
           </a:solidFill>
           <a:ln>
             <a:noFill/>
@@ -10242,115 +12350,33 @@
       </p:sp>
       <p:sp>
         <p:nvSpPr>
-          <p:cNvPr id="15" name="TextBox 14"/>
-          <p:cNvSpPr txBox="1"/>
-          <p:nvPr/>
-        </p:nvSpPr>
-        <p:spPr>
-          <a:xfrm>
-            <a:off x="1447800" y="4600575"/>
-            <a:ext cx="590550" cy="323850"/>
-          </a:xfrm>
-          <a:prstGeom prst="rect">
-            <a:avLst/>
-          </a:prstGeom>
-          <a:noFill/>
-        </p:spPr>
-        <p:txBody>
-          <a:bodyPr wrap="square" lIns="0" rIns="0" tIns="0" bIns="0" anchor="t">
-            <a:spAutoFit/>
-          </a:bodyPr>
-          <a:lstStyle/>
-          <a:p>
-            <a:pPr algn="ctr">
-              <a:lnSpc>
-                <a:spcPct val="100000"/>
-              </a:lnSpc>
-            </a:pPr>
-            <a:r>
-              <a:rPr sz="2250" b="1">
-                <a:solidFill>
-                  <a:srgbClr val="FFFFFF"/>
-                </a:solidFill>
-                <a:latin typeface="Pretendard"/>
-                <a:ea typeface="Pretendard"/>
-                <a:cs typeface="Pretendard"/>
-              </a:rPr>
-              <a:t>2</a:t>
-            </a:r>
-          </a:p>
-        </p:txBody>
-      </p:sp>
-      <p:sp>
-        <p:nvSpPr>
-          <p:cNvPr id="16" name="TextBox 15"/>
-          <p:cNvSpPr txBox="1"/>
-          <p:nvPr/>
-        </p:nvSpPr>
-        <p:spPr>
-          <a:xfrm>
-            <a:off x="2324100" y="4410075"/>
-            <a:ext cx="9906000" cy="400050"/>
-          </a:xfrm>
-          <a:prstGeom prst="rect">
-            <a:avLst/>
-          </a:prstGeom>
-          <a:noFill/>
-        </p:spPr>
-        <p:txBody>
-          <a:bodyPr wrap="square" lIns="0" rIns="0" tIns="0" bIns="0" anchor="t">
+          <p:cNvPr id="21" name="TextBox 20"/>
+          <p:cNvSpPr txBox="1"/>
+          <p:nvPr/>
+        </p:nvSpPr>
+        <p:spPr>
+          <a:xfrm>
+            <a:off x="10263188" y="4838700"/>
+            <a:ext cx="6634162" cy="453390"/>
+          </a:xfrm>
+          <a:prstGeom prst="rect">
+            <a:avLst/>
+          </a:prstGeom>
+          <a:noFill/>
+        </p:spPr>
+        <p:txBody>
+          <a:bodyPr wrap="square" lIns="0" rIns="0" tIns="0" bIns="0" anchor="ctr">
             <a:spAutoFit/>
           </a:bodyPr>
           <a:lstStyle/>
           <a:p>
             <a:pPr algn="l">
               <a:lnSpc>
-                <a:spcPct val="110000"/>
-              </a:lnSpc>
-            </a:pPr>
-            <a:r>
-              <a:rPr sz="2475" b="1">
-                <a:solidFill>
-                  <a:srgbClr val="0D2B5E"/>
-                </a:solidFill>
-                <a:latin typeface="Pretendard"/>
-                <a:ea typeface="Pretendard"/>
-                <a:cs typeface="Pretendard"/>
-              </a:rPr>
-              <a:t>groupBy(k).count() 시간을 잰다</a:t>
-            </a:r>
-          </a:p>
-        </p:txBody>
-      </p:sp>
-      <p:sp>
-        <p:nvSpPr>
-          <p:cNvPr id="17" name="TextBox 16"/>
-          <p:cNvSpPr txBox="1"/>
-          <p:nvPr/>
-        </p:nvSpPr>
-        <p:spPr>
-          <a:xfrm>
-            <a:off x="2324100" y="4810125"/>
-            <a:ext cx="9906000" cy="361950"/>
-          </a:xfrm>
-          <a:prstGeom prst="rect">
-            <a:avLst/>
-          </a:prstGeom>
-          <a:noFill/>
-        </p:spPr>
-        <p:txBody>
-          <a:bodyPr wrap="square" lIns="0" rIns="0" tIns="0" bIns="0" anchor="t">
-            <a:spAutoFit/>
-          </a:bodyPr>
-          <a:lstStyle/>
-          <a:p>
-            <a:pPr algn="l">
-              <a:lnSpc>
                 <a:spcPct val="120000"/>
               </a:lnSpc>
             </a:pPr>
             <a:r>
-              <a:rPr sz="2025" b="0">
+              <a:rPr sz="1575" b="0">
                 <a:solidFill>
                   <a:srgbClr val="3D3D3D"/>
                 </a:solidFill>
@@ -10358,61 +12384,27 @@
                 <a:ea typeface="Pretendard"/>
                 <a:cs typeface="Pretendard"/>
               </a:rPr>
-              <a:t>스큐 있는 쪽이 느리다 — 평균은 괜찮은데 전체가 느린 전형</a:t>
-            </a:r>
-          </a:p>
-        </p:txBody>
-      </p:sp>
-      <p:sp>
-        <p:nvSpPr>
-          <p:cNvPr id="18" name="Rounded Rectangle 17"/>
+              <a:t>200 → 4.59초</a:t>
+            </a:r>
+          </a:p>
+        </p:txBody>
+      </p:sp>
+      <p:sp>
+        <p:nvSpPr>
+          <p:cNvPr id="22" name="Oval 21"/>
           <p:cNvSpPr/>
           <p:nvPr/>
         </p:nvSpPr>
         <p:spPr>
           <a:xfrm>
-            <a:off x="1143000" y="5467350"/>
-            <a:ext cx="11430000" cy="1095375"/>
-          </a:xfrm>
-          <a:prstGeom prst="roundRect">
-            <a:avLst>
-              <a:gd name="adj" fmla="val 4347"/>
-            </a:avLst>
-          </a:prstGeom>
-          <a:solidFill>
-            <a:srgbClr val="FAFBFD"/>
-          </a:solidFill>
-          <a:ln w="9525">
-            <a:solidFill>
-              <a:srgbClr val="DCE1E8"/>
-            </a:solidFill>
-          </a:ln>
-          <a:effectLst/>
-        </p:spPr>
-        <p:txBody>
-          <a:bodyPr rtlCol="0" anchor="ctr" wrap="square"/>
-          <a:lstStyle/>
-          <a:p>
-            <a:pPr algn="ctr"/>
-          </a:p>
-        </p:txBody>
-      </p:sp>
-      <p:sp>
-        <p:nvSpPr>
-          <p:cNvPr id="19" name="Oval 18"/>
-          <p:cNvSpPr/>
-          <p:nvPr/>
-        </p:nvSpPr>
-        <p:spPr>
-          <a:xfrm>
-            <a:off x="1447800" y="5715000"/>
-            <a:ext cx="590550" cy="590550"/>
+            <a:off x="10077450" y="5527358"/>
+            <a:ext cx="97155" cy="97155"/>
           </a:xfrm>
           <a:prstGeom prst="ellipse">
             <a:avLst/>
           </a:prstGeom>
           <a:solidFill>
-            <a:srgbClr val="0D2B5E"/>
+            <a:srgbClr val="1E5BC6"/>
           </a:solidFill>
           <a:ln>
             <a:noFill/>
@@ -10429,115 +12421,33 @@
       </p:sp>
       <p:sp>
         <p:nvSpPr>
-          <p:cNvPr id="20" name="TextBox 19"/>
-          <p:cNvSpPr txBox="1"/>
-          <p:nvPr/>
-        </p:nvSpPr>
-        <p:spPr>
-          <a:xfrm>
-            <a:off x="1447800" y="5867400"/>
-            <a:ext cx="590550" cy="323850"/>
-          </a:xfrm>
-          <a:prstGeom prst="rect">
-            <a:avLst/>
-          </a:prstGeom>
-          <a:noFill/>
-        </p:spPr>
-        <p:txBody>
-          <a:bodyPr wrap="square" lIns="0" rIns="0" tIns="0" bIns="0" anchor="t">
-            <a:spAutoFit/>
-          </a:bodyPr>
-          <a:lstStyle/>
-          <a:p>
-            <a:pPr algn="ctr">
-              <a:lnSpc>
-                <a:spcPct val="100000"/>
-              </a:lnSpc>
-            </a:pPr>
-            <a:r>
-              <a:rPr sz="2250" b="1">
-                <a:solidFill>
-                  <a:srgbClr val="FFFFFF"/>
-                </a:solidFill>
-                <a:latin typeface="Pretendard"/>
-                <a:ea typeface="Pretendard"/>
-                <a:cs typeface="Pretendard"/>
-              </a:rPr>
-              <a:t>3</a:t>
-            </a:r>
-          </a:p>
-        </p:txBody>
-      </p:sp>
-      <p:sp>
-        <p:nvSpPr>
-          <p:cNvPr id="21" name="TextBox 20"/>
-          <p:cNvSpPr txBox="1"/>
-          <p:nvPr/>
-        </p:nvSpPr>
-        <p:spPr>
-          <a:xfrm>
-            <a:off x="2324100" y="5676900"/>
-            <a:ext cx="9906000" cy="400050"/>
-          </a:xfrm>
-          <a:prstGeom prst="rect">
-            <a:avLst/>
-          </a:prstGeom>
-          <a:noFill/>
-        </p:spPr>
-        <p:txBody>
-          <a:bodyPr wrap="square" lIns="0" rIns="0" tIns="0" bIns="0" anchor="t">
+          <p:cNvPr id="23" name="TextBox 22"/>
+          <p:cNvSpPr txBox="1"/>
+          <p:nvPr/>
+        </p:nvSpPr>
+        <p:spPr>
+          <a:xfrm>
+            <a:off x="10263188" y="5349240"/>
+            <a:ext cx="6634162" cy="453390"/>
+          </a:xfrm>
+          <a:prstGeom prst="rect">
+            <a:avLst/>
+          </a:prstGeom>
+          <a:noFill/>
+        </p:spPr>
+        <p:txBody>
+          <a:bodyPr wrap="square" lIns="0" rIns="0" tIns="0" bIns="0" anchor="ctr">
             <a:spAutoFit/>
           </a:bodyPr>
           <a:lstStyle/>
           <a:p>
             <a:pPr algn="l">
               <a:lnSpc>
-                <a:spcPct val="110000"/>
-              </a:lnSpc>
-            </a:pPr>
-            <a:r>
-              <a:rPr sz="2475" b="1">
-                <a:solidFill>
-                  <a:srgbClr val="0D2B5E"/>
-                </a:solidFill>
-                <a:latin typeface="Pretendard"/>
-                <a:ea typeface="Pretendard"/>
-                <a:cs typeface="Pretendard"/>
-              </a:rPr>
-              <a:t>UI 에서 Task Duration 을 본다</a:t>
-            </a:r>
-          </a:p>
-        </p:txBody>
-      </p:sp>
-      <p:sp>
-        <p:nvSpPr>
-          <p:cNvPr id="22" name="TextBox 21"/>
-          <p:cNvSpPr txBox="1"/>
-          <p:nvPr/>
-        </p:nvSpPr>
-        <p:spPr>
-          <a:xfrm>
-            <a:off x="2324100" y="6076950"/>
-            <a:ext cx="9906000" cy="361950"/>
-          </a:xfrm>
-          <a:prstGeom prst="rect">
-            <a:avLst/>
-          </a:prstGeom>
-          <a:noFill/>
-        </p:spPr>
-        <p:txBody>
-          <a:bodyPr wrap="square" lIns="0" rIns="0" tIns="0" bIns="0" anchor="t">
-            <a:spAutoFit/>
-          </a:bodyPr>
-          <a:lstStyle/>
-          <a:p>
-            <a:pPr algn="l">
-              <a:lnSpc>
                 <a:spcPct val="120000"/>
               </a:lnSpc>
             </a:pPr>
             <a:r>
-              <a:rPr sz="2025" b="0">
+              <a:rPr sz="1575" b="0">
                 <a:solidFill>
                   <a:srgbClr val="3D3D3D"/>
                 </a:solidFill>
@@ -10545,161 +12455,27 @@
                 <a:ea typeface="Pretendard"/>
                 <a:cs typeface="Pretendard"/>
               </a:rPr>
-              <a:t>한 태스크만 유난히 오래 — 전체는 그 태스크를 기다린다</a:t>
-            </a:r>
-          </a:p>
-        </p:txBody>
-      </p:sp>
-      <p:sp>
-        <p:nvSpPr>
-          <p:cNvPr id="23" name="Rounded Rectangle 22"/>
+              <a:t>8 → 0.90초</a:t>
+            </a:r>
+          </a:p>
+        </p:txBody>
+      </p:sp>
+      <p:sp>
+        <p:nvSpPr>
+          <p:cNvPr id="24" name="Oval 23"/>
           <p:cNvSpPr/>
           <p:nvPr/>
         </p:nvSpPr>
         <p:spPr>
           <a:xfrm>
-            <a:off x="13144500" y="2933700"/>
-            <a:ext cx="4000500" cy="3629025"/>
-          </a:xfrm>
-          <a:prstGeom prst="roundRect">
-            <a:avLst>
-              <a:gd name="adj" fmla="val 1312"/>
-            </a:avLst>
-          </a:prstGeom>
-          <a:solidFill>
-            <a:srgbClr val="EDF3FD"/>
-          </a:solidFill>
-          <a:ln w="9525">
-            <a:solidFill>
-              <a:srgbClr val="BFD3F5"/>
-            </a:solidFill>
-          </a:ln>
-          <a:effectLst/>
-        </p:spPr>
-        <p:txBody>
-          <a:bodyPr rtlCol="0" anchor="ctr" wrap="square"/>
-          <a:lstStyle/>
-          <a:p>
-            <a:pPr algn="ctr"/>
-          </a:p>
-        </p:txBody>
-      </p:sp>
-      <p:sp>
-        <p:nvSpPr>
-          <p:cNvPr id="24" name="TextBox 23"/>
-          <p:cNvSpPr txBox="1"/>
-          <p:nvPr/>
-        </p:nvSpPr>
-        <p:spPr>
-          <a:xfrm>
-            <a:off x="13487400" y="3929062"/>
-            <a:ext cx="3314700" cy="304800"/>
-          </a:xfrm>
-          <a:prstGeom prst="rect">
-            <a:avLst/>
-          </a:prstGeom>
-          <a:noFill/>
-        </p:spPr>
-        <p:txBody>
-          <a:bodyPr wrap="square" lIns="0" rIns="0" tIns="0" bIns="0" anchor="t">
-            <a:spAutoFit/>
-          </a:bodyPr>
-          <a:lstStyle/>
-          <a:p>
-            <a:pPr algn="l">
-              <a:lnSpc>
-                <a:spcPct val="100000"/>
-              </a:lnSpc>
-            </a:pPr>
-            <a:r>
-              <a:rPr sz="1800" b="1" spc="190">
-                <a:solidFill>
-                  <a:srgbClr val="1E5BC6"/>
-                </a:solidFill>
-                <a:latin typeface="Pretendard"/>
-                <a:ea typeface="Pretendard"/>
-                <a:cs typeface="Pretendard"/>
-              </a:rPr>
-              <a:t>Max ÷ Median 이</a:t>
-            </a:r>
-          </a:p>
-        </p:txBody>
-      </p:sp>
-      <p:sp>
-        <p:nvSpPr>
-          <p:cNvPr id="25" name="TextBox 24"/>
-          <p:cNvSpPr txBox="1"/>
-          <p:nvPr/>
-        </p:nvSpPr>
-        <p:spPr>
-          <a:xfrm>
-            <a:off x="13487400" y="4329112"/>
-            <a:ext cx="3314700" cy="1238250"/>
-          </a:xfrm>
-          <a:prstGeom prst="rect">
-            <a:avLst/>
-          </a:prstGeom>
-          <a:noFill/>
-        </p:spPr>
-        <p:txBody>
-          <a:bodyPr wrap="square" lIns="0" rIns="0" tIns="0" bIns="0" anchor="t">
-            <a:spAutoFit/>
-          </a:bodyPr>
-          <a:lstStyle/>
-          <a:p>
-            <a:pPr algn="l">
-              <a:lnSpc>
-                <a:spcPct val="138000"/>
-              </a:lnSpc>
-            </a:pPr>
-            <a:r>
-              <a:rPr sz="2700" b="1">
-                <a:solidFill>
-                  <a:srgbClr val="0D2B5E"/>
-                </a:solidFill>
-                <a:latin typeface="Pretendard"/>
-                <a:ea typeface="Pretendard"/>
-                <a:cs typeface="Pretendard"/>
-              </a:rPr>
-              <a:t>5배 넘으면</a:t>
-            </a:r>
-          </a:p>
-          <a:p>
-            <a:pPr algn="l">
-              <a:lnSpc>
-                <a:spcPct val="138000"/>
-              </a:lnSpc>
-            </a:pPr>
-            <a:r>
-              <a:rPr sz="2700" b="1">
-                <a:solidFill>
-                  <a:srgbClr val="0D2B5E"/>
-                </a:solidFill>
-                <a:latin typeface="Pretendard"/>
-                <a:ea typeface="Pretendard"/>
-                <a:cs typeface="Pretendard"/>
-              </a:rPr>
-              <a:t>스큐 의심</a:t>
-            </a:r>
-          </a:p>
-        </p:txBody>
-      </p:sp>
-      <p:sp>
-        <p:nvSpPr>
-          <p:cNvPr id="26" name="Rectangle 25"/>
-          <p:cNvSpPr/>
-          <p:nvPr/>
-        </p:nvSpPr>
-        <p:spPr>
-          <a:xfrm>
-            <a:off x="1143000" y="7581900"/>
-            <a:ext cx="38100" cy="323850"/>
-          </a:xfrm>
-          <a:prstGeom prst="rect">
-            <a:avLst/>
-          </a:prstGeom>
-          <a:solidFill>
-            <a:srgbClr val="BFD3F5"/>
+            <a:off x="10077450" y="6037898"/>
+            <a:ext cx="97155" cy="97155"/>
+          </a:xfrm>
+          <a:prstGeom prst="ellipse">
+            <a:avLst/>
+          </a:prstGeom>
+          <a:solidFill>
+            <a:srgbClr val="1E5BC6"/>
           </a:solidFill>
           <a:ln>
             <a:noFill/>
@@ -10716,14 +12492,85 @@
       </p:sp>
       <p:sp>
         <p:nvSpPr>
+          <p:cNvPr id="25" name="TextBox 24"/>
+          <p:cNvSpPr txBox="1"/>
+          <p:nvPr/>
+        </p:nvSpPr>
+        <p:spPr>
+          <a:xfrm>
+            <a:off x="10263188" y="5859780"/>
+            <a:ext cx="6634162" cy="453390"/>
+          </a:xfrm>
+          <a:prstGeom prst="rect">
+            <a:avLst/>
+          </a:prstGeom>
+          <a:noFill/>
+        </p:spPr>
+        <p:txBody>
+          <a:bodyPr wrap="square" lIns="0" rIns="0" tIns="0" bIns="0" anchor="ctr">
+            <a:spAutoFit/>
+          </a:bodyPr>
+          <a:lstStyle/>
+          <a:p>
+            <a:pPr algn="l">
+              <a:lnSpc>
+                <a:spcPct val="120000"/>
+              </a:lnSpc>
+            </a:pPr>
+            <a:r>
+              <a:rPr sz="1575" b="0">
+                <a:solidFill>
+                  <a:srgbClr val="3D3D3D"/>
+                </a:solidFill>
+                <a:latin typeface="Pretendard"/>
+                <a:ea typeface="Pretendard"/>
+                <a:cs typeface="Pretendard"/>
+              </a:rPr>
+              <a:t>Stages 탭에서 Task 200개 확인</a:t>
+            </a:r>
+          </a:p>
+        </p:txBody>
+      </p:sp>
+      <p:sp>
+        <p:nvSpPr>
+          <p:cNvPr id="26" name="Oval 25"/>
+          <p:cNvSpPr/>
+          <p:nvPr/>
+        </p:nvSpPr>
+        <p:spPr>
+          <a:xfrm>
+            <a:off x="8686800" y="3771900"/>
+            <a:ext cx="914400" cy="914400"/>
+          </a:xfrm>
+          <a:prstGeom prst="ellipse">
+            <a:avLst/>
+          </a:prstGeom>
+          <a:solidFill>
+            <a:srgbClr val="0D2B5E"/>
+          </a:solidFill>
+          <a:ln>
+            <a:noFill/>
+          </a:ln>
+          <a:effectLst/>
+        </p:spPr>
+        <p:txBody>
+          <a:bodyPr rtlCol="0" anchor="ctr" wrap="square"/>
+          <a:lstStyle/>
+          <a:p>
+            <a:pPr algn="ctr"/>
+          </a:p>
+        </p:txBody>
+      </p:sp>
+      <p:sp>
+        <p:nvSpPr>
           <p:cNvPr id="27" name="TextBox 26"/>
           <p:cNvSpPr txBox="1"/>
           <p:nvPr/>
         </p:nvSpPr>
         <p:spPr>
           <a:xfrm>
-            <a:off x="1314450" y="7581900"/>
-            <a:ext cx="15830550" cy="342900"/>
+            <a:off x="8686800" y="4057650"/>
+            <a:ext cx="914400" cy="381000"/>
           </a:xfrm>
           <a:prstGeom prst="rect">
             <a:avLst/>
@@ -10736,21 +12583,21 @@
           </a:bodyPr>
           <a:lstStyle/>
           <a:p>
-            <a:pPr algn="l">
+            <a:pPr algn="ctr">
               <a:lnSpc>
                 <a:spcPct val="100000"/>
               </a:lnSpc>
             </a:pPr>
             <a:r>
-              <a:rPr sz="1725" b="1">
-                <a:solidFill>
-                  <a:srgbClr val="7D7D7D"/>
-                </a:solidFill>
-                <a:latin typeface="Pretendard"/>
-                <a:ea typeface="Pretendard"/>
-                <a:cs typeface="Pretendard"/>
-              </a:rPr>
-              <a:t>해결책은 키에 랜덤 접미사를 붙여 흩뿌리는 솔팅(salting) — 이번 과정 범위 밖, 개념만</a:t>
+              <a:rPr sz="2250" b="1">
+                <a:solidFill>
+                  <a:srgbClr val="FFFFFF"/>
+                </a:solidFill>
+                <a:latin typeface="Pretendard"/>
+                <a:ea typeface="Pretendard"/>
+                <a:cs typeface="Pretendard"/>
+              </a:rPr>
+              <a:t>VS</a:t>
             </a:r>
           </a:p>
         </p:txBody>
@@ -11011,7 +12858,7 @@
                 <a:ea typeface="Pretendard"/>
                 <a:cs typeface="Pretendard"/>
               </a:rPr>
-              <a:t>6단계</a:t>
+              <a:t>5단계 — 일부러 느리게 만들기</a:t>
             </a:r>
           </a:p>
         </p:txBody>
@@ -11052,7 +12899,7 @@
                 <a:ea typeface="Pretendard"/>
                 <a:cs typeface="Pretendard"/>
               </a:rPr>
-              <a:t>저장 파일 수를 coalesce 로 조절</a:t>
+              <a:t>스큐 — 90% 가 키 0 에 몰리면</a:t>
             </a:r>
           </a:p>
         </p:txBody>
@@ -11089,88 +12936,19 @@
       </p:sp>
       <p:sp>
         <p:nvSpPr>
-          <p:cNvPr id="8" name="Rectangle 7"/>
+          <p:cNvPr id="8" name="Rounded Rectangle 7"/>
           <p:cNvSpPr/>
           <p:nvPr/>
         </p:nvSpPr>
         <p:spPr>
           <a:xfrm>
-            <a:off x="1143000" y="2781300"/>
-            <a:ext cx="1580948" cy="571500"/>
-          </a:xfrm>
-          <a:prstGeom prst="rect">
-            <a:avLst/>
-          </a:prstGeom>
-          <a:solidFill>
-            <a:srgbClr val="0D2B5E"/>
-          </a:solidFill>
-          <a:ln>
-            <a:noFill/>
-          </a:ln>
-          <a:effectLst/>
-        </p:spPr>
-        <p:txBody>
-          <a:bodyPr rtlCol="0" anchor="ctr" wrap="square"/>
-          <a:lstStyle/>
-          <a:p>
-            <a:pPr algn="ctr"/>
-          </a:p>
-        </p:txBody>
-      </p:sp>
-      <p:sp>
-        <p:nvSpPr>
-          <p:cNvPr id="9" name="TextBox 8"/>
-          <p:cNvSpPr txBox="1"/>
-          <p:nvPr/>
-        </p:nvSpPr>
-        <p:spPr>
-          <a:xfrm>
-            <a:off x="1143000" y="2781300"/>
-            <a:ext cx="1580948" cy="571500"/>
-          </a:xfrm>
-          <a:prstGeom prst="rect">
-            <a:avLst/>
-          </a:prstGeom>
-          <a:noFill/>
-        </p:spPr>
-        <p:txBody>
-          <a:bodyPr wrap="square" lIns="0" rIns="0" tIns="0" bIns="0" anchor="ctr">
-            <a:spAutoFit/>
-          </a:bodyPr>
-          <a:lstStyle/>
-          <a:p>
-            <a:pPr algn="ctr">
-              <a:lnSpc>
-                <a:spcPct val="100000"/>
-              </a:lnSpc>
-            </a:pPr>
-            <a:r>
-              <a:rPr sz="1800" b="1">
-                <a:solidFill>
-                  <a:srgbClr val="FFFFFF"/>
-                </a:solidFill>
-                <a:latin typeface="Pretendard"/>
-                <a:ea typeface="Pretendard"/>
-                <a:cs typeface="Pretendard"/>
-              </a:rPr>
-              <a:t>집계</a:t>
-            </a:r>
-          </a:p>
-        </p:txBody>
-      </p:sp>
-      <p:sp>
-        <p:nvSpPr>
-          <p:cNvPr id="10" name="Rectangle 9"/>
-          <p:cNvSpPr/>
-          <p:nvPr/>
-        </p:nvSpPr>
-        <p:spPr>
-          <a:xfrm>
-            <a:off x="2723948" y="2781300"/>
-            <a:ext cx="14421052" cy="571500"/>
-          </a:xfrm>
-          <a:prstGeom prst="rect">
-            <a:avLst/>
+            <a:off x="1143000" y="2933700"/>
+            <a:ext cx="11430000" cy="1095375"/>
+          </a:xfrm>
+          <a:prstGeom prst="roundRect">
+            <a:avLst>
+              <a:gd name="adj" fmla="val 4347"/>
+            </a:avLst>
           </a:prstGeom>
           <a:solidFill>
             <a:srgbClr val="FAFBFD"/>
@@ -11192,57 +12970,16 @@
       </p:sp>
       <p:sp>
         <p:nvSpPr>
-          <p:cNvPr id="11" name="TextBox 10"/>
-          <p:cNvSpPr txBox="1"/>
-          <p:nvPr/>
-        </p:nvSpPr>
-        <p:spPr>
-          <a:xfrm>
-            <a:off x="2876348" y="2781300"/>
-            <a:ext cx="14116252" cy="571500"/>
-          </a:xfrm>
-          <a:prstGeom prst="rect">
-            <a:avLst/>
-          </a:prstGeom>
-          <a:noFill/>
-        </p:spPr>
-        <p:txBody>
-          <a:bodyPr wrap="square" lIns="0" rIns="0" tIns="0" bIns="0" anchor="ctr">
-            <a:spAutoFit/>
-          </a:bodyPr>
-          <a:lstStyle/>
-          <a:p>
-            <a:pPr algn="l">
-              <a:lnSpc>
-                <a:spcPct val="115000"/>
-              </a:lnSpc>
-            </a:pPr>
-            <a:r>
-              <a:rPr sz="1800" b="0">
-                <a:solidFill>
-                  <a:srgbClr val="3D3D3D"/>
-                </a:solidFill>
-                <a:latin typeface="Pretendard"/>
-                <a:ea typeface="Pretendard"/>
-                <a:cs typeface="Pretendard"/>
-              </a:rPr>
-              <a:t>agg = df.withColumn("b", F.col("id") % 10).groupBy("b").count()</a:t>
-            </a:r>
-          </a:p>
-        </p:txBody>
-      </p:sp>
-      <p:sp>
-        <p:nvSpPr>
-          <p:cNvPr id="12" name="Rectangle 11"/>
+          <p:cNvPr id="9" name="Oval 8"/>
           <p:cNvSpPr/>
           <p:nvPr/>
         </p:nvSpPr>
         <p:spPr>
           <a:xfrm>
-            <a:off x="1143000" y="3429000"/>
-            <a:ext cx="1580948" cy="571500"/>
-          </a:xfrm>
-          <a:prstGeom prst="rect">
+            <a:off x="1447800" y="3181350"/>
+            <a:ext cx="590550" cy="590550"/>
+          </a:xfrm>
+          <a:prstGeom prst="ellipse">
             <a:avLst/>
           </a:prstGeom>
           <a:solidFill>
@@ -11263,22 +13000,22 @@
       </p:sp>
       <p:sp>
         <p:nvSpPr>
-          <p:cNvPr id="13" name="TextBox 12"/>
-          <p:cNvSpPr txBox="1"/>
-          <p:nvPr/>
-        </p:nvSpPr>
-        <p:spPr>
-          <a:xfrm>
-            <a:off x="1143000" y="3429000"/>
-            <a:ext cx="1580948" cy="571500"/>
-          </a:xfrm>
-          <a:prstGeom prst="rect">
-            <a:avLst/>
-          </a:prstGeom>
-          <a:noFill/>
-        </p:spPr>
-        <p:txBody>
-          <a:bodyPr wrap="square" lIns="0" rIns="0" tIns="0" bIns="0" anchor="ctr">
+          <p:cNvPr id="10" name="TextBox 9"/>
+          <p:cNvSpPr txBox="1"/>
+          <p:nvPr/>
+        </p:nvSpPr>
+        <p:spPr>
+          <a:xfrm>
+            <a:off x="1447800" y="3333750"/>
+            <a:ext cx="590550" cy="323850"/>
+          </a:xfrm>
+          <a:prstGeom prst="rect">
+            <a:avLst/>
+          </a:prstGeom>
+          <a:noFill/>
+        </p:spPr>
+        <p:txBody>
+          <a:bodyPr wrap="square" lIns="0" rIns="0" tIns="0" bIns="0" anchor="t">
             <a:spAutoFit/>
           </a:bodyPr>
           <a:lstStyle/>
@@ -11289,7 +13026,7 @@
               </a:lnSpc>
             </a:pPr>
             <a:r>
-              <a:rPr sz="1800" b="1">
+              <a:rPr sz="2250" b="1">
                 <a:solidFill>
                   <a:srgbClr val="FFFFFF"/>
                 </a:solidFill>
@@ -11297,24 +13034,108 @@
                 <a:ea typeface="Pretendard"/>
                 <a:cs typeface="Pretendard"/>
               </a:rPr>
-              <a:t>그냥 저장</a:t>
-            </a:r>
-          </a:p>
-        </p:txBody>
-      </p:sp>
-      <p:sp>
-        <p:nvSpPr>
-          <p:cNvPr id="14" name="Rectangle 13"/>
+              <a:t>1</a:t>
+            </a:r>
+          </a:p>
+        </p:txBody>
+      </p:sp>
+      <p:sp>
+        <p:nvSpPr>
+          <p:cNvPr id="11" name="TextBox 10"/>
+          <p:cNvSpPr txBox="1"/>
+          <p:nvPr/>
+        </p:nvSpPr>
+        <p:spPr>
+          <a:xfrm>
+            <a:off x="2324100" y="3143250"/>
+            <a:ext cx="9906000" cy="400050"/>
+          </a:xfrm>
+          <a:prstGeom prst="rect">
+            <a:avLst/>
+          </a:prstGeom>
+          <a:noFill/>
+        </p:spPr>
+        <p:txBody>
+          <a:bodyPr wrap="square" lIns="0" rIns="0" tIns="0" bIns="0" anchor="t">
+            <a:spAutoFit/>
+          </a:bodyPr>
+          <a:lstStyle/>
+          <a:p>
+            <a:pPr algn="l">
+              <a:lnSpc>
+                <a:spcPct val="110000"/>
+              </a:lnSpc>
+            </a:pPr>
+            <a:r>
+              <a:rPr sz="2475" b="1">
+                <a:solidFill>
+                  <a:srgbClr val="0D2B5E"/>
+                </a:solidFill>
+                <a:latin typeface="Pretendard"/>
+                <a:ea typeface="Pretendard"/>
+                <a:cs typeface="Pretendard"/>
+              </a:rPr>
+              <a:t>repartition(4, "k") 분포</a:t>
+            </a:r>
+          </a:p>
+        </p:txBody>
+      </p:sp>
+      <p:sp>
+        <p:nvSpPr>
+          <p:cNvPr id="12" name="TextBox 11"/>
+          <p:cNvSpPr txBox="1"/>
+          <p:nvPr/>
+        </p:nvSpPr>
+        <p:spPr>
+          <a:xfrm>
+            <a:off x="2324100" y="3543300"/>
+            <a:ext cx="9906000" cy="361950"/>
+          </a:xfrm>
+          <a:prstGeom prst="rect">
+            <a:avLst/>
+          </a:prstGeom>
+          <a:noFill/>
+        </p:spPr>
+        <p:txBody>
+          <a:bodyPr wrap="square" lIns="0" rIns="0" tIns="0" bIns="0" anchor="t">
+            <a:spAutoFit/>
+          </a:bodyPr>
+          <a:lstStyle/>
+          <a:p>
+            <a:pPr algn="l">
+              <a:lnSpc>
+                <a:spcPct val="120000"/>
+              </a:lnSpc>
+            </a:pPr>
+            <a:r>
+              <a:rPr sz="2025" b="0">
+                <a:solidFill>
+                  <a:srgbClr val="3D3D3D"/>
+                </a:solidFill>
+                <a:latin typeface="Pretendard"/>
+                <a:ea typeface="Pretendard"/>
+                <a:cs typeface="Pretendard"/>
+              </a:rPr>
+              <a:t>스큐 [10000000] · 고른 분포 [2800000, 2400000 × 3]</a:t>
+            </a:r>
+          </a:p>
+        </p:txBody>
+      </p:sp>
+      <p:sp>
+        <p:nvSpPr>
+          <p:cNvPr id="13" name="Rounded Rectangle 12"/>
           <p:cNvSpPr/>
           <p:nvPr/>
         </p:nvSpPr>
         <p:spPr>
           <a:xfrm>
-            <a:off x="2723948" y="3429000"/>
-            <a:ext cx="14421052" cy="571500"/>
-          </a:xfrm>
-          <a:prstGeom prst="rect">
-            <a:avLst/>
+            <a:off x="1143000" y="4200525"/>
+            <a:ext cx="11430000" cy="1095375"/>
+          </a:xfrm>
+          <a:prstGeom prst="roundRect">
+            <a:avLst>
+              <a:gd name="adj" fmla="val 4347"/>
+            </a:avLst>
           </a:prstGeom>
           <a:solidFill>
             <a:srgbClr val="FAFBFD"/>
@@ -11336,57 +13157,16 @@
       </p:sp>
       <p:sp>
         <p:nvSpPr>
-          <p:cNvPr id="15" name="TextBox 14"/>
-          <p:cNvSpPr txBox="1"/>
-          <p:nvPr/>
-        </p:nvSpPr>
-        <p:spPr>
-          <a:xfrm>
-            <a:off x="2876348" y="3429000"/>
-            <a:ext cx="14116252" cy="571500"/>
-          </a:xfrm>
-          <a:prstGeom prst="rect">
-            <a:avLst/>
-          </a:prstGeom>
-          <a:noFill/>
-        </p:spPr>
-        <p:txBody>
-          <a:bodyPr wrap="square" lIns="0" rIns="0" tIns="0" bIns="0" anchor="ctr">
-            <a:spAutoFit/>
-          </a:bodyPr>
-          <a:lstStyle/>
-          <a:p>
-            <a:pPr algn="l">
-              <a:lnSpc>
-                <a:spcPct val="115000"/>
-              </a:lnSpc>
-            </a:pPr>
-            <a:r>
-              <a:rPr sz="1800" b="0">
-                <a:solidFill>
-                  <a:srgbClr val="3D3D3D"/>
-                </a:solidFill>
-                <a:latin typeface="Pretendard"/>
-                <a:ea typeface="Pretendard"/>
-                <a:cs typeface="Pretendard"/>
-              </a:rPr>
-              <a:t>agg.write.mode("overwrite").parquet("s3a://warehouse/test-many/")</a:t>
-            </a:r>
-          </a:p>
-        </p:txBody>
-      </p:sp>
-      <p:sp>
-        <p:nvSpPr>
-          <p:cNvPr id="16" name="Rectangle 15"/>
+          <p:cNvPr id="14" name="Oval 13"/>
           <p:cNvSpPr/>
           <p:nvPr/>
         </p:nvSpPr>
         <p:spPr>
           <a:xfrm>
-            <a:off x="1143000" y="4076700"/>
-            <a:ext cx="1580948" cy="571500"/>
-          </a:xfrm>
-          <a:prstGeom prst="rect">
+            <a:off x="1447800" y="4448175"/>
+            <a:ext cx="590550" cy="590550"/>
+          </a:xfrm>
+          <a:prstGeom prst="ellipse">
             <a:avLst/>
           </a:prstGeom>
           <a:solidFill>
@@ -11407,58 +13187,142 @@
       </p:sp>
       <p:sp>
         <p:nvSpPr>
+          <p:cNvPr id="15" name="TextBox 14"/>
+          <p:cNvSpPr txBox="1"/>
+          <p:nvPr/>
+        </p:nvSpPr>
+        <p:spPr>
+          <a:xfrm>
+            <a:off x="1447800" y="4600575"/>
+            <a:ext cx="590550" cy="323850"/>
+          </a:xfrm>
+          <a:prstGeom prst="rect">
+            <a:avLst/>
+          </a:prstGeom>
+          <a:noFill/>
+        </p:spPr>
+        <p:txBody>
+          <a:bodyPr wrap="square" lIns="0" rIns="0" tIns="0" bIns="0" anchor="t">
+            <a:spAutoFit/>
+          </a:bodyPr>
+          <a:lstStyle/>
+          <a:p>
+            <a:pPr algn="ctr">
+              <a:lnSpc>
+                <a:spcPct val="100000"/>
+              </a:lnSpc>
+            </a:pPr>
+            <a:r>
+              <a:rPr sz="2250" b="1">
+                <a:solidFill>
+                  <a:srgbClr val="FFFFFF"/>
+                </a:solidFill>
+                <a:latin typeface="Pretendard"/>
+                <a:ea typeface="Pretendard"/>
+                <a:cs typeface="Pretendard"/>
+              </a:rPr>
+              <a:t>2</a:t>
+            </a:r>
+          </a:p>
+        </p:txBody>
+      </p:sp>
+      <p:sp>
+        <p:nvSpPr>
+          <p:cNvPr id="16" name="TextBox 15"/>
+          <p:cNvSpPr txBox="1"/>
+          <p:nvPr/>
+        </p:nvSpPr>
+        <p:spPr>
+          <a:xfrm>
+            <a:off x="2324100" y="4410075"/>
+            <a:ext cx="9906000" cy="400050"/>
+          </a:xfrm>
+          <a:prstGeom prst="rect">
+            <a:avLst/>
+          </a:prstGeom>
+          <a:noFill/>
+        </p:spPr>
+        <p:txBody>
+          <a:bodyPr wrap="square" lIns="0" rIns="0" tIns="0" bIns="0" anchor="t">
+            <a:spAutoFit/>
+          </a:bodyPr>
+          <a:lstStyle/>
+          <a:p>
+            <a:pPr algn="l">
+              <a:lnSpc>
+                <a:spcPct val="110000"/>
+              </a:lnSpc>
+            </a:pPr>
+            <a:r>
+              <a:rPr sz="2475" b="1">
+                <a:solidFill>
+                  <a:srgbClr val="0D2B5E"/>
+                </a:solidFill>
+                <a:latin typeface="Pretendard"/>
+                <a:ea typeface="Pretendard"/>
+                <a:cs typeface="Pretendard"/>
+              </a:rPr>
+              <a:t>sha2 를 시킨 뒤 count() 시간</a:t>
+            </a:r>
+          </a:p>
+        </p:txBody>
+      </p:sp>
+      <p:sp>
+        <p:nvSpPr>
           <p:cNvPr id="17" name="TextBox 16"/>
           <p:cNvSpPr txBox="1"/>
           <p:nvPr/>
         </p:nvSpPr>
         <p:spPr>
           <a:xfrm>
-            <a:off x="1143000" y="4076700"/>
-            <a:ext cx="1580948" cy="571500"/>
-          </a:xfrm>
-          <a:prstGeom prst="rect">
-            <a:avLst/>
-          </a:prstGeom>
-          <a:noFill/>
-        </p:spPr>
-        <p:txBody>
-          <a:bodyPr wrap="square" lIns="0" rIns="0" tIns="0" bIns="0" anchor="ctr">
-            <a:spAutoFit/>
-          </a:bodyPr>
-          <a:lstStyle/>
-          <a:p>
-            <a:pPr algn="ctr">
-              <a:lnSpc>
-                <a:spcPct val="100000"/>
-              </a:lnSpc>
-            </a:pPr>
-            <a:r>
-              <a:rPr sz="1800" b="1">
-                <a:solidFill>
-                  <a:srgbClr val="FFFFFF"/>
-                </a:solidFill>
-                <a:latin typeface="Pretendard"/>
-                <a:ea typeface="Pretendard"/>
-                <a:cs typeface="Pretendard"/>
-              </a:rPr>
-              <a:t>정리해서 저장</a:t>
-            </a:r>
-          </a:p>
-        </p:txBody>
-      </p:sp>
-      <p:sp>
-        <p:nvSpPr>
-          <p:cNvPr id="18" name="Rectangle 17"/>
+            <a:off x="2324100" y="4810125"/>
+            <a:ext cx="9906000" cy="361950"/>
+          </a:xfrm>
+          <a:prstGeom prst="rect">
+            <a:avLst/>
+          </a:prstGeom>
+          <a:noFill/>
+        </p:spPr>
+        <p:txBody>
+          <a:bodyPr wrap="square" lIns="0" rIns="0" tIns="0" bIns="0" anchor="t">
+            <a:spAutoFit/>
+          </a:bodyPr>
+          <a:lstStyle/>
+          <a:p>
+            <a:pPr algn="l">
+              <a:lnSpc>
+                <a:spcPct val="120000"/>
+              </a:lnSpc>
+            </a:pPr>
+            <a:r>
+              <a:rPr sz="2025" b="0">
+                <a:solidFill>
+                  <a:srgbClr val="3D3D3D"/>
+                </a:solidFill>
+                <a:latin typeface="Pretendard"/>
+                <a:ea typeface="Pretendard"/>
+                <a:cs typeface="Pretendard"/>
+              </a:rPr>
+              <a:t>2.20초 · 3.18초 — 실행마다 들쭉날쭉, 그래서 UI 를 본다</a:t>
+            </a:r>
+          </a:p>
+        </p:txBody>
+      </p:sp>
+      <p:sp>
+        <p:nvSpPr>
+          <p:cNvPr id="18" name="Rounded Rectangle 17"/>
           <p:cNvSpPr/>
           <p:nvPr/>
         </p:nvSpPr>
         <p:spPr>
           <a:xfrm>
-            <a:off x="2723948" y="4076700"/>
-            <a:ext cx="14421052" cy="571500"/>
-          </a:xfrm>
-          <a:prstGeom prst="rect">
-            <a:avLst/>
+            <a:off x="1143000" y="5467350"/>
+            <a:ext cx="11430000" cy="1095375"/>
+          </a:xfrm>
+          <a:prstGeom prst="roundRect">
+            <a:avLst>
+              <a:gd name="adj" fmla="val 4347"/>
+            </a:avLst>
           </a:prstGeom>
           <a:solidFill>
             <a:srgbClr val="FAFBFD"/>
@@ -11480,57 +13344,16 @@
       </p:sp>
       <p:sp>
         <p:nvSpPr>
-          <p:cNvPr id="19" name="TextBox 18"/>
-          <p:cNvSpPr txBox="1"/>
-          <p:nvPr/>
-        </p:nvSpPr>
-        <p:spPr>
-          <a:xfrm>
-            <a:off x="2876348" y="4076700"/>
-            <a:ext cx="14116252" cy="571500"/>
-          </a:xfrm>
-          <a:prstGeom prst="rect">
-            <a:avLst/>
-          </a:prstGeom>
-          <a:noFill/>
-        </p:spPr>
-        <p:txBody>
-          <a:bodyPr wrap="square" lIns="0" rIns="0" tIns="0" bIns="0" anchor="ctr">
-            <a:spAutoFit/>
-          </a:bodyPr>
-          <a:lstStyle/>
-          <a:p>
-            <a:pPr algn="l">
-              <a:lnSpc>
-                <a:spcPct val="115000"/>
-              </a:lnSpc>
-            </a:pPr>
-            <a:r>
-              <a:rPr sz="1800" b="0">
-                <a:solidFill>
-                  <a:srgbClr val="3D3D3D"/>
-                </a:solidFill>
-                <a:latin typeface="Pretendard"/>
-                <a:ea typeface="Pretendard"/>
-                <a:cs typeface="Pretendard"/>
-              </a:rPr>
-              <a:t>agg.coalesce(1).write.mode("overwrite").parquet("…/test-one/")</a:t>
-            </a:r>
-          </a:p>
-        </p:txBody>
-      </p:sp>
-      <p:sp>
-        <p:nvSpPr>
-          <p:cNvPr id="20" name="Rectangle 19"/>
+          <p:cNvPr id="19" name="Oval 18"/>
           <p:cNvSpPr/>
           <p:nvPr/>
         </p:nvSpPr>
         <p:spPr>
           <a:xfrm>
-            <a:off x="1143000" y="4724400"/>
-            <a:ext cx="1580948" cy="571500"/>
-          </a:xfrm>
-          <a:prstGeom prst="rect">
+            <a:off x="1447800" y="5715000"/>
+            <a:ext cx="590550" cy="590550"/>
+          </a:xfrm>
+          <a:prstGeom prst="ellipse">
             <a:avLst/>
           </a:prstGeom>
           <a:solidFill>
@@ -11551,65 +13374,149 @@
       </p:sp>
       <p:sp>
         <p:nvSpPr>
+          <p:cNvPr id="20" name="TextBox 19"/>
+          <p:cNvSpPr txBox="1"/>
+          <p:nvPr/>
+        </p:nvSpPr>
+        <p:spPr>
+          <a:xfrm>
+            <a:off x="1447800" y="5867400"/>
+            <a:ext cx="590550" cy="323850"/>
+          </a:xfrm>
+          <a:prstGeom prst="rect">
+            <a:avLst/>
+          </a:prstGeom>
+          <a:noFill/>
+        </p:spPr>
+        <p:txBody>
+          <a:bodyPr wrap="square" lIns="0" rIns="0" tIns="0" bIns="0" anchor="t">
+            <a:spAutoFit/>
+          </a:bodyPr>
+          <a:lstStyle/>
+          <a:p>
+            <a:pPr algn="ctr">
+              <a:lnSpc>
+                <a:spcPct val="100000"/>
+              </a:lnSpc>
+            </a:pPr>
+            <a:r>
+              <a:rPr sz="2250" b="1">
+                <a:solidFill>
+                  <a:srgbClr val="FFFFFF"/>
+                </a:solidFill>
+                <a:latin typeface="Pretendard"/>
+                <a:ea typeface="Pretendard"/>
+                <a:cs typeface="Pretendard"/>
+              </a:rPr>
+              <a:t>3</a:t>
+            </a:r>
+          </a:p>
+        </p:txBody>
+      </p:sp>
+      <p:sp>
+        <p:nvSpPr>
           <p:cNvPr id="21" name="TextBox 20"/>
           <p:cNvSpPr txBox="1"/>
           <p:nvPr/>
         </p:nvSpPr>
         <p:spPr>
           <a:xfrm>
-            <a:off x="1143000" y="4724400"/>
-            <a:ext cx="1580948" cy="571500"/>
-          </a:xfrm>
-          <a:prstGeom prst="rect">
-            <a:avLst/>
-          </a:prstGeom>
-          <a:noFill/>
-        </p:spPr>
-        <p:txBody>
-          <a:bodyPr wrap="square" lIns="0" rIns="0" tIns="0" bIns="0" anchor="ctr">
-            <a:spAutoFit/>
-          </a:bodyPr>
-          <a:lstStyle/>
-          <a:p>
-            <a:pPr algn="ctr">
-              <a:lnSpc>
-                <a:spcPct val="100000"/>
-              </a:lnSpc>
-            </a:pPr>
-            <a:r>
-              <a:rPr sz="1800" b="1">
-                <a:solidFill>
-                  <a:srgbClr val="FFFFFF"/>
-                </a:solidFill>
-                <a:latin typeface="Pretendard"/>
-                <a:ea typeface="Pretendard"/>
-                <a:cs typeface="Pretendard"/>
-              </a:rPr>
-              <a:t>파일 세기</a:t>
-            </a:r>
-          </a:p>
-        </p:txBody>
-      </p:sp>
-      <p:sp>
-        <p:nvSpPr>
-          <p:cNvPr id="22" name="Rectangle 21"/>
+            <a:off x="2324100" y="5676900"/>
+            <a:ext cx="9906000" cy="400050"/>
+          </a:xfrm>
+          <a:prstGeom prst="rect">
+            <a:avLst/>
+          </a:prstGeom>
+          <a:noFill/>
+        </p:spPr>
+        <p:txBody>
+          <a:bodyPr wrap="square" lIns="0" rIns="0" tIns="0" bIns="0" anchor="t">
+            <a:spAutoFit/>
+          </a:bodyPr>
+          <a:lstStyle/>
+          <a:p>
+            <a:pPr algn="l">
+              <a:lnSpc>
+                <a:spcPct val="110000"/>
+              </a:lnSpc>
+            </a:pPr>
+            <a:r>
+              <a:rPr sz="2475" b="1">
+                <a:solidFill>
+                  <a:srgbClr val="0D2B5E"/>
+                </a:solidFill>
+                <a:latin typeface="Pretendard"/>
+                <a:ea typeface="Pretendard"/>
+                <a:cs typeface="Pretendard"/>
+              </a:rPr>
+              <a:t>Stages → Summary Metrics Duration</a:t>
+            </a:r>
+          </a:p>
+        </p:txBody>
+      </p:sp>
+      <p:sp>
+        <p:nvSpPr>
+          <p:cNvPr id="22" name="TextBox 21"/>
+          <p:cNvSpPr txBox="1"/>
+          <p:nvPr/>
+        </p:nvSpPr>
+        <p:spPr>
+          <a:xfrm>
+            <a:off x="2324100" y="6076950"/>
+            <a:ext cx="9906000" cy="361950"/>
+          </a:xfrm>
+          <a:prstGeom prst="rect">
+            <a:avLst/>
+          </a:prstGeom>
+          <a:noFill/>
+        </p:spPr>
+        <p:txBody>
+          <a:bodyPr wrap="square" lIns="0" rIns="0" tIns="0" bIns="0" anchor="t">
+            <a:spAutoFit/>
+          </a:bodyPr>
+          <a:lstStyle/>
+          <a:p>
+            <a:pPr algn="l">
+              <a:lnSpc>
+                <a:spcPct val="120000"/>
+              </a:lnSpc>
+            </a:pPr>
+            <a:r>
+              <a:rPr sz="2025" b="0">
+                <a:solidFill>
+                  <a:srgbClr val="3D3D3D"/>
+                </a:solidFill>
+                <a:latin typeface="Pretendard"/>
+                <a:ea typeface="Pretendard"/>
+                <a:cs typeface="Pretendard"/>
+              </a:rPr>
+              <a:t>스큐 Max 1.1~1.8초 · Median 0.01~0.06초, 고른 쪽 0.58 · 0.55초</a:t>
+            </a:r>
+          </a:p>
+        </p:txBody>
+      </p:sp>
+      <p:sp>
+        <p:nvSpPr>
+          <p:cNvPr id="23" name="Rounded Rectangle 22"/>
           <p:cNvSpPr/>
           <p:nvPr/>
         </p:nvSpPr>
         <p:spPr>
           <a:xfrm>
-            <a:off x="2723948" y="4724400"/>
-            <a:ext cx="14421052" cy="571500"/>
-          </a:xfrm>
-          <a:prstGeom prst="rect">
-            <a:avLst/>
-          </a:prstGeom>
-          <a:solidFill>
-            <a:srgbClr val="FAFBFD"/>
+            <a:off x="13144500" y="2933700"/>
+            <a:ext cx="4000500" cy="3629025"/>
+          </a:xfrm>
+          <a:prstGeom prst="roundRect">
+            <a:avLst>
+              <a:gd name="adj" fmla="val 1312"/>
+            </a:avLst>
+          </a:prstGeom>
+          <a:solidFill>
+            <a:srgbClr val="EDF3FD"/>
           </a:solidFill>
           <a:ln w="9525">
             <a:solidFill>
-              <a:srgbClr val="DCE1E8"/>
+              <a:srgbClr val="BFD3F5"/>
             </a:solidFill>
           </a:ln>
           <a:effectLst/>
@@ -11624,61 +13531,120 @@
       </p:sp>
       <p:sp>
         <p:nvSpPr>
-          <p:cNvPr id="23" name="TextBox 22"/>
-          <p:cNvSpPr txBox="1"/>
-          <p:nvPr/>
-        </p:nvSpPr>
-        <p:spPr>
-          <a:xfrm>
-            <a:off x="2876348" y="4724400"/>
-            <a:ext cx="14116252" cy="571500"/>
-          </a:xfrm>
-          <a:prstGeom prst="rect">
-            <a:avLst/>
-          </a:prstGeom>
-          <a:noFill/>
-        </p:spPr>
-        <p:txBody>
-          <a:bodyPr wrap="square" lIns="0" rIns="0" tIns="0" bIns="0" anchor="ctr">
+          <p:cNvPr id="24" name="TextBox 23"/>
+          <p:cNvSpPr txBox="1"/>
+          <p:nvPr/>
+        </p:nvSpPr>
+        <p:spPr>
+          <a:xfrm>
+            <a:off x="13487400" y="3929062"/>
+            <a:ext cx="3314700" cy="304800"/>
+          </a:xfrm>
+          <a:prstGeom prst="rect">
+            <a:avLst/>
+          </a:prstGeom>
+          <a:noFill/>
+        </p:spPr>
+        <p:txBody>
+          <a:bodyPr wrap="square" lIns="0" rIns="0" tIns="0" bIns="0" anchor="t">
             <a:spAutoFit/>
           </a:bodyPr>
           <a:lstStyle/>
           <a:p>
             <a:pPr algn="l">
               <a:lnSpc>
-                <a:spcPct val="115000"/>
-              </a:lnSpc>
-            </a:pPr>
-            <a:r>
-              <a:rPr sz="1800" b="0">
-                <a:solidFill>
-                  <a:srgbClr val="3D3D3D"/>
-                </a:solidFill>
-                <a:latin typeface="Pretendard"/>
-                <a:ea typeface="Pretendard"/>
-                <a:cs typeface="Pretendard"/>
-              </a:rPr>
-              <a:t>docker run --rm --network week5_default --entrypoint sh pgsty/mc -c …</a:t>
-            </a:r>
-          </a:p>
-        </p:txBody>
-      </p:sp>
-      <p:sp>
-        <p:nvSpPr>
-          <p:cNvPr id="24" name="Rectangle 23"/>
+                <a:spcPct val="100000"/>
+              </a:lnSpc>
+            </a:pPr>
+            <a:r>
+              <a:rPr sz="1800" b="1" spc="190">
+                <a:solidFill>
+                  <a:srgbClr val="1E5BC6"/>
+                </a:solidFill>
+                <a:latin typeface="Pretendard"/>
+                <a:ea typeface="Pretendard"/>
+                <a:cs typeface="Pretendard"/>
+              </a:rPr>
+              <a:t>Max 가 Median 의</a:t>
+            </a:r>
+          </a:p>
+        </p:txBody>
+      </p:sp>
+      <p:sp>
+        <p:nvSpPr>
+          <p:cNvPr id="25" name="TextBox 24"/>
+          <p:cNvSpPr txBox="1"/>
+          <p:nvPr/>
+        </p:nvSpPr>
+        <p:spPr>
+          <a:xfrm>
+            <a:off x="13487400" y="4329112"/>
+            <a:ext cx="3314700" cy="1238250"/>
+          </a:xfrm>
+          <a:prstGeom prst="rect">
+            <a:avLst/>
+          </a:prstGeom>
+          <a:noFill/>
+        </p:spPr>
+        <p:txBody>
+          <a:bodyPr wrap="square" lIns="0" rIns="0" tIns="0" bIns="0" anchor="t">
+            <a:spAutoFit/>
+          </a:bodyPr>
+          <a:lstStyle/>
+          <a:p>
+            <a:pPr algn="l">
+              <a:lnSpc>
+                <a:spcPct val="138000"/>
+              </a:lnSpc>
+            </a:pPr>
+            <a:r>
+              <a:rPr sz="2700" b="1">
+                <a:solidFill>
+                  <a:srgbClr val="0D2B5E"/>
+                </a:solidFill>
+                <a:latin typeface="Pretendard"/>
+                <a:ea typeface="Pretendard"/>
+                <a:cs typeface="Pretendard"/>
+              </a:rPr>
+              <a:t>몇 배 넘으면</a:t>
+            </a:r>
+          </a:p>
+          <a:p>
+            <a:pPr algn="l">
+              <a:lnSpc>
+                <a:spcPct val="138000"/>
+              </a:lnSpc>
+            </a:pPr>
+            <a:r>
+              <a:rPr sz="2700" b="1">
+                <a:solidFill>
+                  <a:srgbClr val="0D2B5E"/>
+                </a:solidFill>
+                <a:latin typeface="Pretendard"/>
+                <a:ea typeface="Pretendard"/>
+                <a:cs typeface="Pretendard"/>
+              </a:rPr>
+              <a:t>스큐 의심</a:t>
+            </a:r>
+          </a:p>
+        </p:txBody>
+      </p:sp>
+      <p:sp>
+        <p:nvSpPr>
+          <p:cNvPr id="26" name="Rectangle 25"/>
           <p:cNvSpPr/>
           <p:nvPr/>
         </p:nvSpPr>
         <p:spPr>
           <a:xfrm>
-            <a:off x="1143000" y="5372100"/>
-            <a:ext cx="1580948" cy="571500"/>
-          </a:xfrm>
-          <a:prstGeom prst="rect">
-            <a:avLst/>
-          </a:prstGeom>
-          <a:solidFill>
-            <a:srgbClr val="0D2B5E"/>
+            <a:off x="1143000" y="7581900"/>
+            <a:ext cx="38100" cy="323850"/>
+          </a:xfrm>
+          <a:prstGeom prst="rect">
+            <a:avLst/>
+          </a:prstGeom>
+          <a:solidFill>
+            <a:srgbClr val="BFD3F5"/>
           </a:solidFill>
           <a:ln>
             <a:noFill/>
@@ -11695,147 +13661,33 @@
       </p:sp>
       <p:sp>
         <p:nvSpPr>
-          <p:cNvPr id="25" name="TextBox 24"/>
-          <p:cNvSpPr txBox="1"/>
-          <p:nvPr/>
-        </p:nvSpPr>
-        <p:spPr>
-          <a:xfrm>
-            <a:off x="1143000" y="5372100"/>
-            <a:ext cx="1580948" cy="571500"/>
-          </a:xfrm>
-          <a:prstGeom prst="rect">
-            <a:avLst/>
-          </a:prstGeom>
-          <a:noFill/>
-        </p:spPr>
-        <p:txBody>
-          <a:bodyPr wrap="square" lIns="0" rIns="0" tIns="0" bIns="0" anchor="ctr">
-            <a:spAutoFit/>
-          </a:bodyPr>
-          <a:lstStyle/>
-          <a:p>
-            <a:pPr algn="ctr">
+          <p:cNvPr id="27" name="TextBox 26"/>
+          <p:cNvSpPr txBox="1"/>
+          <p:nvPr/>
+        </p:nvSpPr>
+        <p:spPr>
+          <a:xfrm>
+            <a:off x="1314450" y="7581900"/>
+            <a:ext cx="15830550" cy="342900"/>
+          </a:xfrm>
+          <a:prstGeom prst="rect">
+            <a:avLst/>
+          </a:prstGeom>
+          <a:noFill/>
+        </p:spPr>
+        <p:txBody>
+          <a:bodyPr wrap="square" lIns="0" rIns="0" tIns="0" bIns="0" anchor="t">
+            <a:spAutoFit/>
+          </a:bodyPr>
+          <a:lstStyle/>
+          <a:p>
+            <a:pPr algn="l">
               <a:lnSpc>
                 <a:spcPct val="100000"/>
               </a:lnSpc>
             </a:pPr>
             <a:r>
-              <a:rPr sz="1800" b="1">
-                <a:solidFill>
-                  <a:srgbClr val="FFFFFF"/>
-                </a:solidFill>
-                <a:latin typeface="Pretendard"/>
-                <a:ea typeface="Pretendard"/>
-                <a:cs typeface="Pretendard"/>
-              </a:rPr>
-              <a:t>개수</a:t>
-            </a:r>
-          </a:p>
-        </p:txBody>
-      </p:sp>
-      <p:sp>
-        <p:nvSpPr>
-          <p:cNvPr id="26" name="Rectangle 25"/>
-          <p:cNvSpPr/>
-          <p:nvPr/>
-        </p:nvSpPr>
-        <p:spPr>
-          <a:xfrm>
-            <a:off x="2723948" y="5372100"/>
-            <a:ext cx="14421052" cy="571500"/>
-          </a:xfrm>
-          <a:prstGeom prst="rect">
-            <a:avLst/>
-          </a:prstGeom>
-          <a:solidFill>
-            <a:srgbClr val="FAFBFD"/>
-          </a:solidFill>
-          <a:ln w="9525">
-            <a:solidFill>
-              <a:srgbClr val="DCE1E8"/>
-            </a:solidFill>
-          </a:ln>
-          <a:effectLst/>
-        </p:spPr>
-        <p:txBody>
-          <a:bodyPr rtlCol="0" anchor="ctr" wrap="square"/>
-          <a:lstStyle/>
-          <a:p>
-            <a:pPr algn="ctr"/>
-          </a:p>
-        </p:txBody>
-      </p:sp>
-      <p:sp>
-        <p:nvSpPr>
-          <p:cNvPr id="27" name="TextBox 26"/>
-          <p:cNvSpPr txBox="1"/>
-          <p:nvPr/>
-        </p:nvSpPr>
-        <p:spPr>
-          <a:xfrm>
-            <a:off x="2876348" y="5372100"/>
-            <a:ext cx="14116252" cy="571500"/>
-          </a:xfrm>
-          <a:prstGeom prst="rect">
-            <a:avLst/>
-          </a:prstGeom>
-          <a:noFill/>
-        </p:spPr>
-        <p:txBody>
-          <a:bodyPr wrap="square" lIns="0" rIns="0" tIns="0" bIns="0" anchor="ctr">
-            <a:spAutoFit/>
-          </a:bodyPr>
-          <a:lstStyle/>
-          <a:p>
-            <a:pPr algn="l">
-              <a:lnSpc>
-                <a:spcPct val="115000"/>
-              </a:lnSpc>
-            </a:pPr>
-            <a:r>
-              <a:rPr sz="1800" b="0">
-                <a:solidFill>
-                  <a:srgbClr val="3D3D3D"/>
-                </a:solidFill>
-                <a:latin typeface="Pretendard"/>
-                <a:ea typeface="Pretendard"/>
-                <a:cs typeface="Pretendard"/>
-              </a:rPr>
-              <a:t>mc ls m/warehouse/test-many/ | grep -c parquet</a:t>
-            </a:r>
-          </a:p>
-        </p:txBody>
-      </p:sp>
-      <p:sp>
-        <p:nvSpPr>
-          <p:cNvPr id="28" name="TextBox 27"/>
-          <p:cNvSpPr txBox="1"/>
-          <p:nvPr/>
-        </p:nvSpPr>
-        <p:spPr>
-          <a:xfrm>
-            <a:off x="1143000" y="7620000"/>
-            <a:ext cx="16002000" cy="342900"/>
-          </a:xfrm>
-          <a:prstGeom prst="rect">
-            <a:avLst/>
-          </a:prstGeom>
-          <a:noFill/>
-        </p:spPr>
-        <p:txBody>
-          <a:bodyPr wrap="square" lIns="0" rIns="0" tIns="0" bIns="0" anchor="t">
-            <a:spAutoFit/>
-          </a:bodyPr>
-          <a:lstStyle/>
-          <a:p>
-            <a:pPr algn="l">
-              <a:lnSpc>
-                <a:spcPct val="100000"/>
-              </a:lnSpc>
-            </a:pPr>
-            <a:r>
-              <a:rPr sz="1875" b="1">
+              <a:rPr sz="1725" b="1">
                 <a:solidFill>
                   <a:srgbClr val="7D7D7D"/>
                 </a:solidFill>
@@ -11843,14 +13695,14 @@
                 <a:ea typeface="Pretendard"/>
                 <a:cs typeface="Pretendard"/>
               </a:rPr>
-              <a:t>test-many 는 여러 개, test-one 은 1개 — 4주차의 rewrite_data_files 가 이 문제를 뒤늦게 고치던 도구</a:t>
-            </a:r>
-          </a:p>
-        </p:txBody>
-      </p:sp>
-      <p:sp>
-        <p:nvSpPr>
-          <p:cNvPr id="29" name="Rectangle 28"/>
+              <a:t>groupBy().count() 는 조각마다 미리 세어 보내 스큐가 잘 안 드러난다 · 해결책 솔팅은 개념만</a:t>
+            </a:r>
+          </a:p>
+        </p:txBody>
+      </p:sp>
+      <p:sp>
+        <p:nvSpPr>
+          <p:cNvPr id="28" name="Rectangle 27"/>
           <p:cNvSpPr/>
           <p:nvPr/>
         </p:nvSpPr>
@@ -11880,7 +13732,7 @@
       </p:sp>
       <p:sp>
         <p:nvSpPr>
-          <p:cNvPr id="30" name="TextBox 29"/>
+          <p:cNvPr id="29" name="TextBox 28"/>
           <p:cNvSpPr txBox="1"/>
           <p:nvPr/>
         </p:nvSpPr>
@@ -11921,7 +13773,7 @@
       </p:sp>
       <p:sp>
         <p:nvSpPr>
-          <p:cNvPr id="31" name="TextBox 30"/>
+          <p:cNvPr id="30" name="TextBox 29"/>
           <p:cNvSpPr txBox="1"/>
           <p:nvPr/>
         </p:nvSpPr>
@@ -12104,7 +13956,7 @@
                 <a:ea typeface="Pretendard"/>
                 <a:cs typeface="Pretendard"/>
               </a:rPr>
-              <a:t>확인 포인트</a:t>
+              <a:t>6단계</a:t>
             </a:r>
           </a:p>
         </p:txBody>
@@ -12145,7 +13997,7 @@
                 <a:ea typeface="Pretendard"/>
                 <a:cs typeface="Pretendard"/>
               </a:rPr>
-              <a:t>이 1.5시간이 끝날 때 확인할 것</a:t>
+              <a:t>저장 직전 파티션 수 = 파일 수</a:t>
             </a:r>
           </a:p>
         </p:txBody>
@@ -12188,12 +14040,12 @@
         </p:nvSpPr>
         <p:spPr>
           <a:xfrm>
-            <a:off x="1143000" y="2867025"/>
-            <a:ext cx="16002000" cy="742950"/>
+            <a:off x="1143000" y="2933700"/>
+            <a:ext cx="11430000" cy="1095375"/>
           </a:xfrm>
           <a:prstGeom prst="roundRect">
             <a:avLst>
-              <a:gd name="adj" fmla="val 6410"/>
+              <a:gd name="adj" fmla="val 4347"/>
             </a:avLst>
           </a:prstGeom>
           <a:solidFill>
@@ -12222,8 +14074,8 @@
         </p:nvSpPr>
         <p:spPr>
           <a:xfrm>
-            <a:off x="1390650" y="2971800"/>
-            <a:ext cx="533400" cy="533400"/>
+            <a:off x="1447800" y="3181350"/>
+            <a:ext cx="590550" cy="590550"/>
           </a:xfrm>
           <a:prstGeom prst="ellipse">
             <a:avLst/>
@@ -12252,8 +14104,8 @@
         </p:nvSpPr>
         <p:spPr>
           <a:xfrm>
-            <a:off x="1390650" y="3095625"/>
-            <a:ext cx="533400" cy="323850"/>
+            <a:off x="1447800" y="3333750"/>
+            <a:ext cx="590550" cy="323850"/>
           </a:xfrm>
           <a:prstGeom prst="rect">
             <a:avLst/>
@@ -12272,7 +14124,7 @@
               </a:lnSpc>
             </a:pPr>
             <a:r>
-              <a:rPr sz="2100" b="1">
+              <a:rPr sz="2250" b="1">
                 <a:solidFill>
                   <a:srgbClr val="FFFFFF"/>
                 </a:solidFill>
@@ -12293,27 +14145,27 @@
         </p:nvSpPr>
         <p:spPr>
           <a:xfrm>
-            <a:off x="2190750" y="2867025"/>
-            <a:ext cx="14573250" cy="742950"/>
-          </a:xfrm>
-          <a:prstGeom prst="rect">
-            <a:avLst/>
-          </a:prstGeom>
-          <a:noFill/>
-        </p:spPr>
-        <p:txBody>
-          <a:bodyPr wrap="square" lIns="0" rIns="0" tIns="0" bIns="0" anchor="ctr">
+            <a:off x="2324100" y="3143250"/>
+            <a:ext cx="9906000" cy="400050"/>
+          </a:xfrm>
+          <a:prstGeom prst="rect">
+            <a:avLst/>
+          </a:prstGeom>
+          <a:noFill/>
+        </p:spPr>
+        <p:txBody>
+          <a:bodyPr wrap="square" lIns="0" rIns="0" tIns="0" bIns="0" anchor="t">
             <a:spAutoFit/>
           </a:bodyPr>
           <a:lstStyle/>
           <a:p>
             <a:pPr algn="l">
               <a:lnSpc>
-                <a:spcPct val="100000"/>
-              </a:lnSpc>
-            </a:pPr>
-            <a:r>
-              <a:rPr sz="2100" b="1">
+                <a:spcPct val="110000"/>
+              </a:lnSpc>
+            </a:pPr>
+            <a:r>
+              <a:rPr sz="2475" b="1">
                 <a:solidFill>
                   <a:srgbClr val="0D2B5E"/>
                 </a:solidFill>
@@ -12321,25 +14173,66 @@
                 <a:ea typeface="Pretendard"/>
                 <a:cs typeface="Pretendard"/>
               </a:rPr>
-              <a:t>repartition(8) 후 8, coalesce(2) 후 2, coalesce(16) 후에도 2</a:t>
-            </a:r>
-          </a:p>
-        </p:txBody>
-      </p:sp>
-      <p:sp>
-        <p:nvSpPr>
-          <p:cNvPr id="12" name="Rounded Rectangle 11"/>
+              <a:t>coalesce(1) 로 test-one 저장</a:t>
+            </a:r>
+          </a:p>
+        </p:txBody>
+      </p:sp>
+      <p:sp>
+        <p:nvSpPr>
+          <p:cNvPr id="12" name="TextBox 11"/>
+          <p:cNvSpPr txBox="1"/>
+          <p:nvPr/>
+        </p:nvSpPr>
+        <p:spPr>
+          <a:xfrm>
+            <a:off x="2324100" y="3543300"/>
+            <a:ext cx="9906000" cy="361950"/>
+          </a:xfrm>
+          <a:prstGeom prst="rect">
+            <a:avLst/>
+          </a:prstGeom>
+          <a:noFill/>
+        </p:spPr>
+        <p:txBody>
+          <a:bodyPr wrap="square" lIns="0" rIns="0" tIns="0" bIns="0" anchor="t">
+            <a:spAutoFit/>
+          </a:bodyPr>
+          <a:lstStyle/>
+          <a:p>
+            <a:pPr algn="l">
+              <a:lnSpc>
+                <a:spcPct val="120000"/>
+              </a:lnSpc>
+            </a:pPr>
+            <a:r>
+              <a:rPr sz="2025" b="0">
+                <a:solidFill>
+                  <a:srgbClr val="3D3D3D"/>
+                </a:solidFill>
+                <a:latin typeface="Pretendard"/>
+                <a:ea typeface="Pretendard"/>
+                <a:cs typeface="Pretendard"/>
+              </a:rPr>
+              <a:t>3단계 (A) 의 test-narrow 와 같은 데이터</a:t>
+            </a:r>
+          </a:p>
+        </p:txBody>
+      </p:sp>
+      <p:sp>
+        <p:nvSpPr>
+          <p:cNvPr id="13" name="Rounded Rectangle 12"/>
           <p:cNvSpPr/>
           <p:nvPr/>
         </p:nvSpPr>
         <p:spPr>
           <a:xfrm>
-            <a:off x="1143000" y="3724275"/>
-            <a:ext cx="16002000" cy="742950"/>
+            <a:off x="1143000" y="4200525"/>
+            <a:ext cx="11430000" cy="1095375"/>
           </a:xfrm>
           <a:prstGeom prst="roundRect">
             <a:avLst>
-              <a:gd name="adj" fmla="val 6410"/>
+              <a:gd name="adj" fmla="val 4347"/>
             </a:avLst>
           </a:prstGeom>
           <a:solidFill>
@@ -12362,14 +14255,14 @@
       </p:sp>
       <p:sp>
         <p:nvSpPr>
-          <p:cNvPr id="13" name="Oval 12"/>
+          <p:cNvPr id="14" name="Oval 13"/>
           <p:cNvSpPr/>
           <p:nvPr/>
         </p:nvSpPr>
         <p:spPr>
           <a:xfrm>
-            <a:off x="1390650" y="3829050"/>
-            <a:ext cx="533400" cy="533400"/>
+            <a:off x="1447800" y="4448175"/>
+            <a:ext cx="590550" cy="590550"/>
           </a:xfrm>
           <a:prstGeom prst="ellipse">
             <a:avLst/>
@@ -12392,14 +14285,14 @@
       </p:sp>
       <p:sp>
         <p:nvSpPr>
-          <p:cNvPr id="14" name="TextBox 13"/>
-          <p:cNvSpPr txBox="1"/>
-          <p:nvPr/>
-        </p:nvSpPr>
-        <p:spPr>
-          <a:xfrm>
-            <a:off x="1390650" y="3952875"/>
-            <a:ext cx="533400" cy="323850"/>
+          <p:cNvPr id="15" name="TextBox 14"/>
+          <p:cNvSpPr txBox="1"/>
+          <p:nvPr/>
+        </p:nvSpPr>
+        <p:spPr>
+          <a:xfrm>
+            <a:off x="1447800" y="4600575"/>
+            <a:ext cx="590550" cy="323850"/>
           </a:xfrm>
           <a:prstGeom prst="rect">
             <a:avLst/>
@@ -12418,7 +14311,7 @@
               </a:lnSpc>
             </a:pPr>
             <a:r>
-              <a:rPr sz="2100" b="1">
+              <a:rPr sz="2250" b="1">
                 <a:solidFill>
                   <a:srgbClr val="FFFFFF"/>
                 </a:solidFill>
@@ -12433,33 +14326,33 @@
       </p:sp>
       <p:sp>
         <p:nvSpPr>
-          <p:cNvPr id="15" name="TextBox 14"/>
-          <p:cNvSpPr txBox="1"/>
-          <p:nvPr/>
-        </p:nvSpPr>
-        <p:spPr>
-          <a:xfrm>
-            <a:off x="2190750" y="3724275"/>
-            <a:ext cx="14573250" cy="742950"/>
-          </a:xfrm>
-          <a:prstGeom prst="rect">
-            <a:avLst/>
-          </a:prstGeom>
-          <a:noFill/>
-        </p:spPr>
-        <p:txBody>
-          <a:bodyPr wrap="square" lIns="0" rIns="0" tIns="0" bIns="0" anchor="ctr">
+          <p:cNvPr id="16" name="TextBox 15"/>
+          <p:cNvSpPr txBox="1"/>
+          <p:nvPr/>
+        </p:nvSpPr>
+        <p:spPr>
+          <a:xfrm>
+            <a:off x="2324100" y="4410075"/>
+            <a:ext cx="9906000" cy="400050"/>
+          </a:xfrm>
+          <a:prstGeom prst="rect">
+            <a:avLst/>
+          </a:prstGeom>
+          <a:noFill/>
+        </p:spPr>
+        <p:txBody>
+          <a:bodyPr wrap="square" lIns="0" rIns="0" tIns="0" bIns="0" anchor="t">
             <a:spAutoFit/>
           </a:bodyPr>
           <a:lstStyle/>
           <a:p>
             <a:pPr algn="l">
               <a:lnSpc>
-                <a:spcPct val="100000"/>
-              </a:lnSpc>
-            </a:pPr>
-            <a:r>
-              <a:rPr sz="2100" b="1">
+                <a:spcPct val="110000"/>
+              </a:lnSpc>
+            </a:pPr>
+            <a:r>
+              <a:rPr sz="2475" b="1">
                 <a:solidFill>
                   <a:srgbClr val="0D2B5E"/>
                 </a:solidFill>
@@ -12467,25 +14360,66 @@
                 <a:ea typeface="Pretendard"/>
                 <a:cs typeface="Pretendard"/>
               </a:rPr>
-              <a:t>repartition 은 고르게, coalesce 는 치우친 분포</a:t>
-            </a:r>
-          </a:p>
-        </p:txBody>
-      </p:sp>
-      <p:sp>
-        <p:nvSpPr>
-          <p:cNvPr id="16" name="Rounded Rectangle 15"/>
+              <a:t>새 터미널에서 mc find … | wc -l</a:t>
+            </a:r>
+          </a:p>
+        </p:txBody>
+      </p:sp>
+      <p:sp>
+        <p:nvSpPr>
+          <p:cNvPr id="17" name="TextBox 16"/>
+          <p:cNvSpPr txBox="1"/>
+          <p:nvPr/>
+        </p:nvSpPr>
+        <p:spPr>
+          <a:xfrm>
+            <a:off x="2324100" y="4810125"/>
+            <a:ext cx="9906000" cy="361950"/>
+          </a:xfrm>
+          <a:prstGeom prst="rect">
+            <a:avLst/>
+          </a:prstGeom>
+          <a:noFill/>
+        </p:spPr>
+        <p:txBody>
+          <a:bodyPr wrap="square" lIns="0" rIns="0" tIns="0" bIns="0" anchor="t">
+            <a:spAutoFit/>
+          </a:bodyPr>
+          <a:lstStyle/>
+          <a:p>
+            <a:pPr algn="l">
+              <a:lnSpc>
+                <a:spcPct val="120000"/>
+              </a:lnSpc>
+            </a:pPr>
+            <a:r>
+              <a:rPr sz="2025" b="0">
+                <a:solidFill>
+                  <a:srgbClr val="3D3D3D"/>
+                </a:solidFill>
+                <a:latin typeface="Pretendard"/>
+                <a:ea typeface="Pretendard"/>
+                <a:cs typeface="Pretendard"/>
+              </a:rPr>
+              <a:t>test-narrow: 4 · test-one: 1</a:t>
+            </a:r>
+          </a:p>
+        </p:txBody>
+      </p:sp>
+      <p:sp>
+        <p:nvSpPr>
+          <p:cNvPr id="18" name="Rounded Rectangle 17"/>
           <p:cNvSpPr/>
           <p:nvPr/>
         </p:nvSpPr>
         <p:spPr>
           <a:xfrm>
-            <a:off x="1143000" y="4581525"/>
-            <a:ext cx="16002000" cy="742950"/>
+            <a:off x="1143000" y="5467350"/>
+            <a:ext cx="11430000" cy="1095375"/>
           </a:xfrm>
           <a:prstGeom prst="roundRect">
             <a:avLst>
-              <a:gd name="adj" fmla="val 6410"/>
+              <a:gd name="adj" fmla="val 4347"/>
             </a:avLst>
           </a:prstGeom>
           <a:solidFill>
@@ -12508,14 +14442,14 @@
       </p:sp>
       <p:sp>
         <p:nvSpPr>
-          <p:cNvPr id="17" name="Oval 16"/>
+          <p:cNvPr id="19" name="Oval 18"/>
           <p:cNvSpPr/>
           <p:nvPr/>
         </p:nvSpPr>
         <p:spPr>
           <a:xfrm>
-            <a:off x="1390650" y="4686300"/>
-            <a:ext cx="533400" cy="533400"/>
+            <a:off x="1447800" y="5715000"/>
+            <a:ext cx="590550" cy="590550"/>
           </a:xfrm>
           <a:prstGeom prst="ellipse">
             <a:avLst/>
@@ -12538,14 +14472,14 @@
       </p:sp>
       <p:sp>
         <p:nvSpPr>
-          <p:cNvPr id="18" name="TextBox 17"/>
-          <p:cNvSpPr txBox="1"/>
-          <p:nvPr/>
-        </p:nvSpPr>
-        <p:spPr>
-          <a:xfrm>
-            <a:off x="1390650" y="4810125"/>
-            <a:ext cx="533400" cy="323850"/>
+          <p:cNvPr id="20" name="TextBox 19"/>
+          <p:cNvSpPr txBox="1"/>
+          <p:nvPr/>
+        </p:nvSpPr>
+        <p:spPr>
+          <a:xfrm>
+            <a:off x="1447800" y="5867400"/>
+            <a:ext cx="590550" cy="323850"/>
           </a:xfrm>
           <a:prstGeom prst="rect">
             <a:avLst/>
@@ -12564,7 +14498,7 @@
               </a:lnSpc>
             </a:pPr>
             <a:r>
-              <a:rPr sz="2100" b="1">
+              <a:rPr sz="2250" b="1">
                 <a:solidFill>
                   <a:srgbClr val="FFFFFF"/>
                 </a:solidFill>
@@ -12579,33 +14513,33 @@
       </p:sp>
       <p:sp>
         <p:nvSpPr>
-          <p:cNvPr id="19" name="TextBox 18"/>
-          <p:cNvSpPr txBox="1"/>
-          <p:nvPr/>
-        </p:nvSpPr>
-        <p:spPr>
-          <a:xfrm>
-            <a:off x="2190750" y="4581525"/>
-            <a:ext cx="14573250" cy="742950"/>
-          </a:xfrm>
-          <a:prstGeom prst="rect">
-            <a:avLst/>
-          </a:prstGeom>
-          <a:noFill/>
-        </p:spPr>
-        <p:txBody>
-          <a:bodyPr wrap="square" lIns="0" rIns="0" tIns="0" bIns="0" anchor="ctr">
+          <p:cNvPr id="21" name="TextBox 20"/>
+          <p:cNvSpPr txBox="1"/>
+          <p:nvPr/>
+        </p:nvSpPr>
+        <p:spPr>
+          <a:xfrm>
+            <a:off x="2324100" y="5676900"/>
+            <a:ext cx="9906000" cy="400050"/>
+          </a:xfrm>
+          <a:prstGeom prst="rect">
+            <a:avLst/>
+          </a:prstGeom>
+          <a:noFill/>
+        </p:spPr>
+        <p:txBody>
+          <a:bodyPr wrap="square" lIns="0" rIns="0" tIns="0" bIns="0" anchor="t">
             <a:spAutoFit/>
           </a:bodyPr>
           <a:lstStyle/>
           <a:p>
             <a:pPr algn="l">
               <a:lnSpc>
-                <a:spcPct val="100000"/>
-              </a:lnSpc>
-            </a:pPr>
-            <a:r>
-              <a:rPr sz="2100" b="1">
+                <a:spcPct val="110000"/>
+              </a:lnSpc>
+            </a:pPr>
+            <a:r>
+              <a:rPr sz="2475" b="1">
                 <a:solidFill>
                   <a:srgbClr val="0D2B5E"/>
                 </a:solidFill>
@@ -12613,33 +14547,74 @@
                 <a:ea typeface="Pretendard"/>
                 <a:cs typeface="Pretendard"/>
               </a:rPr>
-              <a:t>groupBy 는 Stage 2개 · Shuffle Write/Read 가 기록된다</a:t>
-            </a:r>
-          </a:p>
-        </p:txBody>
-      </p:sp>
-      <p:sp>
-        <p:nvSpPr>
-          <p:cNvPr id="20" name="Rounded Rectangle 19"/>
+              <a:t>grep 으로 세면 command not found</a:t>
+            </a:r>
+          </a:p>
+        </p:txBody>
+      </p:sp>
+      <p:sp>
+        <p:nvSpPr>
+          <p:cNvPr id="22" name="TextBox 21"/>
+          <p:cNvSpPr txBox="1"/>
+          <p:nvPr/>
+        </p:nvSpPr>
+        <p:spPr>
+          <a:xfrm>
+            <a:off x="2324100" y="6076950"/>
+            <a:ext cx="9906000" cy="361950"/>
+          </a:xfrm>
+          <a:prstGeom prst="rect">
+            <a:avLst/>
+          </a:prstGeom>
+          <a:noFill/>
+        </p:spPr>
+        <p:txBody>
+          <a:bodyPr wrap="square" lIns="0" rIns="0" tIns="0" bIns="0" anchor="t">
+            <a:spAutoFit/>
+          </a:bodyPr>
+          <a:lstStyle/>
+          <a:p>
+            <a:pPr algn="l">
+              <a:lnSpc>
+                <a:spcPct val="120000"/>
+              </a:lnSpc>
+            </a:pPr>
+            <a:r>
+              <a:rPr sz="2025" b="0">
+                <a:solidFill>
+                  <a:srgbClr val="3D3D3D"/>
+                </a:solidFill>
+                <a:latin typeface="Pretendard"/>
+                <a:ea typeface="Pretendard"/>
+                <a:cs typeface="Pretendard"/>
+              </a:rPr>
+              <a:t>mc 이미지 안에는 grep 이 없다 — mc find 와 wc -l 로 센다</a:t>
+            </a:r>
+          </a:p>
+        </p:txBody>
+      </p:sp>
+      <p:sp>
+        <p:nvSpPr>
+          <p:cNvPr id="23" name="Rounded Rectangle 22"/>
           <p:cNvSpPr/>
           <p:nvPr/>
         </p:nvSpPr>
         <p:spPr>
           <a:xfrm>
-            <a:off x="1143000" y="5438775"/>
-            <a:ext cx="16002000" cy="742950"/>
+            <a:off x="13144500" y="2933700"/>
+            <a:ext cx="4000500" cy="3629025"/>
           </a:xfrm>
           <a:prstGeom prst="roundRect">
             <a:avLst>
-              <a:gd name="adj" fmla="val 6410"/>
+              <a:gd name="adj" fmla="val 1312"/>
             </a:avLst>
           </a:prstGeom>
           <a:solidFill>
-            <a:srgbClr val="FAFBFD"/>
+            <a:srgbClr val="EDF3FD"/>
           </a:solidFill>
           <a:ln w="9525">
             <a:solidFill>
-              <a:srgbClr val="DCE1E8"/>
+              <a:srgbClr val="BFD3F5"/>
             </a:solidFill>
           </a:ln>
           <a:effectLst/>
@@ -12654,20 +14629,120 @@
       </p:sp>
       <p:sp>
         <p:nvSpPr>
-          <p:cNvPr id="21" name="Oval 20"/>
+          <p:cNvPr id="24" name="TextBox 23"/>
+          <p:cNvSpPr txBox="1"/>
+          <p:nvPr/>
+        </p:nvSpPr>
+        <p:spPr>
+          <a:xfrm>
+            <a:off x="13487400" y="3929062"/>
+            <a:ext cx="3314700" cy="304800"/>
+          </a:xfrm>
+          <a:prstGeom prst="rect">
+            <a:avLst/>
+          </a:prstGeom>
+          <a:noFill/>
+        </p:spPr>
+        <p:txBody>
+          <a:bodyPr wrap="square" lIns="0" rIns="0" tIns="0" bIns="0" anchor="t">
+            <a:spAutoFit/>
+          </a:bodyPr>
+          <a:lstStyle/>
+          <a:p>
+            <a:pPr algn="l">
+              <a:lnSpc>
+                <a:spcPct val="100000"/>
+              </a:lnSpc>
+            </a:pPr>
+            <a:r>
+              <a:rPr sz="1800" b="1" spc="190">
+                <a:solidFill>
+                  <a:srgbClr val="1E5BC6"/>
+                </a:solidFill>
+                <a:latin typeface="Pretendard"/>
+                <a:ea typeface="Pretendard"/>
+                <a:cs typeface="Pretendard"/>
+              </a:rPr>
+              <a:t>작은 파일 문제</a:t>
+            </a:r>
+          </a:p>
+        </p:txBody>
+      </p:sp>
+      <p:sp>
+        <p:nvSpPr>
+          <p:cNvPr id="25" name="TextBox 24"/>
+          <p:cNvSpPr txBox="1"/>
+          <p:nvPr/>
+        </p:nvSpPr>
+        <p:spPr>
+          <a:xfrm>
+            <a:off x="13487400" y="4329112"/>
+            <a:ext cx="3314700" cy="1238250"/>
+          </a:xfrm>
+          <a:prstGeom prst="rect">
+            <a:avLst/>
+          </a:prstGeom>
+          <a:noFill/>
+        </p:spPr>
+        <p:txBody>
+          <a:bodyPr wrap="square" lIns="0" rIns="0" tIns="0" bIns="0" anchor="t">
+            <a:spAutoFit/>
+          </a:bodyPr>
+          <a:lstStyle/>
+          <a:p>
+            <a:pPr algn="l">
+              <a:lnSpc>
+                <a:spcPct val="138000"/>
+              </a:lnSpc>
+            </a:pPr>
+            <a:r>
+              <a:rPr sz="2700" b="1">
+                <a:solidFill>
+                  <a:srgbClr val="0D2B5E"/>
+                </a:solidFill>
+                <a:latin typeface="Pretendard"/>
+                <a:ea typeface="Pretendard"/>
+                <a:cs typeface="Pretendard"/>
+              </a:rPr>
+              <a:t>4주차</a:t>
+            </a:r>
+          </a:p>
+          <a:p>
+            <a:pPr algn="l">
+              <a:lnSpc>
+                <a:spcPct val="138000"/>
+              </a:lnSpc>
+            </a:pPr>
+            <a:r>
+              <a:rPr sz="2700" b="1">
+                <a:solidFill>
+                  <a:srgbClr val="0D2B5E"/>
+                </a:solidFill>
+                <a:latin typeface="Pretendard"/>
+                <a:ea typeface="Pretendard"/>
+                <a:cs typeface="Pretendard"/>
+              </a:rPr>
+              <a:t>rewrite_data_files</a:t>
+            </a:r>
+          </a:p>
+        </p:txBody>
+      </p:sp>
+      <p:sp>
+        <p:nvSpPr>
+          <p:cNvPr id="26" name="Rectangle 25"/>
           <p:cNvSpPr/>
           <p:nvPr/>
         </p:nvSpPr>
         <p:spPr>
           <a:xfrm>
-            <a:off x="1390650" y="5543550"/>
-            <a:ext cx="533400" cy="533400"/>
-          </a:xfrm>
-          <a:prstGeom prst="ellipse">
-            <a:avLst/>
-          </a:prstGeom>
-          <a:solidFill>
-            <a:srgbClr val="0D2B5E"/>
+            <a:off x="1143000" y="8058150"/>
+            <a:ext cx="16002000" cy="9525"/>
+          </a:xfrm>
+          <a:prstGeom prst="rect">
+            <a:avLst/>
+          </a:prstGeom>
+          <a:solidFill>
+            <a:srgbClr val="DCE1E8"/>
           </a:solidFill>
           <a:ln>
             <a:noFill/>
@@ -12684,411 +14759,7 @@
       </p:sp>
       <p:sp>
         <p:nvSpPr>
-          <p:cNvPr id="22" name="TextBox 21"/>
-          <p:cNvSpPr txBox="1"/>
-          <p:nvPr/>
-        </p:nvSpPr>
-        <p:spPr>
-          <a:xfrm>
-            <a:off x="1390650" y="5667375"/>
-            <a:ext cx="533400" cy="323850"/>
-          </a:xfrm>
-          <a:prstGeom prst="rect">
-            <a:avLst/>
-          </a:prstGeom>
-          <a:noFill/>
-        </p:spPr>
-        <p:txBody>
-          <a:bodyPr wrap="square" lIns="0" rIns="0" tIns="0" bIns="0" anchor="t">
-            <a:spAutoFit/>
-          </a:bodyPr>
-          <a:lstStyle/>
-          <a:p>
-            <a:pPr algn="ctr">
-              <a:lnSpc>
-                <a:spcPct val="100000"/>
-              </a:lnSpc>
-            </a:pPr>
-            <a:r>
-              <a:rPr sz="2100" b="1">
-                <a:solidFill>
-                  <a:srgbClr val="FFFFFF"/>
-                </a:solidFill>
-                <a:latin typeface="Pretendard"/>
-                <a:ea typeface="Pretendard"/>
-                <a:cs typeface="Pretendard"/>
-              </a:rPr>
-              <a:t>4</a:t>
-            </a:r>
-          </a:p>
-        </p:txBody>
-      </p:sp>
-      <p:sp>
-        <p:nvSpPr>
-          <p:cNvPr id="23" name="TextBox 22"/>
-          <p:cNvSpPr txBox="1"/>
-          <p:nvPr/>
-        </p:nvSpPr>
-        <p:spPr>
-          <a:xfrm>
-            <a:off x="2190750" y="5438775"/>
-            <a:ext cx="14573250" cy="742950"/>
-          </a:xfrm>
-          <a:prstGeom prst="rect">
-            <a:avLst/>
-          </a:prstGeom>
-          <a:noFill/>
-        </p:spPr>
-        <p:txBody>
-          <a:bodyPr wrap="square" lIns="0" rIns="0" tIns="0" bIns="0" anchor="ctr">
-            <a:spAutoFit/>
-          </a:bodyPr>
-          <a:lstStyle/>
-          <a:p>
-            <a:pPr algn="l">
-              <a:lnSpc>
-                <a:spcPct val="100000"/>
-              </a:lnSpc>
-            </a:pPr>
-            <a:r>
-              <a:rPr sz="2100" b="1">
-                <a:solidFill>
-                  <a:srgbClr val="0D2B5E"/>
-                </a:solidFill>
-                <a:latin typeface="Pretendard"/>
-                <a:ea typeface="Pretendard"/>
-                <a:cs typeface="Pretendard"/>
-              </a:rPr>
-              <a:t>shuffle.partitions 가 작을수록 빠른 경향(AQE 면 차이 작음)</a:t>
-            </a:r>
-          </a:p>
-        </p:txBody>
-      </p:sp>
-      <p:sp>
-        <p:nvSpPr>
-          <p:cNvPr id="24" name="Rounded Rectangle 23"/>
-          <p:cNvSpPr/>
-          <p:nvPr/>
-        </p:nvSpPr>
-        <p:spPr>
-          <a:xfrm>
-            <a:off x="1143000" y="6296025"/>
-            <a:ext cx="16002000" cy="742950"/>
-          </a:xfrm>
-          <a:prstGeom prst="roundRect">
-            <a:avLst>
-              <a:gd name="adj" fmla="val 6410"/>
-            </a:avLst>
-          </a:prstGeom>
-          <a:solidFill>
-            <a:srgbClr val="FAFBFD"/>
-          </a:solidFill>
-          <a:ln w="9525">
-            <a:solidFill>
-              <a:srgbClr val="DCE1E8"/>
-            </a:solidFill>
-          </a:ln>
-          <a:effectLst/>
-        </p:spPr>
-        <p:txBody>
-          <a:bodyPr rtlCol="0" anchor="ctr" wrap="square"/>
-          <a:lstStyle/>
-          <a:p>
-            <a:pPr algn="ctr"/>
-          </a:p>
-        </p:txBody>
-      </p:sp>
-      <p:sp>
-        <p:nvSpPr>
-          <p:cNvPr id="25" name="Oval 24"/>
-          <p:cNvSpPr/>
-          <p:nvPr/>
-        </p:nvSpPr>
-        <p:spPr>
-          <a:xfrm>
-            <a:off x="1390650" y="6400800"/>
-            <a:ext cx="533400" cy="533400"/>
-          </a:xfrm>
-          <a:prstGeom prst="ellipse">
-            <a:avLst/>
-          </a:prstGeom>
-          <a:solidFill>
-            <a:srgbClr val="0D2B5E"/>
-          </a:solidFill>
-          <a:ln>
-            <a:noFill/>
-          </a:ln>
-          <a:effectLst/>
-        </p:spPr>
-        <p:txBody>
-          <a:bodyPr rtlCol="0" anchor="ctr" wrap="square"/>
-          <a:lstStyle/>
-          <a:p>
-            <a:pPr algn="ctr"/>
-          </a:p>
-        </p:txBody>
-      </p:sp>
-      <p:sp>
-        <p:nvSpPr>
-          <p:cNvPr id="26" name="TextBox 25"/>
-          <p:cNvSpPr txBox="1"/>
-          <p:nvPr/>
-        </p:nvSpPr>
-        <p:spPr>
-          <a:xfrm>
-            <a:off x="1390650" y="6524625"/>
-            <a:ext cx="533400" cy="323850"/>
-          </a:xfrm>
-          <a:prstGeom prst="rect">
-            <a:avLst/>
-          </a:prstGeom>
-          <a:noFill/>
-        </p:spPr>
-        <p:txBody>
-          <a:bodyPr wrap="square" lIns="0" rIns="0" tIns="0" bIns="0" anchor="t">
-            <a:spAutoFit/>
-          </a:bodyPr>
-          <a:lstStyle/>
-          <a:p>
-            <a:pPr algn="ctr">
-              <a:lnSpc>
-                <a:spcPct val="100000"/>
-              </a:lnSpc>
-            </a:pPr>
-            <a:r>
-              <a:rPr sz="2100" b="1">
-                <a:solidFill>
-                  <a:srgbClr val="FFFFFF"/>
-                </a:solidFill>
-                <a:latin typeface="Pretendard"/>
-                <a:ea typeface="Pretendard"/>
-                <a:cs typeface="Pretendard"/>
-              </a:rPr>
-              <a:t>5</a:t>
-            </a:r>
-          </a:p>
-        </p:txBody>
-      </p:sp>
-      <p:sp>
-        <p:nvSpPr>
           <p:cNvPr id="27" name="TextBox 26"/>
-          <p:cNvSpPr txBox="1"/>
-          <p:nvPr/>
-        </p:nvSpPr>
-        <p:spPr>
-          <a:xfrm>
-            <a:off x="2190750" y="6296025"/>
-            <a:ext cx="14573250" cy="742950"/>
-          </a:xfrm>
-          <a:prstGeom prst="rect">
-            <a:avLst/>
-          </a:prstGeom>
-          <a:noFill/>
-        </p:spPr>
-        <p:txBody>
-          <a:bodyPr wrap="square" lIns="0" rIns="0" tIns="0" bIns="0" anchor="ctr">
-            <a:spAutoFit/>
-          </a:bodyPr>
-          <a:lstStyle/>
-          <a:p>
-            <a:pPr algn="l">
-              <a:lnSpc>
-                <a:spcPct val="100000"/>
-              </a:lnSpc>
-            </a:pPr>
-            <a:r>
-              <a:rPr sz="2100" b="1">
-                <a:solidFill>
-                  <a:srgbClr val="0D2B5E"/>
-                </a:solidFill>
-                <a:latin typeface="Pretendard"/>
-                <a:ea typeface="Pretendard"/>
-                <a:cs typeface="Pretendard"/>
-              </a:rPr>
-              <a:t>스큐 쪽이 느리고 Task Max 가 Median 보다 훨씬 크다</a:t>
-            </a:r>
-          </a:p>
-        </p:txBody>
-      </p:sp>
-      <p:sp>
-        <p:nvSpPr>
-          <p:cNvPr id="28" name="Rounded Rectangle 27"/>
-          <p:cNvSpPr/>
-          <p:nvPr/>
-        </p:nvSpPr>
-        <p:spPr>
-          <a:xfrm>
-            <a:off x="1143000" y="7153275"/>
-            <a:ext cx="16002000" cy="742950"/>
-          </a:xfrm>
-          <a:prstGeom prst="roundRect">
-            <a:avLst>
-              <a:gd name="adj" fmla="val 6410"/>
-            </a:avLst>
-          </a:prstGeom>
-          <a:solidFill>
-            <a:srgbClr val="FAFBFD"/>
-          </a:solidFill>
-          <a:ln w="9525">
-            <a:solidFill>
-              <a:srgbClr val="DCE1E8"/>
-            </a:solidFill>
-          </a:ln>
-          <a:effectLst/>
-        </p:spPr>
-        <p:txBody>
-          <a:bodyPr rtlCol="0" anchor="ctr" wrap="square"/>
-          <a:lstStyle/>
-          <a:p>
-            <a:pPr algn="ctr"/>
-          </a:p>
-        </p:txBody>
-      </p:sp>
-      <p:sp>
-        <p:nvSpPr>
-          <p:cNvPr id="29" name="Oval 28"/>
-          <p:cNvSpPr/>
-          <p:nvPr/>
-        </p:nvSpPr>
-        <p:spPr>
-          <a:xfrm>
-            <a:off x="1390650" y="7258050"/>
-            <a:ext cx="533400" cy="533400"/>
-          </a:xfrm>
-          <a:prstGeom prst="ellipse">
-            <a:avLst/>
-          </a:prstGeom>
-          <a:solidFill>
-            <a:srgbClr val="0D2B5E"/>
-          </a:solidFill>
-          <a:ln>
-            <a:noFill/>
-          </a:ln>
-          <a:effectLst/>
-        </p:spPr>
-        <p:txBody>
-          <a:bodyPr rtlCol="0" anchor="ctr" wrap="square"/>
-          <a:lstStyle/>
-          <a:p>
-            <a:pPr algn="ctr"/>
-          </a:p>
-        </p:txBody>
-      </p:sp>
-      <p:sp>
-        <p:nvSpPr>
-          <p:cNvPr id="30" name="TextBox 29"/>
-          <p:cNvSpPr txBox="1"/>
-          <p:nvPr/>
-        </p:nvSpPr>
-        <p:spPr>
-          <a:xfrm>
-            <a:off x="1390650" y="7381875"/>
-            <a:ext cx="533400" cy="323850"/>
-          </a:xfrm>
-          <a:prstGeom prst="rect">
-            <a:avLst/>
-          </a:prstGeom>
-          <a:noFill/>
-        </p:spPr>
-        <p:txBody>
-          <a:bodyPr wrap="square" lIns="0" rIns="0" tIns="0" bIns="0" anchor="t">
-            <a:spAutoFit/>
-          </a:bodyPr>
-          <a:lstStyle/>
-          <a:p>
-            <a:pPr algn="ctr">
-              <a:lnSpc>
-                <a:spcPct val="100000"/>
-              </a:lnSpc>
-            </a:pPr>
-            <a:r>
-              <a:rPr sz="2100" b="1">
-                <a:solidFill>
-                  <a:srgbClr val="FFFFFF"/>
-                </a:solidFill>
-                <a:latin typeface="Pretendard"/>
-                <a:ea typeface="Pretendard"/>
-                <a:cs typeface="Pretendard"/>
-              </a:rPr>
-              <a:t>6</a:t>
-            </a:r>
-          </a:p>
-        </p:txBody>
-      </p:sp>
-      <p:sp>
-        <p:nvSpPr>
-          <p:cNvPr id="31" name="TextBox 30"/>
-          <p:cNvSpPr txBox="1"/>
-          <p:nvPr/>
-        </p:nvSpPr>
-        <p:spPr>
-          <a:xfrm>
-            <a:off x="2190750" y="7153275"/>
-            <a:ext cx="14573250" cy="742950"/>
-          </a:xfrm>
-          <a:prstGeom prst="rect">
-            <a:avLst/>
-          </a:prstGeom>
-          <a:noFill/>
-        </p:spPr>
-        <p:txBody>
-          <a:bodyPr wrap="square" lIns="0" rIns="0" tIns="0" bIns="0" anchor="ctr">
-            <a:spAutoFit/>
-          </a:bodyPr>
-          <a:lstStyle/>
-          <a:p>
-            <a:pPr algn="l">
-              <a:lnSpc>
-                <a:spcPct val="100000"/>
-              </a:lnSpc>
-            </a:pPr>
-            <a:r>
-              <a:rPr sz="2100" b="1">
-                <a:solidFill>
-                  <a:srgbClr val="0D2B5E"/>
-                </a:solidFill>
-                <a:latin typeface="Pretendard"/>
-                <a:ea typeface="Pretendard"/>
-                <a:cs typeface="Pretendard"/>
-              </a:rPr>
-              <a:t>test-one 의 parquet 파일은 1개</a:t>
-            </a:r>
-          </a:p>
-        </p:txBody>
-      </p:sp>
-      <p:sp>
-        <p:nvSpPr>
-          <p:cNvPr id="32" name="Rectangle 31"/>
-          <p:cNvSpPr/>
-          <p:nvPr/>
-        </p:nvSpPr>
-        <p:spPr>
-          <a:xfrm>
-            <a:off x="1143000" y="8058150"/>
-            <a:ext cx="16002000" cy="9525"/>
-          </a:xfrm>
-          <a:prstGeom prst="rect">
-            <a:avLst/>
-          </a:prstGeom>
-          <a:solidFill>
-            <a:srgbClr val="DCE1E8"/>
-          </a:solidFill>
-          <a:ln>
-            <a:noFill/>
-          </a:ln>
-          <a:effectLst/>
-        </p:spPr>
-        <p:txBody>
-          <a:bodyPr rtlCol="0" anchor="ctr" wrap="square"/>
-          <a:lstStyle/>
-          <a:p>
-            <a:pPr algn="ctr"/>
-          </a:p>
-        </p:txBody>
-      </p:sp>
-      <p:sp>
-        <p:nvSpPr>
-          <p:cNvPr id="33" name="TextBox 32"/>
           <p:cNvSpPr txBox="1"/>
           <p:nvPr/>
         </p:nvSpPr>
@@ -13129,7 +14800,7 @@
       </p:sp>
       <p:sp>
         <p:nvSpPr>
-          <p:cNvPr id="34" name="TextBox 33"/>
+          <p:cNvPr id="28" name="TextBox 27"/>
           <p:cNvSpPr txBox="1"/>
           <p:nvPr/>
         </p:nvSpPr>
